--- a/6G-DALI_NATWORK_Hackathon_Presentation_Final.pptx
+++ b/6G-DALI_NATWORK_Hackathon_Presentation_Final.pptx
@@ -18,6 +18,9 @@
     <p:sldId id="263" r:id="rId11"/>
     <p:sldId id="264" r:id="rId12"/>
     <p:sldId id="265" r:id="rId13"/>
+    <p:sldId id="266" r:id="rId15"/>
+    <p:sldId id="267" r:id="rId16"/>
+    <p:sldId id="268" r:id="rId17"/>
   </p:sldIdLst>
   <p:sldSz cx="12192000" cy="6858000"/>
   <p:notesSz cx="6858000" cy="12192000"/>
@@ -4481,6 +4484,3114 @@
               <a:t>Raw PCAP support is not confirmed by the integration guide; coordinate accepted submission format with organizers.</a:t>
             </a:r>
             <a:endParaRPr b="0" lang="en-US" sz="1200" strike="noStrike" u="none">
+              <a:solidFill>
+                <a:srgbClr val="000000"/>
+              </a:solidFill>
+              <a:effectLst/>
+              <a:uFillTx/>
+              <a:latin typeface="Arial"/>
+            </a:endParaRPr>
+          </a:p>
+        </p:txBody>
+      </p:sp>
+    </p:spTree>
+  </p:cSld>
+  <mc:AlternateContent>
+    <mc:Choice Requires="p14">
+      <p:transition spd="slow" p14:dur="2000"/>
+    </mc:Choice>
+    <mc:Fallback>
+      <p:transition spd="slow"/>
+    </mc:Fallback>
+  </mc:AlternateContent>
+</p:sld>
+</file>
+
+<file path=ppt/slides/slide11.xml><?xml version="1.0" encoding="utf-8"?>
+<p:sld xmlns:a="http://schemas.openxmlformats.org/drawingml/2006/main" xmlns:p="http://schemas.openxmlformats.org/presentationml/2006/main" xmlns:r="http://schemas.openxmlformats.org/officeDocument/2006/relationships" xmlns:p14="http://schemas.microsoft.com/office/powerpoint/2010/main" xmlns:p15="http://schemas.microsoft.com/office/powerpoint/2012/main" xmlns:mc="http://schemas.openxmlformats.org/markup-compatibility/2006">
+  <p:cSld>
+    <p:bg>
+      <p:bgPr>
+        <a:solidFill>
+          <a:srgbClr val="ffffff"/>
+        </a:solidFill>
+      </p:bgPr>
+    </p:bg>
+    <p:spTree>
+      <p:nvGrpSpPr>
+        <p:cNvPr id="1" name=""/>
+        <p:cNvGrpSpPr/>
+        <p:nvPr/>
+      </p:nvGrpSpPr>
+      <p:grpSpPr>
+        <a:xfrm>
+          <a:off x="0" y="0"/>
+          <a:ext cx="0" cy="0"/>
+          <a:chOff x="0" y="0"/>
+          <a:chExt cx="0" cy="0"/>
+        </a:xfrm>
+      </p:grpSpPr>
+      <p:sp>
+        <p:nvSpPr>
+          <p:cNvPr id="135" name="Shape 0"/>
+          <p:cNvSpPr/>
+          <p:nvPr/>
+        </p:nvSpPr>
+        <p:spPr>
+          <a:xfrm>
+            <a:off x="0" y="0"/>
+            <a:ext cx="12191400" cy="109440"/>
+          </a:xfrm>
+          <a:prstGeom prst="rect">
+            <a:avLst/>
+          </a:prstGeom>
+          <a:solidFill>
+            <a:srgbClr val="ee791f"/>
+          </a:solidFill>
+          <a:ln w="12700">
+            <a:solidFill>
+              <a:srgbClr val="ee791f"/>
+            </a:solidFill>
+            <a:round/>
+          </a:ln>
+        </p:spPr>
+        <p:style>
+          <a:lnRef idx="0"/>
+          <a:fillRef idx="0"/>
+          <a:effectRef idx="0"/>
+          <a:fontRef idx="minor"/>
+        </p:style>
+        <p:txBody>
+          <a:bodyPr lIns="90000" rIns="90000" tIns="45000" bIns="45000" anchor="t">
+            <a:noAutofit/>
+          </a:bodyPr>
+          <a:p>
+            <a:endParaRPr b="0" lang="en-US" sz="1800" strike="noStrike" u="none">
+              <a:solidFill>
+                <a:srgbClr val="ffffff"/>
+              </a:solidFill>
+              <a:effectLst/>
+              <a:uFillTx/>
+              <a:latin typeface="Arial"/>
+            </a:endParaRPr>
+          </a:p>
+        </p:txBody>
+      </p:sp>
+      <p:sp>
+        <p:nvSpPr>
+          <p:cNvPr id="136" name="Text 1"/>
+          <p:cNvSpPr/>
+          <p:nvPr/>
+        </p:nvSpPr>
+        <p:spPr>
+          <a:xfrm>
+            <a:off x="530280" y="311040"/>
+            <a:ext cx="10881000" cy="548280"/>
+          </a:xfrm>
+          <a:prstGeom prst="rect">
+            <a:avLst/>
+          </a:prstGeom>
+          <a:noFill/>
+          <a:ln w="0">
+            <a:noFill/>
+          </a:ln>
+        </p:spPr>
+        <p:style>
+          <a:lnRef idx="0"/>
+          <a:fillRef idx="0"/>
+          <a:effectRef idx="0"/>
+          <a:fontRef idx="minor"/>
+        </p:style>
+        <p:txBody>
+          <a:bodyPr lIns="360" rIns="360" tIns="360" bIns="360" anchor="ctr">
+            <a:normAutofit/>
+          </a:bodyPr>
+          <a:p>
+            <a:pPr defTabSz="914400">
+              <a:lnSpc>
+                <a:spcPct val="100000"/>
+              </a:lnSpc>
+              <a:tabLst>
+                <a:tab algn="l" pos="0"/>
+              </a:tabLst>
+            </a:pPr>
+            <a:r>
+              <a:rPr b="1" lang="en-US" sz="2700" strike="noStrike" u="none">
+                <a:solidFill>
+                  <a:srgbClr val="11233b"/>
+                </a:solidFill>
+                <a:effectLst/>
+                <a:uFillTx/>
+                <a:latin typeface="Aptos"/>
+                <a:ea typeface="Aptos"/>
+              </a:rPr>
+              <a:t>Scale up — generate a reproducible dataset</a:t>
+            </a:r>
+            <a:endParaRPr b="0" lang="en-US" sz="2700" strike="noStrike" u="none">
+              <a:solidFill>
+                <a:srgbClr val="000000"/>
+              </a:solidFill>
+              <a:effectLst/>
+              <a:uFillTx/>
+              <a:latin typeface="Arial"/>
+            </a:endParaRPr>
+          </a:p>
+        </p:txBody>
+      </p:sp>
+      <p:sp>
+        <p:nvSpPr>
+          <p:cNvPr id="137" name="Shape 2"/>
+          <p:cNvSpPr/>
+          <p:nvPr/>
+        </p:nvSpPr>
+        <p:spPr>
+          <a:xfrm>
+            <a:off x="530280" y="951120"/>
+            <a:ext cx="11100600" cy="31680"/>
+          </a:xfrm>
+          <a:prstGeom prst="rect">
+            <a:avLst/>
+          </a:prstGeom>
+          <a:solidFill>
+            <a:srgbClr val="ee791f"/>
+          </a:solidFill>
+          <a:ln w="12700">
+            <a:solidFill>
+              <a:srgbClr val="ee791f"/>
+            </a:solidFill>
+            <a:round/>
+          </a:ln>
+        </p:spPr>
+        <p:style>
+          <a:lnRef idx="0"/>
+          <a:fillRef idx="0"/>
+          <a:effectRef idx="0"/>
+          <a:fontRef idx="minor"/>
+        </p:style>
+        <p:txBody>
+          <a:bodyPr lIns="90000" rIns="90000" tIns="-12960" bIns="-12960" anchor="t">
+            <a:noAutofit/>
+          </a:bodyPr>
+          <a:p>
+            <a:endParaRPr b="0" lang="en-US" sz="1800" strike="noStrike" u="none">
+              <a:solidFill>
+                <a:srgbClr val="ffffff"/>
+              </a:solidFill>
+              <a:effectLst/>
+              <a:uFillTx/>
+              <a:latin typeface="Arial"/>
+            </a:endParaRPr>
+          </a:p>
+        </p:txBody>
+      </p:sp>
+      <p:sp>
+        <p:nvSpPr>
+          <p:cNvPr id="138" name="Text 3"/>
+          <p:cNvSpPr/>
+          <p:nvPr/>
+        </p:nvSpPr>
+        <p:spPr>
+          <a:xfrm>
+            <a:off x="548640" y="6473880"/>
+            <a:ext cx="9143640" cy="200880"/>
+          </a:xfrm>
+          <a:prstGeom prst="rect">
+            <a:avLst/>
+          </a:prstGeom>
+          <a:noFill/>
+          <a:ln w="0">
+            <a:noFill/>
+          </a:ln>
+        </p:spPr>
+        <p:style>
+          <a:lnRef idx="0"/>
+          <a:fillRef idx="0"/>
+          <a:effectRef idx="0"/>
+          <a:fontRef idx="minor"/>
+        </p:style>
+        <p:txBody>
+          <a:bodyPr lIns="360" rIns="360" tIns="360" bIns="360" anchor="ctr">
+            <a:normAutofit/>
+          </a:bodyPr>
+          <a:p>
+            <a:pPr defTabSz="914400">
+              <a:lnSpc>
+                <a:spcPct val="100000"/>
+              </a:lnSpc>
+              <a:tabLst>
+                <a:tab algn="l" pos="0"/>
+              </a:tabLst>
+            </a:pPr>
+            <a:r>
+              <a:rPr b="0" lang="en-US" sz="900" strike="noStrike" u="none">
+                <a:solidFill>
+                  <a:srgbClr val="586a79"/>
+                </a:solidFill>
+                <a:effectLst/>
+                <a:uFillTx/>
+                <a:latin typeface="Aptos"/>
+                <a:ea typeface="Aptos"/>
+              </a:rPr>
+              <a:t>6G-DALI  ×  NATWORK  |  LOCAL CYBERSECURITY HACKATHON</a:t>
+            </a:r>
+            <a:endParaRPr b="0" lang="en-US" sz="900" strike="noStrike" u="none">
+              <a:solidFill>
+                <a:srgbClr val="000000"/>
+              </a:solidFill>
+              <a:effectLst/>
+              <a:uFillTx/>
+              <a:latin typeface="Arial"/>
+            </a:endParaRPr>
+          </a:p>
+        </p:txBody>
+      </p:sp>
+      <p:sp>
+        <p:nvSpPr>
+          <p:cNvPr id="139" name="Text 4"/>
+          <p:cNvSpPr/>
+          <p:nvPr/>
+        </p:nvSpPr>
+        <p:spPr>
+          <a:xfrm>
+            <a:off x="11018520" y="6473880"/>
+            <a:ext cx="511560" cy="200880"/>
+          </a:xfrm>
+          <a:prstGeom prst="rect">
+            <a:avLst/>
+          </a:prstGeom>
+          <a:noFill/>
+          <a:ln w="0">
+            <a:noFill/>
+          </a:ln>
+        </p:spPr>
+        <p:style>
+          <a:lnRef idx="0"/>
+          <a:fillRef idx="0"/>
+          <a:effectRef idx="0"/>
+          <a:fontRef idx="minor"/>
+        </p:style>
+        <p:txBody>
+          <a:bodyPr lIns="360" rIns="360" tIns="360" bIns="360" anchor="ctr">
+            <a:normAutofit/>
+          </a:bodyPr>
+          <a:p>
+            <a:pPr algn="r" defTabSz="914400">
+              <a:lnSpc>
+                <a:spcPct val="100000"/>
+              </a:lnSpc>
+              <a:tabLst>
+                <a:tab algn="l" pos="0"/>
+              </a:tabLst>
+            </a:pPr>
+            <a:r>
+              <a:rPr b="0" lang="en-US" sz="900" strike="noStrike" u="none">
+                <a:solidFill>
+                  <a:srgbClr val="586a79"/>
+                </a:solidFill>
+                <a:effectLst/>
+                <a:uFillTx/>
+                <a:latin typeface="Aptos"/>
+                <a:ea typeface="Aptos"/>
+              </a:rPr>
+              <a:t>11</a:t>
+            </a:r>
+            <a:endParaRPr b="0" lang="en-US" sz="900" strike="noStrike" u="none">
+              <a:solidFill>
+                <a:srgbClr val="000000"/>
+              </a:solidFill>
+              <a:effectLst/>
+              <a:uFillTx/>
+              <a:latin typeface="Arial"/>
+            </a:endParaRPr>
+          </a:p>
+        </p:txBody>
+      </p:sp>
+      <p:sp>
+        <p:nvSpPr>
+          <p:cNvPr id="140" name="Shape 5"/>
+          <p:cNvSpPr/>
+          <p:nvPr/>
+        </p:nvSpPr>
+        <p:spPr>
+          <a:xfrm>
+            <a:off x="612720" y="1271160"/>
+            <a:ext cx="7086240" cy="4361400"/>
+          </a:xfrm>
+          <a:prstGeom prst="roundRect">
+            <a:avLst>
+              <a:gd name="adj" fmla="val 2096"/>
+            </a:avLst>
+          </a:prstGeom>
+          <a:solidFill>
+            <a:srgbClr val="11233b"/>
+          </a:solidFill>
+          <a:ln w="12700">
+            <a:solidFill>
+              <a:srgbClr val="11233b"/>
+            </a:solidFill>
+            <a:round/>
+          </a:ln>
+        </p:spPr>
+        <p:style>
+          <a:lnRef idx="0"/>
+          <a:fillRef idx="0"/>
+          <a:effectRef idx="0"/>
+          <a:fontRef idx="minor"/>
+        </p:style>
+        <p:txBody>
+          <a:bodyPr lIns="90000" rIns="90000" tIns="45000" bIns="45000" anchor="t">
+            <a:noAutofit/>
+          </a:bodyPr>
+          <a:p>
+            <a:endParaRPr b="0" lang="en-US" sz="1800" strike="noStrike" u="none">
+              <a:solidFill>
+                <a:srgbClr val="ffffff"/>
+              </a:solidFill>
+              <a:effectLst/>
+              <a:uFillTx/>
+              <a:latin typeface="Arial"/>
+            </a:endParaRPr>
+          </a:p>
+        </p:txBody>
+      </p:sp>
+      <p:sp>
+        <p:nvSpPr>
+          <p:cNvPr id="141" name="Text 6"/>
+          <p:cNvSpPr/>
+          <p:nvPr/>
+        </p:nvSpPr>
+        <p:spPr>
+          <a:xfrm>
+            <a:off x="795600" y="1380600"/>
+            <a:ext cx="6738840" cy="4178520"/>
+          </a:xfrm>
+          <a:prstGeom prst="rect">
+            <a:avLst/>
+          </a:prstGeom>
+          <a:noFill/>
+          <a:ln w="0">
+            <a:noFill/>
+          </a:ln>
+        </p:spPr>
+        <p:style>
+          <a:lnRef idx="0"/>
+          <a:fillRef idx="0"/>
+          <a:effectRef idx="0"/>
+          <a:fontRef idx="minor"/>
+        </p:style>
+        <p:txBody>
+          <a:bodyPr lIns="360" rIns="360" tIns="360" bIns="360" anchor="t">
+            <a:normAutofit/>
+          </a:bodyPr>
+          <a:p>
+            <a:pPr defTabSz="914400">
+              <a:lnSpc>
+                <a:spcPct val="100000"/>
+              </a:lnSpc>
+              <a:tabLst>
+                <a:tab algn="l" pos="0"/>
+              </a:tabLst>
+            </a:pPr>
+            <a:r>
+              <a:rPr b="0" lang="en-US" sz="1300" strike="noStrike" u="none">
+                <a:solidFill>
+                  <a:srgbClr val="e9f5fc"/>
+                </a:solidFill>
+                <a:effectLst/>
+                <a:uFillTx/>
+                <a:latin typeface="Aptos Mono"/>
+                <a:ea typeface="Aptos Mono"/>
+              </a:rPr>
+              <a:t>cd infrastructure</a:t>
+            </a:r>
+            <a:endParaRPr b="0" lang="en-US" sz="1300" strike="noStrike" u="none">
+              <a:solidFill>
+                <a:srgbClr val="000000"/>
+              </a:solidFill>
+              <a:effectLst/>
+              <a:uFillTx/>
+              <a:latin typeface="Arial"/>
+            </a:endParaRPr>
+          </a:p>
+          <a:p>
+            <a:pPr defTabSz="914400">
+              <a:lnSpc>
+                <a:spcPct val="100000"/>
+              </a:lnSpc>
+              <a:tabLst>
+                <a:tab algn="l" pos="0"/>
+              </a:tabLst>
+            </a:pPr>
+            <a:r>
+              <a:rPr b="0" lang="en-US" sz="1300" strike="noStrike" u="none">
+                <a:solidFill>
+                  <a:srgbClr val="e9f5fc"/>
+                </a:solidFill>
+                <a:effectLst/>
+                <a:uFillTx/>
+                <a:latin typeface="Aptos Mono"/>
+                <a:ea typeface="Aptos Mono"/>
+              </a:rPr>
+              <a:t>./lab.sh up          # patched lab (Mirai + uplink fix)</a:t>
+            </a:r>
+            <a:endParaRPr b="0" lang="en-US" sz="1300" strike="noStrike" u="none">
+              <a:solidFill>
+                <a:srgbClr val="000000"/>
+              </a:solidFill>
+              <a:effectLst/>
+              <a:uFillTx/>
+              <a:latin typeface="Arial"/>
+            </a:endParaRPr>
+          </a:p>
+          <a:p>
+            <a:pPr defTabSz="914400">
+              <a:lnSpc>
+                <a:spcPct val="100000"/>
+              </a:lnSpc>
+              <a:tabLst>
+                <a:tab algn="l" pos="0"/>
+              </a:tabLst>
+            </a:pPr>
+            <a:r>
+              <a:rPr b="0" lang="en-US" sz="1300" strike="noStrike" u="none">
+                <a:solidFill>
+                  <a:srgbClr val="e9f5fc"/>
+                </a:solidFill>
+                <a:effectLst/>
+                <a:uFillTx/>
+                <a:latin typeface="Aptos Mono"/>
+                <a:ea typeface="Aptos Mono"/>
+              </a:rPr>
+              <a:t>./lab.sh status      # wait: UE 10.45.0.2, bot on :23</a:t>
+            </a:r>
+            <a:endParaRPr b="0" lang="en-US" sz="1300" strike="noStrike" u="none">
+              <a:solidFill>
+                <a:srgbClr val="000000"/>
+              </a:solidFill>
+              <a:effectLst/>
+              <a:uFillTx/>
+              <a:latin typeface="Arial"/>
+            </a:endParaRPr>
+          </a:p>
+          <a:p>
+            <a:pPr defTabSz="914400">
+              <a:lnSpc>
+                <a:spcPct val="100000"/>
+              </a:lnSpc>
+              <a:tabLst>
+                <a:tab algn="l" pos="0"/>
+              </a:tabLst>
+            </a:pPr>
+            <a:r>
+              <a:rPr b="0" lang="en-US" sz="1300" strike="noStrike" u="none">
+                <a:solidFill>
+                  <a:srgbClr val="e9f5fc"/>
+                </a:solidFill>
+                <a:effectLst/>
+                <a:uFillTx/>
+                <a:latin typeface="Aptos Mono"/>
+                <a:ea typeface="Aptos Mono"/>
+              </a:rPr>
+              <a:t># capture benign + Mirai together, one pass:</a:t>
+            </a:r>
+            <a:endParaRPr b="0" lang="en-US" sz="1300" strike="noStrike" u="none">
+              <a:solidFill>
+                <a:srgbClr val="000000"/>
+              </a:solidFill>
+              <a:effectLst/>
+              <a:uFillTx/>
+              <a:latin typeface="Arial"/>
+            </a:endParaRPr>
+          </a:p>
+          <a:p>
+            <a:pPr defTabSz="914400">
+              <a:lnSpc>
+                <a:spcPct val="100000"/>
+              </a:lnSpc>
+              <a:tabLst>
+                <a:tab algn="l" pos="0"/>
+              </a:tabLst>
+            </a:pPr>
+            <a:r>
+              <a:rPr b="0" lang="en-US" sz="1300" strike="noStrike" u="none">
+                <a:solidFill>
+                  <a:srgbClr val="e9f5fc"/>
+                </a:solidFill>
+                <a:effectLst/>
+                <a:uFillTx/>
+                <a:latin typeface="Aptos Mono"/>
+                <a:ea typeface="Aptos Mono"/>
+              </a:rPr>
+              <a:t>../datasets/generate_final.sh big 15 60</a:t>
+            </a:r>
+            <a:endParaRPr b="0" lang="en-US" sz="1300" strike="noStrike" u="none">
+              <a:solidFill>
+                <a:srgbClr val="000000"/>
+              </a:solidFill>
+              <a:effectLst/>
+              <a:uFillTx/>
+              <a:latin typeface="Arial"/>
+            </a:endParaRPr>
+          </a:p>
+          <a:p>
+            <a:pPr defTabSz="914400">
+              <a:lnSpc>
+                <a:spcPct val="100000"/>
+              </a:lnSpc>
+              <a:tabLst>
+                <a:tab algn="l" pos="0"/>
+              </a:tabLst>
+            </a:pPr>
+            <a:r>
+              <a:rPr b="0" lang="en-US" sz="1300" strike="noStrike" u="none">
+                <a:solidFill>
+                  <a:srgbClr val="e9f5fc"/>
+                </a:solidFill>
+                <a:effectLst/>
+                <a:uFillTx/>
+                <a:latin typeface="Aptos Mono"/>
+                <a:ea typeface="Aptos Mono"/>
+              </a:rPr>
+              <a:t># -&gt; datasets/pcap_big/  (~15 GB, snaplen 128)</a:t>
+            </a:r>
+            <a:endParaRPr b="0" lang="en-US" sz="1300" strike="noStrike" u="none">
+              <a:solidFill>
+                <a:srgbClr val="000000"/>
+              </a:solidFill>
+              <a:effectLst/>
+              <a:uFillTx/>
+              <a:latin typeface="Arial"/>
+            </a:endParaRPr>
+          </a:p>
+          <a:p>
+            <a:pPr defTabSz="914400">
+              <a:lnSpc>
+                <a:spcPct val="100000"/>
+              </a:lnSpc>
+              <a:tabLst>
+                <a:tab algn="l" pos="0"/>
+              </a:tabLst>
+            </a:pPr>
+            <a:r>
+              <a:rPr b="0" lang="en-US" sz="1300" strike="noStrike" u="none">
+                <a:solidFill>
+                  <a:srgbClr val="e9f5fc"/>
+                </a:solidFill>
+                <a:effectLst/>
+                <a:uFillTx/>
+                <a:latin typeface="Aptos Mono"/>
+                <a:ea typeface="Aptos Mono"/>
+              </a:rPr>
+              <a:t>ls -lh ../datasets/pcap_big/</a:t>
+            </a:r>
+            <a:endParaRPr b="0" lang="en-US" sz="1300" strike="noStrike" u="none">
+              <a:solidFill>
+                <a:srgbClr val="000000"/>
+              </a:solidFill>
+              <a:effectLst/>
+              <a:uFillTx/>
+              <a:latin typeface="Arial"/>
+            </a:endParaRPr>
+          </a:p>
+          <a:p>
+            <a:pPr defTabSz="914400">
+              <a:lnSpc>
+                <a:spcPct val="100000"/>
+              </a:lnSpc>
+              <a:tabLst>
+                <a:tab algn="l" pos="0"/>
+              </a:tabLst>
+            </a:pPr>
+            <a:r>
+              <a:rPr b="0" lang="en-US" sz="1300" strike="noStrike" u="none">
+                <a:solidFill>
+                  <a:srgbClr val="e9f5fc"/>
+                </a:solidFill>
+                <a:effectLst/>
+                <a:uFillTx/>
+                <a:latin typeface="Aptos Mono"/>
+                <a:ea typeface="Aptos Mono"/>
+              </a:rPr>
+              <a:t># alternatives:</a:t>
+            </a:r>
+            <a:endParaRPr b="0" lang="en-US" sz="1300" strike="noStrike" u="none">
+              <a:solidFill>
+                <a:srgbClr val="000000"/>
+              </a:solidFill>
+              <a:effectLst/>
+              <a:uFillTx/>
+              <a:latin typeface="Arial"/>
+            </a:endParaRPr>
+          </a:p>
+          <a:p>
+            <a:pPr defTabSz="914400">
+              <a:lnSpc>
+                <a:spcPct val="100000"/>
+              </a:lnSpc>
+              <a:tabLst>
+                <a:tab algn="l" pos="0"/>
+              </a:tabLst>
+            </a:pPr>
+            <a:r>
+              <a:rPr b="0" lang="en-US" sz="1300" strike="noStrike" u="none">
+                <a:solidFill>
+                  <a:srgbClr val="e9f5fc"/>
+                </a:solidFill>
+                <a:effectLst/>
+                <a:uFillTx/>
+                <a:latin typeface="Aptos Mono"/>
+                <a:ea typeface="Aptos Mono"/>
+              </a:rPr>
+              <a:t>#   generate_m.sh  ·  capture_attack.sh + capture_benign.sh</a:t>
+            </a:r>
+            <a:endParaRPr b="0" lang="en-US" sz="1300" strike="noStrike" u="none">
+              <a:solidFill>
+                <a:srgbClr val="000000"/>
+              </a:solidFill>
+              <a:effectLst/>
+              <a:uFillTx/>
+              <a:latin typeface="Arial"/>
+            </a:endParaRPr>
+          </a:p>
+        </p:txBody>
+      </p:sp>
+      <p:sp>
+        <p:nvSpPr>
+          <p:cNvPr id="142" name="Shape 7"/>
+          <p:cNvSpPr/>
+          <p:nvPr/>
+        </p:nvSpPr>
+        <p:spPr>
+          <a:xfrm>
+            <a:off x="8010000" y="1271160"/>
+            <a:ext cx="3501720" cy="4379760"/>
+          </a:xfrm>
+          <a:prstGeom prst="roundRect">
+            <a:avLst>
+              <a:gd name="adj" fmla="val 2611"/>
+            </a:avLst>
+          </a:prstGeom>
+          <a:solidFill>
+            <a:srgbClr val="f2f6fa"/>
+          </a:solidFill>
+          <a:ln w="12700">
+            <a:solidFill>
+              <a:srgbClr val="f2f6fa"/>
+            </a:solidFill>
+            <a:round/>
+          </a:ln>
+        </p:spPr>
+        <p:style>
+          <a:lnRef idx="0"/>
+          <a:fillRef idx="0"/>
+          <a:effectRef idx="0"/>
+          <a:fontRef idx="minor"/>
+        </p:style>
+        <p:txBody>
+          <a:bodyPr lIns="90000" rIns="90000" tIns="45000" bIns="45000" anchor="t">
+            <a:noAutofit/>
+          </a:bodyPr>
+          <a:p>
+            <a:endParaRPr b="0" lang="en-US" sz="1800" strike="noStrike" u="none">
+              <a:solidFill>
+                <a:srgbClr val="000000"/>
+              </a:solidFill>
+              <a:effectLst/>
+              <a:uFillTx/>
+              <a:latin typeface="Arial"/>
+            </a:endParaRPr>
+          </a:p>
+        </p:txBody>
+      </p:sp>
+      <p:sp>
+        <p:nvSpPr>
+          <p:cNvPr id="143" name="Text 8"/>
+          <p:cNvSpPr/>
+          <p:nvPr/>
+        </p:nvSpPr>
+        <p:spPr>
+          <a:xfrm>
+            <a:off x="8275320" y="1508760"/>
+            <a:ext cx="2880000" cy="411120"/>
+          </a:xfrm>
+          <a:prstGeom prst="rect">
+            <a:avLst/>
+          </a:prstGeom>
+          <a:noFill/>
+          <a:ln w="0">
+            <a:noFill/>
+          </a:ln>
+        </p:spPr>
+        <p:style>
+          <a:lnRef idx="0"/>
+          <a:fillRef idx="0"/>
+          <a:effectRef idx="0"/>
+          <a:fontRef idx="minor"/>
+        </p:style>
+        <p:txBody>
+          <a:bodyPr lIns="360" rIns="360" tIns="360" bIns="360" anchor="ctr">
+            <a:normAutofit/>
+          </a:bodyPr>
+          <a:p>
+            <a:pPr defTabSz="914400">
+              <a:lnSpc>
+                <a:spcPct val="100000"/>
+              </a:lnSpc>
+              <a:tabLst>
+                <a:tab algn="l" pos="0"/>
+              </a:tabLst>
+            </a:pPr>
+            <a:r>
+              <a:rPr b="1" lang="en-US" sz="1900" strike="noStrike" u="none">
+                <a:solidFill>
+                  <a:srgbClr val="22618a"/>
+                </a:solidFill>
+                <a:effectLst/>
+                <a:uFillTx/>
+                <a:latin typeface="Aptos"/>
+                <a:ea typeface="Aptos"/>
+              </a:rPr>
+              <a:t>Realistic by design</a:t>
+            </a:r>
+            <a:endParaRPr b="0" lang="en-US" sz="1900" strike="noStrike" u="none">
+              <a:solidFill>
+                <a:srgbClr val="000000"/>
+              </a:solidFill>
+              <a:effectLst/>
+              <a:uFillTx/>
+              <a:latin typeface="Arial"/>
+            </a:endParaRPr>
+          </a:p>
+        </p:txBody>
+      </p:sp>
+      <p:sp>
+        <p:nvSpPr>
+          <p:cNvPr id="144" name="Text 9"/>
+          <p:cNvSpPr/>
+          <p:nvPr/>
+        </p:nvSpPr>
+        <p:spPr>
+          <a:xfrm>
+            <a:off x="8284320" y="2066400"/>
+            <a:ext cx="2898360" cy="3135960"/>
+          </a:xfrm>
+          <a:prstGeom prst="rect">
+            <a:avLst/>
+          </a:prstGeom>
+          <a:noFill/>
+          <a:ln w="0">
+            <a:noFill/>
+          </a:ln>
+        </p:spPr>
+        <p:style>
+          <a:lnRef idx="0"/>
+          <a:fillRef idx="0"/>
+          <a:effectRef idx="0"/>
+          <a:fontRef idx="minor"/>
+        </p:style>
+        <p:txBody>
+          <a:bodyPr lIns="360" rIns="360" tIns="360" bIns="360" anchor="ctr">
+            <a:normAutofit lnSpcReduction="9999"/>
+          </a:bodyPr>
+          <a:p>
+            <a:pPr defTabSz="914400">
+              <a:lnSpc>
+                <a:spcPct val="100000"/>
+              </a:lnSpc>
+              <a:tabLst>
+                <a:tab algn="l" pos="0"/>
+              </a:tabLst>
+            </a:pPr>
+            <a:r>
+              <a:rPr b="0" lang="en-US" sz="1600" strike="noStrike" u="none">
+                <a:solidFill>
+                  <a:srgbClr val="11233b"/>
+                </a:solidFill>
+                <a:effectLst/>
+                <a:uFillTx/>
+                <a:latin typeface="Aptos"/>
+                <a:ea typeface="Aptos"/>
+              </a:rPr>
+              <a:t>Benign app mix (HTTP, MQTT, video, iperf3) and the Mirai SYN flood run together on the same uplink.</a:t>
+            </a:r>
+            <a:endParaRPr b="0" lang="en-US" sz="1600" strike="noStrike" u="none">
+              <a:solidFill>
+                <a:srgbClr val="000000"/>
+              </a:solidFill>
+              <a:effectLst/>
+              <a:uFillTx/>
+              <a:latin typeface="Arial"/>
+            </a:endParaRPr>
+          </a:p>
+          <a:p>
+            <a:pPr defTabSz="914400">
+              <a:lnSpc>
+                <a:spcPct val="100000"/>
+              </a:lnSpc>
+              <a:tabLst>
+                <a:tab algn="l" pos="0"/>
+              </a:tabLst>
+            </a:pPr>
+            <a:endParaRPr b="0" lang="en-US" sz="1600" strike="noStrike" u="none">
+              <a:solidFill>
+                <a:srgbClr val="000000"/>
+              </a:solidFill>
+              <a:effectLst/>
+              <a:uFillTx/>
+              <a:latin typeface="Arial"/>
+            </a:endParaRPr>
+          </a:p>
+          <a:p>
+            <a:pPr defTabSz="914400">
+              <a:lnSpc>
+                <a:spcPct val="100000"/>
+              </a:lnSpc>
+              <a:tabLst>
+                <a:tab algn="l" pos="0"/>
+              </a:tabLst>
+            </a:pPr>
+            <a:r>
+              <a:rPr b="0" lang="en-US" sz="1600" strike="noStrike" u="none">
+                <a:solidFill>
+                  <a:srgbClr val="11233b"/>
+                </a:solidFill>
+                <a:effectLst/>
+                <a:uFillTx/>
+                <a:latin typeface="Aptos"/>
+                <a:ea typeface="Aptos"/>
+              </a:rPr>
+              <a:t>The attack share fluctuates per chunk but averages ~30% across the 15 GB capture.</a:t>
+            </a:r>
+            <a:endParaRPr b="0" lang="en-US" sz="1600" strike="noStrike" u="none">
+              <a:solidFill>
+                <a:srgbClr val="000000"/>
+              </a:solidFill>
+              <a:effectLst/>
+              <a:uFillTx/>
+              <a:latin typeface="Arial"/>
+            </a:endParaRPr>
+          </a:p>
+          <a:p>
+            <a:pPr defTabSz="914400">
+              <a:lnSpc>
+                <a:spcPct val="100000"/>
+              </a:lnSpc>
+              <a:tabLst>
+                <a:tab algn="l" pos="0"/>
+              </a:tabLst>
+            </a:pPr>
+            <a:endParaRPr b="0" lang="en-US" sz="1600" strike="noStrike" u="none">
+              <a:solidFill>
+                <a:srgbClr val="000000"/>
+              </a:solidFill>
+              <a:effectLst/>
+              <a:uFillTx/>
+              <a:latin typeface="Arial"/>
+            </a:endParaRPr>
+          </a:p>
+          <a:p>
+            <a:pPr defTabSz="914400">
+              <a:lnSpc>
+                <a:spcPct val="100000"/>
+              </a:lnSpc>
+              <a:tabLst>
+                <a:tab algn="l" pos="0"/>
+              </a:tabLst>
+            </a:pPr>
+            <a:r>
+              <a:rPr b="0" lang="en-US" sz="1600" strike="noStrike" u="none">
+                <a:solidFill>
+                  <a:srgbClr val="11233b"/>
+                </a:solidFill>
+                <a:effectLst/>
+                <a:uFillTx/>
+                <a:latin typeface="Aptos"/>
+                <a:ea typeface="Aptos"/>
+              </a:rPr>
+              <a:t>The UERANSIM nr-ue uplink is patched (bounded queue) so the flood no longer wedges the UE tunnel.</a:t>
+            </a:r>
+            <a:endParaRPr b="0" lang="en-US" sz="1600" strike="noStrike" u="none">
+              <a:solidFill>
+                <a:srgbClr val="000000"/>
+              </a:solidFill>
+              <a:effectLst/>
+              <a:uFillTx/>
+              <a:latin typeface="Arial"/>
+            </a:endParaRPr>
+          </a:p>
+        </p:txBody>
+      </p:sp>
+    </p:spTree>
+  </p:cSld>
+  <mc:AlternateContent>
+    <mc:Choice Requires="p14">
+      <p:transition spd="slow" p14:dur="2000"/>
+    </mc:Choice>
+    <mc:Fallback>
+      <p:transition spd="slow"/>
+    </mc:Fallback>
+  </mc:AlternateContent>
+</p:sld>
+</file>
+
+<file path=ppt/slides/slide12.xml><?xml version="1.0" encoding="utf-8"?>
+<p:sld xmlns:a="http://schemas.openxmlformats.org/drawingml/2006/main" xmlns:p="http://schemas.openxmlformats.org/presentationml/2006/main" xmlns:r="http://schemas.openxmlformats.org/officeDocument/2006/relationships" xmlns:p14="http://schemas.microsoft.com/office/powerpoint/2010/main" xmlns:p15="http://schemas.microsoft.com/office/powerpoint/2012/main" xmlns:mc="http://schemas.openxmlformats.org/markup-compatibility/2006">
+  <p:cSld>
+    <p:bg>
+      <p:bgPr>
+        <a:solidFill>
+          <a:srgbClr val="ffffff"/>
+        </a:solidFill>
+      </p:bgPr>
+    </p:bg>
+    <p:spTree>
+      <p:nvGrpSpPr>
+        <p:cNvPr id="1" name=""/>
+        <p:cNvGrpSpPr/>
+        <p:nvPr/>
+      </p:nvGrpSpPr>
+      <p:grpSpPr>
+        <a:xfrm>
+          <a:off x="0" y="0"/>
+          <a:ext cx="0" cy="0"/>
+          <a:chOff x="0" y="0"/>
+          <a:chExt cx="0" cy="0"/>
+        </a:xfrm>
+      </p:grpSpPr>
+      <p:sp>
+        <p:nvSpPr>
+          <p:cNvPr id="163" name="Shape 0"/>
+          <p:cNvSpPr/>
+          <p:nvPr/>
+        </p:nvSpPr>
+        <p:spPr>
+          <a:xfrm>
+            <a:off x="0" y="0"/>
+            <a:ext cx="12191400" cy="109440"/>
+          </a:xfrm>
+          <a:prstGeom prst="rect">
+            <a:avLst/>
+          </a:prstGeom>
+          <a:solidFill>
+            <a:srgbClr val="ee791f"/>
+          </a:solidFill>
+          <a:ln w="12700">
+            <a:solidFill>
+              <a:srgbClr val="ee791f"/>
+            </a:solidFill>
+            <a:round/>
+          </a:ln>
+        </p:spPr>
+        <p:style>
+          <a:lnRef idx="0"/>
+          <a:fillRef idx="0"/>
+          <a:effectRef idx="0"/>
+          <a:fontRef idx="minor"/>
+        </p:style>
+        <p:txBody>
+          <a:bodyPr lIns="90000" rIns="90000" tIns="45000" bIns="45000" anchor="t">
+            <a:noAutofit/>
+          </a:bodyPr>
+          <a:p>
+            <a:endParaRPr b="0" lang="en-US" sz="1800" strike="noStrike" u="none">
+              <a:solidFill>
+                <a:srgbClr val="ffffff"/>
+              </a:solidFill>
+              <a:effectLst/>
+              <a:uFillTx/>
+              <a:latin typeface="Arial"/>
+            </a:endParaRPr>
+          </a:p>
+        </p:txBody>
+      </p:sp>
+      <p:sp>
+        <p:nvSpPr>
+          <p:cNvPr id="164" name="Text 1"/>
+          <p:cNvSpPr/>
+          <p:nvPr/>
+        </p:nvSpPr>
+        <p:spPr>
+          <a:xfrm>
+            <a:off x="530280" y="311040"/>
+            <a:ext cx="10881000" cy="548280"/>
+          </a:xfrm>
+          <a:prstGeom prst="rect">
+            <a:avLst/>
+          </a:prstGeom>
+          <a:noFill/>
+          <a:ln w="0">
+            <a:noFill/>
+          </a:ln>
+        </p:spPr>
+        <p:style>
+          <a:lnRef idx="0"/>
+          <a:fillRef idx="0"/>
+          <a:effectRef idx="0"/>
+          <a:fontRef idx="minor"/>
+        </p:style>
+        <p:txBody>
+          <a:bodyPr lIns="360" rIns="360" tIns="360" bIns="360" anchor="ctr">
+            <a:normAutofit/>
+          </a:bodyPr>
+          <a:p>
+            <a:pPr defTabSz="914400">
+              <a:lnSpc>
+                <a:spcPct val="100000"/>
+              </a:lnSpc>
+              <a:tabLst>
+                <a:tab algn="l" pos="0"/>
+              </a:tabLst>
+            </a:pPr>
+            <a:r>
+              <a:rPr b="1" lang="en-US" sz="2700" strike="noStrike" u="none">
+                <a:solidFill>
+                  <a:srgbClr val="11233b"/>
+                </a:solidFill>
+                <a:effectLst/>
+                <a:uFillTx/>
+                <a:latin typeface="Aptos"/>
+                <a:ea typeface="Aptos"/>
+              </a:rPr>
+              <a:t>Train and evaluate the per-packet detector</a:t>
+            </a:r>
+            <a:endParaRPr b="0" lang="en-US" sz="2700" strike="noStrike" u="none">
+              <a:solidFill>
+                <a:srgbClr val="000000"/>
+              </a:solidFill>
+              <a:effectLst/>
+              <a:uFillTx/>
+              <a:latin typeface="Arial"/>
+            </a:endParaRPr>
+          </a:p>
+        </p:txBody>
+      </p:sp>
+      <p:sp>
+        <p:nvSpPr>
+          <p:cNvPr id="165" name="Shape 2"/>
+          <p:cNvSpPr/>
+          <p:nvPr/>
+        </p:nvSpPr>
+        <p:spPr>
+          <a:xfrm>
+            <a:off x="530280" y="951120"/>
+            <a:ext cx="11100600" cy="31680"/>
+          </a:xfrm>
+          <a:prstGeom prst="rect">
+            <a:avLst/>
+          </a:prstGeom>
+          <a:solidFill>
+            <a:srgbClr val="ee791f"/>
+          </a:solidFill>
+          <a:ln w="12700">
+            <a:solidFill>
+              <a:srgbClr val="ee791f"/>
+            </a:solidFill>
+            <a:round/>
+          </a:ln>
+        </p:spPr>
+        <p:style>
+          <a:lnRef idx="0"/>
+          <a:fillRef idx="0"/>
+          <a:effectRef idx="0"/>
+          <a:fontRef idx="minor"/>
+        </p:style>
+        <p:txBody>
+          <a:bodyPr lIns="90000" rIns="90000" tIns="-12960" bIns="-12960" anchor="t">
+            <a:noAutofit/>
+          </a:bodyPr>
+          <a:p>
+            <a:endParaRPr b="0" lang="en-US" sz="1800" strike="noStrike" u="none">
+              <a:solidFill>
+                <a:srgbClr val="ffffff"/>
+              </a:solidFill>
+              <a:effectLst/>
+              <a:uFillTx/>
+              <a:latin typeface="Arial"/>
+            </a:endParaRPr>
+          </a:p>
+        </p:txBody>
+      </p:sp>
+      <p:sp>
+        <p:nvSpPr>
+          <p:cNvPr id="166" name="Text 3"/>
+          <p:cNvSpPr/>
+          <p:nvPr/>
+        </p:nvSpPr>
+        <p:spPr>
+          <a:xfrm>
+            <a:off x="548640" y="6473880"/>
+            <a:ext cx="9143640" cy="200880"/>
+          </a:xfrm>
+          <a:prstGeom prst="rect">
+            <a:avLst/>
+          </a:prstGeom>
+          <a:noFill/>
+          <a:ln w="0">
+            <a:noFill/>
+          </a:ln>
+        </p:spPr>
+        <p:style>
+          <a:lnRef idx="0"/>
+          <a:fillRef idx="0"/>
+          <a:effectRef idx="0"/>
+          <a:fontRef idx="minor"/>
+        </p:style>
+        <p:txBody>
+          <a:bodyPr lIns="360" rIns="360" tIns="360" bIns="360" anchor="ctr">
+            <a:normAutofit/>
+          </a:bodyPr>
+          <a:p>
+            <a:pPr defTabSz="914400">
+              <a:lnSpc>
+                <a:spcPct val="100000"/>
+              </a:lnSpc>
+              <a:tabLst>
+                <a:tab algn="l" pos="0"/>
+              </a:tabLst>
+            </a:pPr>
+            <a:r>
+              <a:rPr b="0" lang="en-US" sz="900" strike="noStrike" u="none">
+                <a:solidFill>
+                  <a:srgbClr val="586a79"/>
+                </a:solidFill>
+                <a:effectLst/>
+                <a:uFillTx/>
+                <a:latin typeface="Aptos"/>
+                <a:ea typeface="Aptos"/>
+              </a:rPr>
+              <a:t>6G-DALI  ×  NATWORK  |  LOCAL CYBERSECURITY HACKATHON</a:t>
+            </a:r>
+            <a:endParaRPr b="0" lang="en-US" sz="900" strike="noStrike" u="none">
+              <a:solidFill>
+                <a:srgbClr val="000000"/>
+              </a:solidFill>
+              <a:effectLst/>
+              <a:uFillTx/>
+              <a:latin typeface="Arial"/>
+            </a:endParaRPr>
+          </a:p>
+        </p:txBody>
+      </p:sp>
+      <p:sp>
+        <p:nvSpPr>
+          <p:cNvPr id="167" name="Text 4"/>
+          <p:cNvSpPr/>
+          <p:nvPr/>
+        </p:nvSpPr>
+        <p:spPr>
+          <a:xfrm>
+            <a:off x="11018520" y="6473880"/>
+            <a:ext cx="511560" cy="200880"/>
+          </a:xfrm>
+          <a:prstGeom prst="rect">
+            <a:avLst/>
+          </a:prstGeom>
+          <a:noFill/>
+          <a:ln w="0">
+            <a:noFill/>
+          </a:ln>
+        </p:spPr>
+        <p:style>
+          <a:lnRef idx="0"/>
+          <a:fillRef idx="0"/>
+          <a:effectRef idx="0"/>
+          <a:fontRef idx="minor"/>
+        </p:style>
+        <p:txBody>
+          <a:bodyPr lIns="360" rIns="360" tIns="360" bIns="360" anchor="ctr">
+            <a:normAutofit/>
+          </a:bodyPr>
+          <a:p>
+            <a:pPr algn="r" defTabSz="914400">
+              <a:lnSpc>
+                <a:spcPct val="100000"/>
+              </a:lnSpc>
+              <a:tabLst>
+                <a:tab algn="l" pos="0"/>
+              </a:tabLst>
+            </a:pPr>
+            <a:r>
+              <a:rPr b="0" lang="en-US" sz="900" strike="noStrike" u="none">
+                <a:solidFill>
+                  <a:srgbClr val="586a79"/>
+                </a:solidFill>
+                <a:effectLst/>
+                <a:uFillTx/>
+                <a:latin typeface="Aptos"/>
+                <a:ea typeface="Aptos"/>
+              </a:rPr>
+              <a:t>12</a:t>
+            </a:r>
+            <a:endParaRPr b="0" lang="en-US" sz="900" strike="noStrike" u="none">
+              <a:solidFill>
+                <a:srgbClr val="000000"/>
+              </a:solidFill>
+              <a:effectLst/>
+              <a:uFillTx/>
+              <a:latin typeface="Arial"/>
+            </a:endParaRPr>
+          </a:p>
+        </p:txBody>
+      </p:sp>
+      <p:sp>
+        <p:nvSpPr>
+          <p:cNvPr id="168" name="Shape 5"/>
+          <p:cNvSpPr/>
+          <p:nvPr/>
+        </p:nvSpPr>
+        <p:spPr>
+          <a:xfrm>
+            <a:off x="603360" y="1188720"/>
+            <a:ext cx="10999800" cy="1508400"/>
+          </a:xfrm>
+          <a:prstGeom prst="roundRect">
+            <a:avLst>
+              <a:gd name="adj" fmla="val 6061"/>
+            </a:avLst>
+          </a:prstGeom>
+          <a:solidFill>
+            <a:srgbClr val="11233b"/>
+          </a:solidFill>
+          <a:ln w="12700">
+            <a:solidFill>
+              <a:srgbClr val="11233b"/>
+            </a:solidFill>
+            <a:round/>
+          </a:ln>
+        </p:spPr>
+        <p:style>
+          <a:lnRef idx="0"/>
+          <a:fillRef idx="0"/>
+          <a:effectRef idx="0"/>
+          <a:fontRef idx="minor"/>
+        </p:style>
+        <p:txBody>
+          <a:bodyPr lIns="90000" rIns="90000" tIns="45000" bIns="45000" anchor="t">
+            <a:noAutofit/>
+          </a:bodyPr>
+          <a:p>
+            <a:endParaRPr b="0" lang="en-US" sz="1800" strike="noStrike" u="none">
+              <a:solidFill>
+                <a:srgbClr val="ffffff"/>
+              </a:solidFill>
+              <a:effectLst/>
+              <a:uFillTx/>
+              <a:latin typeface="Arial"/>
+            </a:endParaRPr>
+          </a:p>
+        </p:txBody>
+      </p:sp>
+      <p:sp>
+        <p:nvSpPr>
+          <p:cNvPr id="169" name="Text 6"/>
+          <p:cNvSpPr/>
+          <p:nvPr/>
+        </p:nvSpPr>
+        <p:spPr>
+          <a:xfrm>
+            <a:off x="786240" y="1298520"/>
+            <a:ext cx="10652400" cy="1325520"/>
+          </a:xfrm>
+          <a:prstGeom prst="rect">
+            <a:avLst/>
+          </a:prstGeom>
+          <a:noFill/>
+          <a:ln w="0">
+            <a:noFill/>
+          </a:ln>
+        </p:spPr>
+        <p:style>
+          <a:lnRef idx="0"/>
+          <a:fillRef idx="0"/>
+          <a:effectRef idx="0"/>
+          <a:fontRef idx="minor"/>
+        </p:style>
+        <p:txBody>
+          <a:bodyPr lIns="360" rIns="360" tIns="360" bIns="360" anchor="t">
+            <a:normAutofit/>
+          </a:bodyPr>
+          <a:p>
+            <a:pPr defTabSz="914400">
+              <a:lnSpc>
+                <a:spcPct val="100000"/>
+              </a:lnSpc>
+              <a:tabLst>
+                <a:tab algn="l" pos="0"/>
+              </a:tabLst>
+            </a:pPr>
+            <a:r>
+              <a:rPr b="0" lang="en-US" sz="1300" strike="noStrike" u="none">
+                <a:solidFill>
+                  <a:srgbClr val="e9f5fc"/>
+                </a:solidFill>
+                <a:effectLst/>
+                <a:uFillTx/>
+                <a:latin typeface="Aptos Mono"/>
+                <a:ea typeface="Aptos Mono"/>
+              </a:rPr>
+              <a:t>cd ddos_cnn_xgb</a:t>
+            </a:r>
+            <a:endParaRPr b="0" lang="en-US" sz="1300" strike="noStrike" u="none">
+              <a:solidFill>
+                <a:srgbClr val="000000"/>
+              </a:solidFill>
+              <a:effectLst/>
+              <a:uFillTx/>
+              <a:latin typeface="Arial"/>
+            </a:endParaRPr>
+          </a:p>
+          <a:p>
+            <a:pPr defTabSz="914400">
+              <a:lnSpc>
+                <a:spcPct val="100000"/>
+              </a:lnSpc>
+              <a:tabLst>
+                <a:tab algn="l" pos="0"/>
+              </a:tabLst>
+            </a:pPr>
+            <a:r>
+              <a:rPr b="0" lang="en-US" sz="1300" strike="noStrike" u="none">
+                <a:solidFill>
+                  <a:srgbClr val="e9f5fc"/>
+                </a:solidFill>
+                <a:effectLst/>
+                <a:uFillTx/>
+                <a:latin typeface="Aptos Mono"/>
+                <a:ea typeface="Aptos Mono"/>
+              </a:rPr>
+              <a:t>python3 -m venv .venv</a:t>
+            </a:r>
+            <a:endParaRPr b="0" lang="en-US" sz="1300" strike="noStrike" u="none">
+              <a:solidFill>
+                <a:srgbClr val="000000"/>
+              </a:solidFill>
+              <a:effectLst/>
+              <a:uFillTx/>
+              <a:latin typeface="Arial"/>
+            </a:endParaRPr>
+          </a:p>
+          <a:p>
+            <a:pPr defTabSz="914400">
+              <a:lnSpc>
+                <a:spcPct val="100000"/>
+              </a:lnSpc>
+              <a:tabLst>
+                <a:tab algn="l" pos="0"/>
+              </a:tabLst>
+            </a:pPr>
+            <a:r>
+              <a:rPr b="0" lang="en-US" sz="1300" strike="noStrike" u="none">
+                <a:solidFill>
+                  <a:srgbClr val="e9f5fc"/>
+                </a:solidFill>
+                <a:effectLst/>
+                <a:uFillTx/>
+                <a:latin typeface="Aptos Mono"/>
+                <a:ea typeface="Aptos Mono"/>
+              </a:rPr>
+              <a:t>.venv/bin/python -m pip install tensorflow h5py numpy scikit-learn</a:t>
+            </a:r>
+            <a:endParaRPr b="0" lang="en-US" sz="1300" strike="noStrike" u="none">
+              <a:solidFill>
+                <a:srgbClr val="000000"/>
+              </a:solidFill>
+              <a:effectLst/>
+              <a:uFillTx/>
+              <a:latin typeface="Arial"/>
+            </a:endParaRPr>
+          </a:p>
+          <a:p>
+            <a:pPr defTabSz="914400">
+              <a:lnSpc>
+                <a:spcPct val="100000"/>
+              </a:lnSpc>
+              <a:tabLst>
+                <a:tab algn="l" pos="0"/>
+              </a:tabLst>
+            </a:pPr>
+            <a:r>
+              <a:rPr b="0" lang="en-US" sz="1300" strike="noStrike" u="none">
+                <a:solidFill>
+                  <a:srgbClr val="e9f5fc"/>
+                </a:solidFill>
+                <a:effectLst/>
+                <a:uFillTx/>
+                <a:latin typeface="Aptos Mono"/>
+                <a:ea typeface="Aptos Mono"/>
+              </a:rPr>
+              <a:t># one command does compose + train + compare:</a:t>
+            </a:r>
+            <a:endParaRPr b="0" lang="en-US" sz="1300" strike="noStrike" u="none">
+              <a:solidFill>
+                <a:srgbClr val="000000"/>
+              </a:solidFill>
+              <a:effectLst/>
+              <a:uFillTx/>
+              <a:latin typeface="Arial"/>
+            </a:endParaRPr>
+          </a:p>
+          <a:p>
+            <a:pPr defTabSz="914400">
+              <a:lnSpc>
+                <a:spcPct val="100000"/>
+              </a:lnSpc>
+              <a:tabLst>
+                <a:tab algn="l" pos="0"/>
+              </a:tabLst>
+            </a:pPr>
+            <a:r>
+              <a:rPr b="0" lang="en-US" sz="1300" strike="noStrike" u="none">
+                <a:solidFill>
+                  <a:srgbClr val="e9f5fc"/>
+                </a:solidFill>
+                <a:effectLst/>
+                <a:uFillTx/>
+                <a:latin typeface="Aptos Mono"/>
+                <a:ea typeface="Aptos Mono"/>
+              </a:rPr>
+              <a:t>./run_final_pipeline.sh ../datasets/pcap_big bigrun</a:t>
+            </a:r>
+            <a:endParaRPr b="0" lang="en-US" sz="1300" strike="noStrike" u="none">
+              <a:solidFill>
+                <a:srgbClr val="000000"/>
+              </a:solidFill>
+              <a:effectLst/>
+              <a:uFillTx/>
+              <a:latin typeface="Arial"/>
+            </a:endParaRPr>
+          </a:p>
+        </p:txBody>
+      </p:sp>
+      <p:sp>
+        <p:nvSpPr>
+          <p:cNvPr id="170" name="Shape 7"/>
+          <p:cNvSpPr/>
+          <p:nvPr/>
+        </p:nvSpPr>
+        <p:spPr>
+          <a:xfrm>
+            <a:off x="631080" y="2907720"/>
+            <a:ext cx="10917720" cy="914040"/>
+          </a:xfrm>
+          <a:prstGeom prst="roundRect">
+            <a:avLst>
+              <a:gd name="adj" fmla="val 10000"/>
+            </a:avLst>
+          </a:prstGeom>
+          <a:solidFill>
+            <a:srgbClr val="edf5f8"/>
+          </a:solidFill>
+          <a:ln w="12700">
+            <a:solidFill>
+              <a:srgbClr val="edf5f8"/>
+            </a:solidFill>
+            <a:round/>
+          </a:ln>
+        </p:spPr>
+        <p:style>
+          <a:lnRef idx="0"/>
+          <a:fillRef idx="0"/>
+          <a:effectRef idx="0"/>
+          <a:fontRef idx="minor"/>
+        </p:style>
+        <p:txBody>
+          <a:bodyPr lIns="90000" rIns="90000" tIns="45000" bIns="45000" anchor="t">
+            <a:noAutofit/>
+          </a:bodyPr>
+          <a:p>
+            <a:endParaRPr b="0" lang="en-US" sz="1800" strike="noStrike" u="none">
+              <a:solidFill>
+                <a:srgbClr val="000000"/>
+              </a:solidFill>
+              <a:effectLst/>
+              <a:uFillTx/>
+              <a:latin typeface="Arial"/>
+            </a:endParaRPr>
+          </a:p>
+        </p:txBody>
+      </p:sp>
+      <p:sp>
+        <p:nvSpPr>
+          <p:cNvPr id="171" name="Text 8"/>
+          <p:cNvSpPr/>
+          <p:nvPr/>
+        </p:nvSpPr>
+        <p:spPr>
+          <a:xfrm>
+            <a:off x="804600" y="3017520"/>
+            <a:ext cx="2011320" cy="273960"/>
+          </a:xfrm>
+          <a:prstGeom prst="rect">
+            <a:avLst/>
+          </a:prstGeom>
+          <a:noFill/>
+          <a:ln w="0">
+            <a:noFill/>
+          </a:ln>
+        </p:spPr>
+        <p:style>
+          <a:lnRef idx="0"/>
+          <a:fillRef idx="0"/>
+          <a:effectRef idx="0"/>
+          <a:fontRef idx="minor"/>
+        </p:style>
+        <p:txBody>
+          <a:bodyPr lIns="360" rIns="360" tIns="360" bIns="360" anchor="ctr">
+            <a:normAutofit/>
+          </a:bodyPr>
+          <a:p>
+            <a:pPr defTabSz="914400">
+              <a:lnSpc>
+                <a:spcPct val="100000"/>
+              </a:lnSpc>
+              <a:tabLst>
+                <a:tab algn="l" pos="0"/>
+              </a:tabLst>
+            </a:pPr>
+            <a:r>
+              <a:rPr b="1" lang="en-US" sz="1500" strike="noStrike" u="none">
+                <a:solidFill>
+                  <a:srgbClr val="ee791f"/>
+                </a:solidFill>
+                <a:effectLst/>
+                <a:uFillTx/>
+                <a:latin typeface="Aptos"/>
+                <a:ea typeface="Aptos"/>
+              </a:rPr>
+              <a:t>01  COMPOSE</a:t>
+            </a:r>
+            <a:endParaRPr b="0" lang="en-US" sz="1500" strike="noStrike" u="none">
+              <a:solidFill>
+                <a:srgbClr val="000000"/>
+              </a:solidFill>
+              <a:effectLst/>
+              <a:uFillTx/>
+              <a:latin typeface="Arial"/>
+            </a:endParaRPr>
+          </a:p>
+        </p:txBody>
+      </p:sp>
+      <p:sp>
+        <p:nvSpPr>
+          <p:cNvPr id="172" name="Text 9"/>
+          <p:cNvSpPr/>
+          <p:nvPr/>
+        </p:nvSpPr>
+        <p:spPr>
+          <a:xfrm>
+            <a:off x="2752200" y="2990160"/>
+            <a:ext cx="8412120" cy="282960"/>
+          </a:xfrm>
+          <a:prstGeom prst="rect">
+            <a:avLst/>
+          </a:prstGeom>
+          <a:noFill/>
+          <a:ln w="0">
+            <a:noFill/>
+          </a:ln>
+        </p:spPr>
+        <p:style>
+          <a:lnRef idx="0"/>
+          <a:fillRef idx="0"/>
+          <a:effectRef idx="0"/>
+          <a:fontRef idx="minor"/>
+        </p:style>
+        <p:txBody>
+          <a:bodyPr lIns="360" rIns="360" tIns="360" bIns="360" anchor="ctr">
+            <a:normAutofit/>
+          </a:bodyPr>
+          <a:p>
+            <a:pPr defTabSz="914400">
+              <a:lnSpc>
+                <a:spcPct val="100000"/>
+              </a:lnSpc>
+              <a:tabLst>
+                <a:tab algn="l" pos="0"/>
+              </a:tabLst>
+            </a:pPr>
+            <a:r>
+              <a:rPr b="1" lang="en-US" sz="1500" strike="noStrike" u="none">
+                <a:solidFill>
+                  <a:srgbClr val="11233b"/>
+                </a:solidFill>
+                <a:effectLst/>
+                <a:uFillTx/>
+                <a:latin typeface="Aptos Mono"/>
+                <a:ea typeface="Aptos Mono"/>
+              </a:rPr>
+              <a:t>.venv/bin/python build_mixed_windows.py</a:t>
+            </a:r>
+            <a:endParaRPr b="0" lang="en-US" sz="1500" strike="noStrike" u="none">
+              <a:solidFill>
+                <a:srgbClr val="000000"/>
+              </a:solidFill>
+              <a:effectLst/>
+              <a:uFillTx/>
+              <a:latin typeface="Arial"/>
+            </a:endParaRPr>
+          </a:p>
+        </p:txBody>
+      </p:sp>
+      <p:sp>
+        <p:nvSpPr>
+          <p:cNvPr id="173" name="Text 10"/>
+          <p:cNvSpPr/>
+          <p:nvPr/>
+        </p:nvSpPr>
+        <p:spPr>
+          <a:xfrm>
+            <a:off x="2761560" y="3319200"/>
+            <a:ext cx="8476200" cy="383760"/>
+          </a:xfrm>
+          <a:prstGeom prst="rect">
+            <a:avLst/>
+          </a:prstGeom>
+          <a:noFill/>
+          <a:ln w="0">
+            <a:noFill/>
+          </a:ln>
+        </p:spPr>
+        <p:style>
+          <a:lnRef idx="0"/>
+          <a:fillRef idx="0"/>
+          <a:effectRef idx="0"/>
+          <a:fontRef idx="minor"/>
+        </p:style>
+        <p:txBody>
+          <a:bodyPr lIns="360" rIns="360" tIns="360" bIns="360" anchor="ctr">
+            <a:normAutofit/>
+          </a:bodyPr>
+          <a:p>
+            <a:pPr defTabSz="914400">
+              <a:lnSpc>
+                <a:spcPct val="100000"/>
+              </a:lnSpc>
+              <a:tabLst>
+                <a:tab algn="l" pos="0"/>
+              </a:tabLst>
+            </a:pPr>
+            <a:r>
+              <a:rPr b="0" lang="en-US" sz="1100" strike="noStrike" u="none">
+                <a:solidFill>
+                  <a:srgbClr val="586a79"/>
+                </a:solidFill>
+                <a:effectLst/>
+                <a:uFillTx/>
+                <a:latin typeface="Aptos Mono"/>
+                <a:ea typeface="Aptos Mono"/>
+              </a:rPr>
+              <a:t>-i ../datasets/pcap_big -o bigrun/mixed_masked.h5</a:t>
+            </a:r>
+            <a:endParaRPr b="0" lang="en-US" sz="1100" strike="noStrike" u="none">
+              <a:solidFill>
+                <a:srgbClr val="000000"/>
+              </a:solidFill>
+              <a:effectLst/>
+              <a:uFillTx/>
+              <a:latin typeface="Arial"/>
+            </a:endParaRPr>
+          </a:p>
+          <a:p>
+            <a:pPr defTabSz="914400">
+              <a:lnSpc>
+                <a:spcPct val="100000"/>
+              </a:lnSpc>
+              <a:tabLst>
+                <a:tab algn="l" pos="0"/>
+              </a:tabLst>
+            </a:pPr>
+            <a:r>
+              <a:rPr b="0" lang="en-US" sz="1100" strike="noStrike" u="none">
+                <a:solidFill>
+                  <a:srgbClr val="586a79"/>
+                </a:solidFill>
+                <a:effectLst/>
+                <a:uFillTx/>
+                <a:latin typeface="Aptos Mono"/>
+                <a:ea typeface="Aptos Mono"/>
+              </a:rPr>
+              <a:t>-w 100 -p 64 --attack-frac 0.30   (fluctuating, address-randomized)</a:t>
+            </a:r>
+            <a:endParaRPr b="0" lang="en-US" sz="1100" strike="noStrike" u="none">
+              <a:solidFill>
+                <a:srgbClr val="000000"/>
+              </a:solidFill>
+              <a:effectLst/>
+              <a:uFillTx/>
+              <a:latin typeface="Arial"/>
+            </a:endParaRPr>
+          </a:p>
+        </p:txBody>
+      </p:sp>
+      <p:sp>
+        <p:nvSpPr>
+          <p:cNvPr id="174" name="Shape 11"/>
+          <p:cNvSpPr/>
+          <p:nvPr/>
+        </p:nvSpPr>
+        <p:spPr>
+          <a:xfrm>
+            <a:off x="631080" y="3913560"/>
+            <a:ext cx="10917720" cy="914040"/>
+          </a:xfrm>
+          <a:prstGeom prst="roundRect">
+            <a:avLst>
+              <a:gd name="adj" fmla="val 10000"/>
+            </a:avLst>
+          </a:prstGeom>
+          <a:solidFill>
+            <a:srgbClr val="f2f6fa"/>
+          </a:solidFill>
+          <a:ln w="12700">
+            <a:solidFill>
+              <a:srgbClr val="f2f6fa"/>
+            </a:solidFill>
+            <a:round/>
+          </a:ln>
+        </p:spPr>
+        <p:style>
+          <a:lnRef idx="0"/>
+          <a:fillRef idx="0"/>
+          <a:effectRef idx="0"/>
+          <a:fontRef idx="minor"/>
+        </p:style>
+        <p:txBody>
+          <a:bodyPr lIns="90000" rIns="90000" tIns="45000" bIns="45000" anchor="t">
+            <a:noAutofit/>
+          </a:bodyPr>
+          <a:p>
+            <a:endParaRPr b="0" lang="en-US" sz="1800" strike="noStrike" u="none">
+              <a:solidFill>
+                <a:srgbClr val="000000"/>
+              </a:solidFill>
+              <a:effectLst/>
+              <a:uFillTx/>
+              <a:latin typeface="Arial"/>
+            </a:endParaRPr>
+          </a:p>
+        </p:txBody>
+      </p:sp>
+      <p:sp>
+        <p:nvSpPr>
+          <p:cNvPr id="175" name="Text 12"/>
+          <p:cNvSpPr/>
+          <p:nvPr/>
+        </p:nvSpPr>
+        <p:spPr>
+          <a:xfrm>
+            <a:off x="804600" y="4023360"/>
+            <a:ext cx="2011320" cy="273960"/>
+          </a:xfrm>
+          <a:prstGeom prst="rect">
+            <a:avLst/>
+          </a:prstGeom>
+          <a:noFill/>
+          <a:ln w="0">
+            <a:noFill/>
+          </a:ln>
+        </p:spPr>
+        <p:style>
+          <a:lnRef idx="0"/>
+          <a:fillRef idx="0"/>
+          <a:effectRef idx="0"/>
+          <a:fontRef idx="minor"/>
+        </p:style>
+        <p:txBody>
+          <a:bodyPr lIns="360" rIns="360" tIns="360" bIns="360" anchor="ctr">
+            <a:normAutofit/>
+          </a:bodyPr>
+          <a:p>
+            <a:pPr defTabSz="914400">
+              <a:lnSpc>
+                <a:spcPct val="100000"/>
+              </a:lnSpc>
+              <a:tabLst>
+                <a:tab algn="l" pos="0"/>
+              </a:tabLst>
+            </a:pPr>
+            <a:r>
+              <a:rPr b="1" lang="en-US" sz="1500" strike="noStrike" u="none">
+                <a:solidFill>
+                  <a:srgbClr val="ee791f"/>
+                </a:solidFill>
+                <a:effectLst/>
+                <a:uFillTx/>
+                <a:latin typeface="Aptos"/>
+                <a:ea typeface="Aptos"/>
+              </a:rPr>
+              <a:t>02  TRAIN</a:t>
+            </a:r>
+            <a:endParaRPr b="0" lang="en-US" sz="1500" strike="noStrike" u="none">
+              <a:solidFill>
+                <a:srgbClr val="000000"/>
+              </a:solidFill>
+              <a:effectLst/>
+              <a:uFillTx/>
+              <a:latin typeface="Arial"/>
+            </a:endParaRPr>
+          </a:p>
+        </p:txBody>
+      </p:sp>
+      <p:sp>
+        <p:nvSpPr>
+          <p:cNvPr id="176" name="Text 13"/>
+          <p:cNvSpPr/>
+          <p:nvPr/>
+        </p:nvSpPr>
+        <p:spPr>
+          <a:xfrm>
+            <a:off x="2752200" y="3996000"/>
+            <a:ext cx="8412120" cy="282960"/>
+          </a:xfrm>
+          <a:prstGeom prst="rect">
+            <a:avLst/>
+          </a:prstGeom>
+          <a:noFill/>
+          <a:ln w="0">
+            <a:noFill/>
+          </a:ln>
+        </p:spPr>
+        <p:style>
+          <a:lnRef idx="0"/>
+          <a:fillRef idx="0"/>
+          <a:effectRef idx="0"/>
+          <a:fontRef idx="minor"/>
+        </p:style>
+        <p:txBody>
+          <a:bodyPr lIns="360" rIns="360" tIns="360" bIns="360" anchor="ctr">
+            <a:normAutofit/>
+          </a:bodyPr>
+          <a:p>
+            <a:pPr defTabSz="914400">
+              <a:lnSpc>
+                <a:spcPct val="100000"/>
+              </a:lnSpc>
+              <a:tabLst>
+                <a:tab algn="l" pos="0"/>
+              </a:tabLst>
+            </a:pPr>
+            <a:r>
+              <a:rPr b="1" lang="en-US" sz="1500" strike="noStrike" u="none">
+                <a:solidFill>
+                  <a:srgbClr val="11233b"/>
+                </a:solidFill>
+                <a:effectLst/>
+                <a:uFillTx/>
+                <a:latin typeface="Aptos Mono"/>
+                <a:ea typeface="Aptos Mono"/>
+              </a:rPr>
+              <a:t>.venv/bin/python train_model.py --arch perpacket --loss bce</a:t>
+            </a:r>
+            <a:endParaRPr b="0" lang="en-US" sz="1500" strike="noStrike" u="none">
+              <a:solidFill>
+                <a:srgbClr val="000000"/>
+              </a:solidFill>
+              <a:effectLst/>
+              <a:uFillTx/>
+              <a:latin typeface="Arial"/>
+            </a:endParaRPr>
+          </a:p>
+        </p:txBody>
+      </p:sp>
+      <p:sp>
+        <p:nvSpPr>
+          <p:cNvPr id="177" name="Text 14"/>
+          <p:cNvSpPr/>
+          <p:nvPr/>
+        </p:nvSpPr>
+        <p:spPr>
+          <a:xfrm>
+            <a:off x="2761560" y="4325040"/>
+            <a:ext cx="8476200" cy="383760"/>
+          </a:xfrm>
+          <a:prstGeom prst="rect">
+            <a:avLst/>
+          </a:prstGeom>
+          <a:noFill/>
+          <a:ln w="0">
+            <a:noFill/>
+          </a:ln>
+        </p:spPr>
+        <p:style>
+          <a:lnRef idx="0"/>
+          <a:fillRef idx="0"/>
+          <a:effectRef idx="0"/>
+          <a:fontRef idx="minor"/>
+        </p:style>
+        <p:txBody>
+          <a:bodyPr lIns="360" rIns="360" tIns="360" bIns="360" anchor="ctr">
+            <a:normAutofit/>
+          </a:bodyPr>
+          <a:p>
+            <a:pPr defTabSz="914400">
+              <a:lnSpc>
+                <a:spcPct val="100000"/>
+              </a:lnSpc>
+              <a:tabLst>
+                <a:tab algn="l" pos="0"/>
+              </a:tabLst>
+            </a:pPr>
+            <a:r>
+              <a:rPr b="0" lang="en-US" sz="1100" strike="noStrike" u="none">
+                <a:solidFill>
+                  <a:srgbClr val="586a79"/>
+                </a:solidFill>
+                <a:effectLst/>
+                <a:uFillTx/>
+                <a:latin typeface="Aptos Mono"/>
+                <a:ea typeface="Aptos Mono"/>
+              </a:rPr>
+              <a:t>-i bigrun/mixed_masked.h5 -o bigrun/perpacket</a:t>
+            </a:r>
+            <a:endParaRPr b="0" lang="en-US" sz="1100" strike="noStrike" u="none">
+              <a:solidFill>
+                <a:srgbClr val="000000"/>
+              </a:solidFill>
+              <a:effectLst/>
+              <a:uFillTx/>
+              <a:latin typeface="Arial"/>
+            </a:endParaRPr>
+          </a:p>
+          <a:p>
+            <a:pPr defTabSz="914400">
+              <a:lnSpc>
+                <a:spcPct val="100000"/>
+              </a:lnSpc>
+              <a:tabLst>
+                <a:tab algn="l" pos="0"/>
+              </a:tabLst>
+            </a:pPr>
+            <a:r>
+              <a:rPr b="0" lang="en-US" sz="1100" strike="noStrike" u="none">
+                <a:solidFill>
+                  <a:srgbClr val="586a79"/>
+                </a:solidFill>
+                <a:effectLst/>
+                <a:uFillTx/>
+                <a:latin typeface="Aptos Mono"/>
+                <a:ea typeface="Aptos Mono"/>
+              </a:rPr>
+              <a:t>--train-cap 150000 --epochs 8   (per-packet head, ~38k params)</a:t>
+            </a:r>
+            <a:endParaRPr b="0" lang="en-US" sz="1100" strike="noStrike" u="none">
+              <a:solidFill>
+                <a:srgbClr val="000000"/>
+              </a:solidFill>
+              <a:effectLst/>
+              <a:uFillTx/>
+              <a:latin typeface="Arial"/>
+            </a:endParaRPr>
+          </a:p>
+        </p:txBody>
+      </p:sp>
+      <p:sp>
+        <p:nvSpPr>
+          <p:cNvPr id="178" name="Shape 15"/>
+          <p:cNvSpPr/>
+          <p:nvPr/>
+        </p:nvSpPr>
+        <p:spPr>
+          <a:xfrm>
+            <a:off x="631080" y="4919400"/>
+            <a:ext cx="10917720" cy="914040"/>
+          </a:xfrm>
+          <a:prstGeom prst="roundRect">
+            <a:avLst>
+              <a:gd name="adj" fmla="val 10000"/>
+            </a:avLst>
+          </a:prstGeom>
+          <a:solidFill>
+            <a:srgbClr val="edf5f8"/>
+          </a:solidFill>
+          <a:ln w="12700">
+            <a:solidFill>
+              <a:srgbClr val="edf5f8"/>
+            </a:solidFill>
+            <a:round/>
+          </a:ln>
+        </p:spPr>
+        <p:style>
+          <a:lnRef idx="0"/>
+          <a:fillRef idx="0"/>
+          <a:effectRef idx="0"/>
+          <a:fontRef idx="minor"/>
+        </p:style>
+        <p:txBody>
+          <a:bodyPr lIns="90000" rIns="90000" tIns="45000" bIns="45000" anchor="t">
+            <a:noAutofit/>
+          </a:bodyPr>
+          <a:p>
+            <a:endParaRPr b="0" lang="en-US" sz="1800" strike="noStrike" u="none">
+              <a:solidFill>
+                <a:srgbClr val="000000"/>
+              </a:solidFill>
+              <a:effectLst/>
+              <a:uFillTx/>
+              <a:latin typeface="Arial"/>
+            </a:endParaRPr>
+          </a:p>
+        </p:txBody>
+      </p:sp>
+      <p:sp>
+        <p:nvSpPr>
+          <p:cNvPr id="179" name="Text 16"/>
+          <p:cNvSpPr/>
+          <p:nvPr/>
+        </p:nvSpPr>
+        <p:spPr>
+          <a:xfrm>
+            <a:off x="804600" y="5029200"/>
+            <a:ext cx="2011320" cy="273960"/>
+          </a:xfrm>
+          <a:prstGeom prst="rect">
+            <a:avLst/>
+          </a:prstGeom>
+          <a:noFill/>
+          <a:ln w="0">
+            <a:noFill/>
+          </a:ln>
+        </p:spPr>
+        <p:style>
+          <a:lnRef idx="0"/>
+          <a:fillRef idx="0"/>
+          <a:effectRef idx="0"/>
+          <a:fontRef idx="minor"/>
+        </p:style>
+        <p:txBody>
+          <a:bodyPr lIns="360" rIns="360" tIns="360" bIns="360" anchor="ctr">
+            <a:normAutofit/>
+          </a:bodyPr>
+          <a:p>
+            <a:pPr defTabSz="914400">
+              <a:lnSpc>
+                <a:spcPct val="100000"/>
+              </a:lnSpc>
+              <a:tabLst>
+                <a:tab algn="l" pos="0"/>
+              </a:tabLst>
+            </a:pPr>
+            <a:r>
+              <a:rPr b="1" lang="en-US" sz="1500" strike="noStrike" u="none">
+                <a:solidFill>
+                  <a:srgbClr val="ee791f"/>
+                </a:solidFill>
+                <a:effectLst/>
+                <a:uFillTx/>
+                <a:latin typeface="Aptos"/>
+                <a:ea typeface="Aptos"/>
+              </a:rPr>
+              <a:t>03  COMPARE</a:t>
+            </a:r>
+            <a:endParaRPr b="0" lang="en-US" sz="1500" strike="noStrike" u="none">
+              <a:solidFill>
+                <a:srgbClr val="000000"/>
+              </a:solidFill>
+              <a:effectLst/>
+              <a:uFillTx/>
+              <a:latin typeface="Arial"/>
+            </a:endParaRPr>
+          </a:p>
+        </p:txBody>
+      </p:sp>
+      <p:sp>
+        <p:nvSpPr>
+          <p:cNvPr id="180" name="Text 17"/>
+          <p:cNvSpPr/>
+          <p:nvPr/>
+        </p:nvSpPr>
+        <p:spPr>
+          <a:xfrm>
+            <a:off x="2752200" y="5001840"/>
+            <a:ext cx="8412120" cy="282960"/>
+          </a:xfrm>
+          <a:prstGeom prst="rect">
+            <a:avLst/>
+          </a:prstGeom>
+          <a:noFill/>
+          <a:ln w="0">
+            <a:noFill/>
+          </a:ln>
+        </p:spPr>
+        <p:style>
+          <a:lnRef idx="0"/>
+          <a:fillRef idx="0"/>
+          <a:effectRef idx="0"/>
+          <a:fontRef idx="minor"/>
+        </p:style>
+        <p:txBody>
+          <a:bodyPr lIns="360" rIns="360" tIns="360" bIns="360" anchor="ctr">
+            <a:normAutofit/>
+          </a:bodyPr>
+          <a:p>
+            <a:pPr defTabSz="914400">
+              <a:lnSpc>
+                <a:spcPct val="100000"/>
+              </a:lnSpc>
+              <a:tabLst>
+                <a:tab algn="l" pos="0"/>
+              </a:tabLst>
+            </a:pPr>
+            <a:r>
+              <a:rPr b="1" lang="en-US" sz="1500" strike="noStrike" u="none">
+                <a:solidFill>
+                  <a:srgbClr val="11233b"/>
+                </a:solidFill>
+                <a:effectLst/>
+                <a:uFillTx/>
+                <a:latin typeface="Aptos Mono"/>
+                <a:ea typeface="Aptos Mono"/>
+              </a:rPr>
+              <a:t>.venv/bin/python evaluate_compare.py --csv bigrun/comparison.csv</a:t>
+            </a:r>
+            <a:endParaRPr b="0" lang="en-US" sz="1500" strike="noStrike" u="none">
+              <a:solidFill>
+                <a:srgbClr val="000000"/>
+              </a:solidFill>
+              <a:effectLst/>
+              <a:uFillTx/>
+              <a:latin typeface="Arial"/>
+            </a:endParaRPr>
+          </a:p>
+        </p:txBody>
+      </p:sp>
+      <p:sp>
+        <p:nvSpPr>
+          <p:cNvPr id="181" name="Text 18"/>
+          <p:cNvSpPr/>
+          <p:nvPr/>
+        </p:nvSpPr>
+        <p:spPr>
+          <a:xfrm>
+            <a:off x="2761560" y="5330880"/>
+            <a:ext cx="8476200" cy="383760"/>
+          </a:xfrm>
+          <a:prstGeom prst="rect">
+            <a:avLst/>
+          </a:prstGeom>
+          <a:noFill/>
+          <a:ln w="0">
+            <a:noFill/>
+          </a:ln>
+        </p:spPr>
+        <p:style>
+          <a:lnRef idx="0"/>
+          <a:fillRef idx="0"/>
+          <a:effectRef idx="0"/>
+          <a:fontRef idx="minor"/>
+        </p:style>
+        <p:txBody>
+          <a:bodyPr lIns="360" rIns="360" tIns="360" bIns="360" anchor="ctr">
+            <a:normAutofit/>
+          </a:bodyPr>
+          <a:p>
+            <a:pPr defTabSz="914400">
+              <a:lnSpc>
+                <a:spcPct val="100000"/>
+              </a:lnSpc>
+              <a:tabLst>
+                <a:tab algn="l" pos="0"/>
+              </a:tabLst>
+            </a:pPr>
+            <a:r>
+              <a:rPr b="0" lang="en-US" sz="1100" strike="noStrike" u="none">
+                <a:solidFill>
+                  <a:srgbClr val="586a79"/>
+                </a:solidFill>
+                <a:effectLst/>
+                <a:uFillTx/>
+                <a:latin typeface="Aptos Mono"/>
+                <a:ea typeface="Aptos Mono"/>
+              </a:rPr>
+              <a:t>-m shipped best_run/run_003 -m perpacket bigrun/perpacket</a:t>
+            </a:r>
+            <a:endParaRPr b="0" lang="en-US" sz="1100" strike="noStrike" u="none">
+              <a:solidFill>
+                <a:srgbClr val="000000"/>
+              </a:solidFill>
+              <a:effectLst/>
+              <a:uFillTx/>
+              <a:latin typeface="Arial"/>
+            </a:endParaRPr>
+          </a:p>
+          <a:p>
+            <a:pPr defTabSz="914400">
+              <a:lnSpc>
+                <a:spcPct val="100000"/>
+              </a:lnSpc>
+              <a:tabLst>
+                <a:tab algn="l" pos="0"/>
+              </a:tabLst>
+            </a:pPr>
+            <a:r>
+              <a:rPr b="0" lang="en-US" sz="1100" strike="noStrike" u="none">
+                <a:solidFill>
+                  <a:srgbClr val="586a79"/>
+                </a:solidFill>
+                <a:effectLst/>
+                <a:uFillTx/>
+                <a:latin typeface="Aptos Mono"/>
+                <a:ea typeface="Aptos Mono"/>
+              </a:rPr>
+              <a:t>--eval-cap 60000   (same held-out split for every model)</a:t>
+            </a:r>
+            <a:endParaRPr b="0" lang="en-US" sz="1100" strike="noStrike" u="none">
+              <a:solidFill>
+                <a:srgbClr val="000000"/>
+              </a:solidFill>
+              <a:effectLst/>
+              <a:uFillTx/>
+              <a:latin typeface="Arial"/>
+            </a:endParaRPr>
+          </a:p>
+        </p:txBody>
+      </p:sp>
+    </p:spTree>
+  </p:cSld>
+  <mc:AlternateContent>
+    <mc:Choice Requires="p14">
+      <p:transition spd="slow" p14:dur="2000"/>
+    </mc:Choice>
+    <mc:Fallback>
+      <p:transition spd="slow"/>
+    </mc:Fallback>
+  </mc:AlternateContent>
+</p:sld>
+</file>
+
+<file path=ppt/slides/slide13.xml><?xml version="1.0" encoding="utf-8"?>
+<p:sld xmlns:a="http://schemas.openxmlformats.org/drawingml/2006/main" xmlns:p="http://schemas.openxmlformats.org/presentationml/2006/main" xmlns:r="http://schemas.openxmlformats.org/officeDocument/2006/relationships" xmlns:p14="http://schemas.microsoft.com/office/powerpoint/2010/main" xmlns:p15="http://schemas.microsoft.com/office/powerpoint/2012/main" xmlns:mc="http://schemas.openxmlformats.org/markup-compatibility/2006">
+  <p:cSld>
+    <p:bg>
+      <p:bgPr>
+        <a:solidFill>
+          <a:srgbClr val="ffffff"/>
+        </a:solidFill>
+      </p:bgPr>
+    </p:bg>
+    <p:spTree>
+      <p:nvGrpSpPr>
+        <p:cNvPr id="1" name=""/>
+        <p:cNvGrpSpPr/>
+        <p:nvPr/>
+      </p:nvGrpSpPr>
+      <p:grpSpPr>
+        <a:xfrm>
+          <a:off x="0" y="0"/>
+          <a:ext cx="0" cy="0"/>
+          <a:chOff x="0" y="0"/>
+          <a:chExt cx="0" cy="0"/>
+        </a:xfrm>
+      </p:grpSpPr>
+      <p:sp>
+        <p:nvSpPr>
+          <p:cNvPr id="182" name="Shape 0"/>
+          <p:cNvSpPr/>
+          <p:nvPr/>
+        </p:nvSpPr>
+        <p:spPr>
+          <a:xfrm>
+            <a:off x="0" y="0"/>
+            <a:ext cx="12191400" cy="109440"/>
+          </a:xfrm>
+          <a:prstGeom prst="rect">
+            <a:avLst/>
+          </a:prstGeom>
+          <a:solidFill>
+            <a:srgbClr val="ee791f"/>
+          </a:solidFill>
+          <a:ln w="12700">
+            <a:solidFill>
+              <a:srgbClr val="ee791f"/>
+            </a:solidFill>
+            <a:round/>
+          </a:ln>
+        </p:spPr>
+        <p:style>
+          <a:lnRef idx="0"/>
+          <a:fillRef idx="0"/>
+          <a:effectRef idx="0"/>
+          <a:fontRef idx="minor"/>
+        </p:style>
+        <p:txBody>
+          <a:bodyPr lIns="90000" rIns="90000" tIns="45000" bIns="45000" anchor="t">
+            <a:noAutofit/>
+          </a:bodyPr>
+          <a:p>
+            <a:endParaRPr b="0" lang="en-US" sz="1800" strike="noStrike" u="none">
+              <a:solidFill>
+                <a:srgbClr val="ffffff"/>
+              </a:solidFill>
+              <a:effectLst/>
+              <a:uFillTx/>
+              <a:latin typeface="Arial"/>
+            </a:endParaRPr>
+          </a:p>
+        </p:txBody>
+      </p:sp>
+      <p:sp>
+        <p:nvSpPr>
+          <p:cNvPr id="183" name="Text 1"/>
+          <p:cNvSpPr/>
+          <p:nvPr/>
+        </p:nvSpPr>
+        <p:spPr>
+          <a:xfrm>
+            <a:off x="530280" y="311040"/>
+            <a:ext cx="10881000" cy="548280"/>
+          </a:xfrm>
+          <a:prstGeom prst="rect">
+            <a:avLst/>
+          </a:prstGeom>
+          <a:noFill/>
+          <a:ln w="0">
+            <a:noFill/>
+          </a:ln>
+        </p:spPr>
+        <p:style>
+          <a:lnRef idx="0"/>
+          <a:fillRef idx="0"/>
+          <a:effectRef idx="0"/>
+          <a:fontRef idx="minor"/>
+        </p:style>
+        <p:txBody>
+          <a:bodyPr lIns="360" rIns="360" tIns="360" bIns="360" anchor="ctr">
+            <a:normAutofit/>
+          </a:bodyPr>
+          <a:p>
+            <a:pPr defTabSz="914400">
+              <a:lnSpc>
+                <a:spcPct val="100000"/>
+              </a:lnSpc>
+              <a:tabLst>
+                <a:tab algn="l" pos="0"/>
+              </a:tabLst>
+            </a:pPr>
+            <a:r>
+              <a:rPr b="1" lang="en-US" sz="2700" strike="noStrike" u="none">
+                <a:solidFill>
+                  <a:srgbClr val="11233b"/>
+                </a:solidFill>
+                <a:effectLst/>
+                <a:uFillTx/>
+                <a:latin typeface="Aptos"/>
+                <a:ea typeface="Aptos"/>
+              </a:rPr>
+              <a:t>Result — per-packet CNN meets the NATWORK KPIs</a:t>
+            </a:r>
+            <a:endParaRPr b="0" lang="en-US" sz="2700" strike="noStrike" u="none">
+              <a:solidFill>
+                <a:srgbClr val="000000"/>
+              </a:solidFill>
+              <a:effectLst/>
+              <a:uFillTx/>
+              <a:latin typeface="Arial"/>
+            </a:endParaRPr>
+          </a:p>
+        </p:txBody>
+      </p:sp>
+      <p:sp>
+        <p:nvSpPr>
+          <p:cNvPr id="184" name="Shape 2"/>
+          <p:cNvSpPr/>
+          <p:nvPr/>
+        </p:nvSpPr>
+        <p:spPr>
+          <a:xfrm>
+            <a:off x="530280" y="951120"/>
+            <a:ext cx="11100600" cy="31680"/>
+          </a:xfrm>
+          <a:prstGeom prst="rect">
+            <a:avLst/>
+          </a:prstGeom>
+          <a:solidFill>
+            <a:srgbClr val="ee791f"/>
+          </a:solidFill>
+          <a:ln w="12700">
+            <a:solidFill>
+              <a:srgbClr val="ee791f"/>
+            </a:solidFill>
+            <a:round/>
+          </a:ln>
+        </p:spPr>
+        <p:style>
+          <a:lnRef idx="0"/>
+          <a:fillRef idx="0"/>
+          <a:effectRef idx="0"/>
+          <a:fontRef idx="minor"/>
+        </p:style>
+        <p:txBody>
+          <a:bodyPr lIns="90000" rIns="90000" tIns="-12960" bIns="-12960" anchor="t">
+            <a:noAutofit/>
+          </a:bodyPr>
+          <a:p>
+            <a:endParaRPr b="0" lang="en-US" sz="1800" strike="noStrike" u="none">
+              <a:solidFill>
+                <a:srgbClr val="ffffff"/>
+              </a:solidFill>
+              <a:effectLst/>
+              <a:uFillTx/>
+              <a:latin typeface="Arial"/>
+            </a:endParaRPr>
+          </a:p>
+        </p:txBody>
+      </p:sp>
+      <p:sp>
+        <p:nvSpPr>
+          <p:cNvPr id="185" name="Text 3"/>
+          <p:cNvSpPr/>
+          <p:nvPr/>
+        </p:nvSpPr>
+        <p:spPr>
+          <a:xfrm>
+            <a:off x="548640" y="6473880"/>
+            <a:ext cx="9143640" cy="200880"/>
+          </a:xfrm>
+          <a:prstGeom prst="rect">
+            <a:avLst/>
+          </a:prstGeom>
+          <a:noFill/>
+          <a:ln w="0">
+            <a:noFill/>
+          </a:ln>
+        </p:spPr>
+        <p:style>
+          <a:lnRef idx="0"/>
+          <a:fillRef idx="0"/>
+          <a:effectRef idx="0"/>
+          <a:fontRef idx="minor"/>
+        </p:style>
+        <p:txBody>
+          <a:bodyPr lIns="360" rIns="360" tIns="360" bIns="360" anchor="ctr">
+            <a:normAutofit/>
+          </a:bodyPr>
+          <a:p>
+            <a:pPr defTabSz="914400">
+              <a:lnSpc>
+                <a:spcPct val="100000"/>
+              </a:lnSpc>
+              <a:tabLst>
+                <a:tab algn="l" pos="0"/>
+              </a:tabLst>
+            </a:pPr>
+            <a:r>
+              <a:rPr b="0" lang="en-US" sz="900" strike="noStrike" u="none">
+                <a:solidFill>
+                  <a:srgbClr val="586a79"/>
+                </a:solidFill>
+                <a:effectLst/>
+                <a:uFillTx/>
+                <a:latin typeface="Aptos"/>
+                <a:ea typeface="Aptos"/>
+              </a:rPr>
+              <a:t>6G-DALI  ×  NATWORK  |  LOCAL CYBERSECURITY HACKATHON</a:t>
+            </a:r>
+            <a:endParaRPr b="0" lang="en-US" sz="900" strike="noStrike" u="none">
+              <a:solidFill>
+                <a:srgbClr val="000000"/>
+              </a:solidFill>
+              <a:effectLst/>
+              <a:uFillTx/>
+              <a:latin typeface="Arial"/>
+            </a:endParaRPr>
+          </a:p>
+        </p:txBody>
+      </p:sp>
+      <p:sp>
+        <p:nvSpPr>
+          <p:cNvPr id="186" name="Text 4"/>
+          <p:cNvSpPr/>
+          <p:nvPr/>
+        </p:nvSpPr>
+        <p:spPr>
+          <a:xfrm>
+            <a:off x="11018520" y="6473880"/>
+            <a:ext cx="511560" cy="200880"/>
+          </a:xfrm>
+          <a:prstGeom prst="rect">
+            <a:avLst/>
+          </a:prstGeom>
+          <a:noFill/>
+          <a:ln w="0">
+            <a:noFill/>
+          </a:ln>
+        </p:spPr>
+        <p:style>
+          <a:lnRef idx="0"/>
+          <a:fillRef idx="0"/>
+          <a:effectRef idx="0"/>
+          <a:fontRef idx="minor"/>
+        </p:style>
+        <p:txBody>
+          <a:bodyPr lIns="360" rIns="360" tIns="360" bIns="360" anchor="ctr">
+            <a:normAutofit/>
+          </a:bodyPr>
+          <a:p>
+            <a:pPr algn="r" defTabSz="914400">
+              <a:lnSpc>
+                <a:spcPct val="100000"/>
+              </a:lnSpc>
+              <a:tabLst>
+                <a:tab algn="l" pos="0"/>
+              </a:tabLst>
+            </a:pPr>
+            <a:r>
+              <a:rPr b="0" lang="en-US" sz="900" strike="noStrike" u="none">
+                <a:solidFill>
+                  <a:srgbClr val="586a79"/>
+                </a:solidFill>
+                <a:effectLst/>
+                <a:uFillTx/>
+                <a:latin typeface="Aptos"/>
+                <a:ea typeface="Aptos"/>
+              </a:rPr>
+              <a:t>13</a:t>
+            </a:r>
+            <a:endParaRPr b="0" lang="en-US" sz="900" strike="noStrike" u="none">
+              <a:solidFill>
+                <a:srgbClr val="000000"/>
+              </a:solidFill>
+              <a:effectLst/>
+              <a:uFillTx/>
+              <a:latin typeface="Arial"/>
+            </a:endParaRPr>
+          </a:p>
+        </p:txBody>
+      </p:sp>
+      <p:sp>
+        <p:nvSpPr>
+          <p:cNvPr id="187" name="Shape 5"/>
+          <p:cNvSpPr/>
+          <p:nvPr/>
+        </p:nvSpPr>
+        <p:spPr>
+          <a:xfrm>
+            <a:off x="786240" y="1454040"/>
+            <a:ext cx="77400" cy="77400"/>
+          </a:xfrm>
+          <a:prstGeom prst="roundRect">
+            <a:avLst>
+              <a:gd name="adj" fmla="val 117647"/>
+            </a:avLst>
+          </a:prstGeom>
+          <a:solidFill>
+            <a:srgbClr val="ee791f"/>
+          </a:solidFill>
+          <a:ln w="12700">
+            <a:solidFill>
+              <a:srgbClr val="ee791f"/>
+            </a:solidFill>
+            <a:round/>
+          </a:ln>
+        </p:spPr>
+        <p:style>
+          <a:lnRef idx="0"/>
+          <a:fillRef idx="0"/>
+          <a:effectRef idx="0"/>
+          <a:fontRef idx="minor"/>
+        </p:style>
+        <p:txBody>
+          <a:bodyPr lIns="90000" rIns="90000" tIns="10080" bIns="10080" anchor="t">
+            <a:noAutofit/>
+          </a:bodyPr>
+          <a:p>
+            <a:endParaRPr b="0" lang="en-US" sz="1800" strike="noStrike" u="none">
+              <a:solidFill>
+                <a:srgbClr val="ffffff"/>
+              </a:solidFill>
+              <a:effectLst/>
+              <a:uFillTx/>
+              <a:latin typeface="Arial"/>
+            </a:endParaRPr>
+          </a:p>
+        </p:txBody>
+      </p:sp>
+      <p:sp>
+        <p:nvSpPr>
+          <p:cNvPr id="188" name="Text 6"/>
+          <p:cNvSpPr/>
+          <p:nvPr/>
+        </p:nvSpPr>
+        <p:spPr>
+          <a:xfrm>
+            <a:off x="1033200" y="1334880"/>
+            <a:ext cx="10305000" cy="456840"/>
+          </a:xfrm>
+          <a:prstGeom prst="rect">
+            <a:avLst/>
+          </a:prstGeom>
+          <a:noFill/>
+          <a:ln w="0">
+            <a:noFill/>
+          </a:ln>
+        </p:spPr>
+        <p:style>
+          <a:lnRef idx="0"/>
+          <a:fillRef idx="0"/>
+          <a:effectRef idx="0"/>
+          <a:fontRef idx="minor"/>
+        </p:style>
+        <p:txBody>
+          <a:bodyPr lIns="360" rIns="360" tIns="360" bIns="360" anchor="ctr">
+            <a:normAutofit/>
+          </a:bodyPr>
+          <a:p>
+            <a:pPr defTabSz="914400">
+              <a:lnSpc>
+                <a:spcPct val="100000"/>
+              </a:lnSpc>
+              <a:tabLst>
+                <a:tab algn="l" pos="0"/>
+              </a:tabLst>
+            </a:pPr>
+            <a:r>
+              <a:rPr b="0" lang="en-US" sz="1800" strike="noStrike" u="none">
+                <a:solidFill>
+                  <a:srgbClr val="11233b"/>
+                </a:solidFill>
+                <a:effectLst/>
+                <a:uFillTx/>
+                <a:latin typeface="Aptos"/>
+                <a:ea typeface="Aptos"/>
+              </a:rPr>
+              <a:t>Shipped CNN (global-window head): FP 55.7%  ·  FN 36.7%  — far above the 1% KPI</a:t>
+            </a:r>
+            <a:endParaRPr b="0" lang="en-US" sz="1800" strike="noStrike" u="none">
+              <a:solidFill>
+                <a:srgbClr val="000000"/>
+              </a:solidFill>
+              <a:effectLst/>
+              <a:uFillTx/>
+              <a:latin typeface="Arial"/>
+            </a:endParaRPr>
+          </a:p>
+        </p:txBody>
+      </p:sp>
+      <p:sp>
+        <p:nvSpPr>
+          <p:cNvPr id="189" name="Shape 7"/>
+          <p:cNvSpPr/>
+          <p:nvPr/>
+        </p:nvSpPr>
+        <p:spPr>
+          <a:xfrm>
+            <a:off x="786240" y="2286000"/>
+            <a:ext cx="77400" cy="77400"/>
+          </a:xfrm>
+          <a:prstGeom prst="roundRect">
+            <a:avLst>
+              <a:gd name="adj" fmla="val 117647"/>
+            </a:avLst>
+          </a:prstGeom>
+          <a:solidFill>
+            <a:srgbClr val="ee791f"/>
+          </a:solidFill>
+          <a:ln w="12700">
+            <a:solidFill>
+              <a:srgbClr val="ee791f"/>
+            </a:solidFill>
+            <a:round/>
+          </a:ln>
+        </p:spPr>
+        <p:style>
+          <a:lnRef idx="0"/>
+          <a:fillRef idx="0"/>
+          <a:effectRef idx="0"/>
+          <a:fontRef idx="minor"/>
+        </p:style>
+        <p:txBody>
+          <a:bodyPr lIns="90000" rIns="90000" tIns="10080" bIns="10080" anchor="t">
+            <a:noAutofit/>
+          </a:bodyPr>
+          <a:p>
+            <a:endParaRPr b="0" lang="en-US" sz="1800" strike="noStrike" u="none">
+              <a:solidFill>
+                <a:srgbClr val="ffffff"/>
+              </a:solidFill>
+              <a:effectLst/>
+              <a:uFillTx/>
+              <a:latin typeface="Arial"/>
+            </a:endParaRPr>
+          </a:p>
+        </p:txBody>
+      </p:sp>
+      <p:sp>
+        <p:nvSpPr>
+          <p:cNvPr id="190" name="Text 8"/>
+          <p:cNvSpPr/>
+          <p:nvPr/>
+        </p:nvSpPr>
+        <p:spPr>
+          <a:xfrm>
+            <a:off x="1033200" y="2167200"/>
+            <a:ext cx="10305000" cy="456840"/>
+          </a:xfrm>
+          <a:prstGeom prst="rect">
+            <a:avLst/>
+          </a:prstGeom>
+          <a:noFill/>
+          <a:ln w="0">
+            <a:noFill/>
+          </a:ln>
+        </p:spPr>
+        <p:style>
+          <a:lnRef idx="0"/>
+          <a:fillRef idx="0"/>
+          <a:effectRef idx="0"/>
+          <a:fontRef idx="minor"/>
+        </p:style>
+        <p:txBody>
+          <a:bodyPr lIns="360" rIns="360" tIns="360" bIns="360" anchor="ctr">
+            <a:normAutofit/>
+          </a:bodyPr>
+          <a:p>
+            <a:pPr defTabSz="914400">
+              <a:lnSpc>
+                <a:spcPct val="100000"/>
+              </a:lnSpc>
+              <a:tabLst>
+                <a:tab algn="l" pos="0"/>
+              </a:tabLst>
+            </a:pPr>
+            <a:r>
+              <a:rPr b="0" lang="en-US" sz="1800" strike="noStrike" u="none">
+                <a:solidFill>
+                  <a:srgbClr val="11233b"/>
+                </a:solidFill>
+                <a:effectLst/>
+                <a:uFillTx/>
+                <a:latin typeface="Aptos"/>
+                <a:ea typeface="Aptos"/>
+              </a:rPr>
+              <a:t>Same architecture retrained on the new data: FP 38.0%  ·  FN 62.0%  — still fails</a:t>
+            </a:r>
+            <a:endParaRPr b="0" lang="en-US" sz="1800" strike="noStrike" u="none">
+              <a:solidFill>
+                <a:srgbClr val="000000"/>
+              </a:solidFill>
+              <a:effectLst/>
+              <a:uFillTx/>
+              <a:latin typeface="Arial"/>
+            </a:endParaRPr>
+          </a:p>
+        </p:txBody>
+      </p:sp>
+      <p:sp>
+        <p:nvSpPr>
+          <p:cNvPr id="191" name="Shape 9"/>
+          <p:cNvSpPr/>
+          <p:nvPr/>
+        </p:nvSpPr>
+        <p:spPr>
+          <a:xfrm>
+            <a:off x="786240" y="3117960"/>
+            <a:ext cx="77400" cy="77400"/>
+          </a:xfrm>
+          <a:prstGeom prst="roundRect">
+            <a:avLst>
+              <a:gd name="adj" fmla="val 117647"/>
+            </a:avLst>
+          </a:prstGeom>
+          <a:solidFill>
+            <a:srgbClr val="ee791f"/>
+          </a:solidFill>
+          <a:ln w="12700">
+            <a:solidFill>
+              <a:srgbClr val="ee791f"/>
+            </a:solidFill>
+            <a:round/>
+          </a:ln>
+        </p:spPr>
+        <p:style>
+          <a:lnRef idx="0"/>
+          <a:fillRef idx="0"/>
+          <a:effectRef idx="0"/>
+          <a:fontRef idx="minor"/>
+        </p:style>
+        <p:txBody>
+          <a:bodyPr lIns="90000" rIns="90000" tIns="10080" bIns="10080" anchor="t">
+            <a:noAutofit/>
+          </a:bodyPr>
+          <a:p>
+            <a:endParaRPr b="0" lang="en-US" sz="1800" strike="noStrike" u="none">
+              <a:solidFill>
+                <a:srgbClr val="ffffff"/>
+              </a:solidFill>
+              <a:effectLst/>
+              <a:uFillTx/>
+              <a:latin typeface="Arial"/>
+            </a:endParaRPr>
+          </a:p>
+        </p:txBody>
+      </p:sp>
+      <p:sp>
+        <p:nvSpPr>
+          <p:cNvPr id="192" name="Text 10"/>
+          <p:cNvSpPr/>
+          <p:nvPr/>
+        </p:nvSpPr>
+        <p:spPr>
+          <a:xfrm>
+            <a:off x="1033200" y="2999160"/>
+            <a:ext cx="10305000" cy="456840"/>
+          </a:xfrm>
+          <a:prstGeom prst="rect">
+            <a:avLst/>
+          </a:prstGeom>
+          <a:noFill/>
+          <a:ln w="0">
+            <a:noFill/>
+          </a:ln>
+        </p:spPr>
+        <p:style>
+          <a:lnRef idx="0"/>
+          <a:fillRef idx="0"/>
+          <a:effectRef idx="0"/>
+          <a:fontRef idx="minor"/>
+        </p:style>
+        <p:txBody>
+          <a:bodyPr lIns="360" rIns="360" tIns="360" bIns="360" anchor="ctr">
+            <a:normAutofit/>
+          </a:bodyPr>
+          <a:p>
+            <a:pPr defTabSz="914400">
+              <a:lnSpc>
+                <a:spcPct val="100000"/>
+              </a:lnSpc>
+              <a:tabLst>
+                <a:tab algn="l" pos="0"/>
+              </a:tabLst>
+            </a:pPr>
+            <a:r>
+              <a:rPr b="0" lang="en-US" sz="1800" strike="noStrike" u="none">
+                <a:solidFill>
+                  <a:srgbClr val="11233b"/>
+                </a:solidFill>
+                <a:effectLst/>
+                <a:uFillTx/>
+                <a:latin typeface="Aptos"/>
+                <a:ea typeface="Aptos"/>
+              </a:rPr>
+              <a:t>New per-packet CNN: FP 0.0001% (3 / 4.2M)  ·  FN 0.009% (162 / 1.8M)  — PASS</a:t>
+            </a:r>
+            <a:endParaRPr b="0" lang="en-US" sz="1800" strike="noStrike" u="none">
+              <a:solidFill>
+                <a:srgbClr val="000000"/>
+              </a:solidFill>
+              <a:effectLst/>
+              <a:uFillTx/>
+              <a:latin typeface="Arial"/>
+            </a:endParaRPr>
+          </a:p>
+        </p:txBody>
+      </p:sp>
+      <p:sp>
+        <p:nvSpPr>
+          <p:cNvPr id="193" name="Shape 11"/>
+          <p:cNvSpPr/>
+          <p:nvPr/>
+        </p:nvSpPr>
+        <p:spPr>
+          <a:xfrm>
+            <a:off x="786240" y="3950280"/>
+            <a:ext cx="77400" cy="77400"/>
+          </a:xfrm>
+          <a:prstGeom prst="roundRect">
+            <a:avLst>
+              <a:gd name="adj" fmla="val 117647"/>
+            </a:avLst>
+          </a:prstGeom>
+          <a:solidFill>
+            <a:srgbClr val="ee791f"/>
+          </a:solidFill>
+          <a:ln w="12700">
+            <a:solidFill>
+              <a:srgbClr val="ee791f"/>
+            </a:solidFill>
+            <a:round/>
+          </a:ln>
+        </p:spPr>
+        <p:style>
+          <a:lnRef idx="0"/>
+          <a:fillRef idx="0"/>
+          <a:effectRef idx="0"/>
+          <a:fontRef idx="minor"/>
+        </p:style>
+        <p:txBody>
+          <a:bodyPr lIns="90000" rIns="90000" tIns="10080" bIns="10080" anchor="t">
+            <a:noAutofit/>
+          </a:bodyPr>
+          <a:p>
+            <a:endParaRPr b="0" lang="en-US" sz="1800" strike="noStrike" u="none">
+              <a:solidFill>
+                <a:srgbClr val="ffffff"/>
+              </a:solidFill>
+              <a:effectLst/>
+              <a:uFillTx/>
+              <a:latin typeface="Arial"/>
+            </a:endParaRPr>
+          </a:p>
+        </p:txBody>
+      </p:sp>
+      <p:sp>
+        <p:nvSpPr>
+          <p:cNvPr id="194" name="Text 12"/>
+          <p:cNvSpPr/>
+          <p:nvPr/>
+        </p:nvSpPr>
+        <p:spPr>
+          <a:xfrm>
+            <a:off x="1033200" y="3831480"/>
+            <a:ext cx="10305000" cy="456840"/>
+          </a:xfrm>
+          <a:prstGeom prst="rect">
+            <a:avLst/>
+          </a:prstGeom>
+          <a:noFill/>
+          <a:ln w="0">
+            <a:noFill/>
+          </a:ln>
+        </p:spPr>
+        <p:style>
+          <a:lnRef idx="0"/>
+          <a:fillRef idx="0"/>
+          <a:effectRef idx="0"/>
+          <a:fontRef idx="minor"/>
+        </p:style>
+        <p:txBody>
+          <a:bodyPr lIns="360" rIns="360" tIns="360" bIns="360" anchor="ctr">
+            <a:normAutofit/>
+          </a:bodyPr>
+          <a:p>
+            <a:pPr defTabSz="914400">
+              <a:lnSpc>
+                <a:spcPct val="100000"/>
+              </a:lnSpc>
+              <a:tabLst>
+                <a:tab algn="l" pos="0"/>
+              </a:tabLst>
+            </a:pPr>
+            <a:r>
+              <a:rPr b="0" lang="en-US" sz="1800" strike="noStrike" u="none">
+                <a:solidFill>
+                  <a:srgbClr val="11233b"/>
+                </a:solidFill>
+                <a:effectLst/>
+                <a:uFillTx/>
+                <a:latin typeface="Aptos"/>
+                <a:ea typeface="Aptos"/>
+              </a:rPr>
+              <a:t>Same 100-packet window I/O; the per-packet head is ~17× smaller (38k vs 671k params)</a:t>
+            </a:r>
+            <a:endParaRPr b="0" lang="en-US" sz="1800" strike="noStrike" u="none">
+              <a:solidFill>
+                <a:srgbClr val="000000"/>
+              </a:solidFill>
+              <a:effectLst/>
+              <a:uFillTx/>
+              <a:latin typeface="Arial"/>
+            </a:endParaRPr>
+          </a:p>
+        </p:txBody>
+      </p:sp>
+      <p:sp>
+        <p:nvSpPr>
+          <p:cNvPr id="195" name="Shape 13"/>
+          <p:cNvSpPr/>
+          <p:nvPr/>
+        </p:nvSpPr>
+        <p:spPr>
+          <a:xfrm>
+            <a:off x="713160" y="5230440"/>
+            <a:ext cx="10789560" cy="667080"/>
+          </a:xfrm>
+          <a:prstGeom prst="roundRect">
+            <a:avLst>
+              <a:gd name="adj" fmla="val 13699"/>
+            </a:avLst>
+          </a:prstGeom>
+          <a:solidFill>
+            <a:srgbClr val="fff1e8"/>
+          </a:solidFill>
+          <a:ln w="12700">
+            <a:solidFill>
+              <a:srgbClr val="fff1e8"/>
+            </a:solidFill>
+            <a:round/>
+          </a:ln>
+        </p:spPr>
+        <p:style>
+          <a:lnRef idx="0"/>
+          <a:fillRef idx="0"/>
+          <a:effectRef idx="0"/>
+          <a:fontRef idx="minor"/>
+        </p:style>
+        <p:txBody>
+          <a:bodyPr lIns="90000" rIns="90000" tIns="45000" bIns="45000" anchor="t">
+            <a:noAutofit/>
+          </a:bodyPr>
+          <a:p>
+            <a:endParaRPr b="0" lang="en-US" sz="1800" strike="noStrike" u="none">
+              <a:solidFill>
+                <a:srgbClr val="000000"/>
+              </a:solidFill>
+              <a:effectLst/>
+              <a:uFillTx/>
+              <a:latin typeface="Arial"/>
+            </a:endParaRPr>
+          </a:p>
+        </p:txBody>
+      </p:sp>
+      <p:sp>
+        <p:nvSpPr>
+          <p:cNvPr id="196" name="Text 14"/>
+          <p:cNvSpPr/>
+          <p:nvPr/>
+        </p:nvSpPr>
+        <p:spPr>
+          <a:xfrm>
+            <a:off x="923400" y="5330880"/>
+            <a:ext cx="10323360" cy="465840"/>
+          </a:xfrm>
+          <a:prstGeom prst="rect">
+            <a:avLst/>
+          </a:prstGeom>
+          <a:noFill/>
+          <a:ln w="0">
+            <a:noFill/>
+          </a:ln>
+        </p:spPr>
+        <p:style>
+          <a:lnRef idx="0"/>
+          <a:fillRef idx="0"/>
+          <a:effectRef idx="0"/>
+          <a:fontRef idx="minor"/>
+        </p:style>
+        <p:txBody>
+          <a:bodyPr lIns="360" rIns="360" tIns="360" bIns="360" anchor="ctr">
+            <a:normAutofit lnSpcReduction="9999"/>
+          </a:bodyPr>
+          <a:p>
+            <a:pPr defTabSz="914400">
+              <a:lnSpc>
+                <a:spcPct val="100000"/>
+              </a:lnSpc>
+              <a:tabLst>
+                <a:tab algn="l" pos="0"/>
+              </a:tabLst>
+            </a:pPr>
+            <a:r>
+              <a:rPr b="1" lang="en-US" sz="1600" strike="noStrike" u="none">
+                <a:solidFill>
+                  <a:srgbClr val="8a4c26"/>
+                </a:solidFill>
+                <a:effectLst/>
+                <a:uFillTx/>
+                <a:latin typeface="Aptos"/>
+                <a:ea typeface="Aptos"/>
+              </a:rPr>
+              <a:t>NATWORK KPIs met: false positives &lt; 1% and false negatives &lt; 1%, by three orders of magnitude — on real interleaved traffic with randomized addresses. Packaged as best_run_perpacket.zip.</a:t>
+            </a:r>
+            <a:endParaRPr b="0" lang="en-US" sz="1600" strike="noStrike" u="none">
               <a:solidFill>
                 <a:srgbClr val="000000"/>
               </a:solidFill>

--- a/6G-DALI_NATWORK_Hackathon_Presentation_Final.pptx
+++ b/6G-DALI_NATWORK_Hackathon_Presentation_Final.pptx
@@ -18,9 +18,9 @@
     <p:sldId id="263" r:id="rId11"/>
     <p:sldId id="264" r:id="rId12"/>
     <p:sldId id="265" r:id="rId13"/>
-    <p:sldId id="266" r:id="rId15"/>
-    <p:sldId id="267" r:id="rId16"/>
-    <p:sldId id="268" r:id="rId17"/>
+    <p:sldId id="266" r:id="rId14"/>
+    <p:sldId id="267" r:id="rId15"/>
+    <p:sldId id="268" r:id="rId16"/>
   </p:sldIdLst>
   <p:sldSz cx="12192000" cy="6858000"/>
   <p:notesSz cx="6858000" cy="12192000"/>
@@ -72,35 +72,25 @@
             <a:noAutofit/>
           </a:bodyPr>
           <a:p>
-            <a:r>
-              <a:rPr b="0" lang="en-US" sz="1800" strike="noStrike" u="none">
-                <a:solidFill>
-                  <a:schemeClr val="dk1"/>
-                </a:solidFill>
-                <a:effectLst/>
-                <a:uFillTx/>
-                <a:latin typeface="Calibri"/>
-              </a:rPr>
-              <a:t>Click to move the </a:t>
-            </a:r>
-            <a:r>
-              <a:rPr b="0" lang="en-US" sz="1800" strike="noStrike" u="none">
-                <a:solidFill>
-                  <a:schemeClr val="dk1"/>
-                </a:solidFill>
-                <a:effectLst/>
-                <a:uFillTx/>
-                <a:latin typeface="Calibri"/>
-              </a:rPr>
-              <a:t>slide</a:t>
-            </a:r>
-            <a:endParaRPr b="0" lang="en-US" sz="1800" strike="noStrike" u="none">
-              <a:solidFill>
-                <a:schemeClr val="dk1"/>
-              </a:solidFill>
-              <a:effectLst/>
-              <a:uFillTx/>
-              <a:latin typeface="Calibri"/>
+            <a:pPr algn="ctr"/>
+            <a:r>
+              <a:rPr b="0" lang="en-US" sz="4400" strike="noStrike" u="none">
+                <a:solidFill>
+                  <a:srgbClr val="000000"/>
+                </a:solidFill>
+                <a:effectLst/>
+                <a:uFillTx/>
+                <a:latin typeface="Arial"/>
+              </a:rPr>
+              <a:t>Click to move the slide</a:t>
+            </a:r>
+            <a:endParaRPr b="0" lang="en-US" sz="4400" strike="noStrike" u="none">
+              <a:solidFill>
+                <a:srgbClr val="000000"/>
+              </a:solidFill>
+              <a:effectLst/>
+              <a:uFillTx/>
+              <a:latin typeface="Arial"/>
             </a:endParaRPr>
           </a:p>
         </p:txBody>
@@ -398,7 +388,7 @@
             <a:pPr indent="0" algn="r">
               <a:buNone/>
             </a:pPr>
-            <a:fld id="{AFA945CE-7FD7-4119-9790-BEE788DD70FE}" type="slidenum">
+            <a:fld id="{02BEFEEB-C72E-4E72-9409-705BF2A33C99}" type="slidenum">
               <a:rPr b="0" lang="en-US" sz="1400" strike="noStrike" u="none">
                 <a:solidFill>
                   <a:srgbClr val="000000"/>
@@ -445,7 +435,7 @@
       </p:grpSpPr>
       <p:sp>
         <p:nvSpPr>
-          <p:cNvPr id="224" name="PlaceHolder 1"/>
+          <p:cNvPr id="262" name="PlaceHolder 1"/>
           <p:cNvSpPr>
             <a:spLocks noGrp="1"/>
           </p:cNvSpPr>
@@ -456,19 +446,19 @@
         <p:spPr>
           <a:xfrm>
             <a:off x="685800" y="1143000"/>
-            <a:ext cx="5486040" cy="3085920"/>
-          </a:xfrm>
-          <a:prstGeom prst="rect">
-            <a:avLst/>
-          </a:prstGeom>
-          <a:ln w="0">
-            <a:noFill/>
-          </a:ln>
-        </p:spPr>
-      </p:sp>
-      <p:sp>
-        <p:nvSpPr>
-          <p:cNvPr id="225" name="PlaceHolder 2"/>
+            <a:ext cx="5485680" cy="3085560"/>
+          </a:xfrm>
+          <a:prstGeom prst="rect">
+            <a:avLst/>
+          </a:prstGeom>
+          <a:ln w="0">
+            <a:noFill/>
+          </a:ln>
+        </p:spPr>
+      </p:sp>
+      <p:sp>
+        <p:nvSpPr>
+          <p:cNvPr id="263" name="PlaceHolder 2"/>
           <p:cNvSpPr>
             <a:spLocks noGrp="1"/>
           </p:cNvSpPr>
@@ -479,7 +469,7 @@
         <p:spPr>
           <a:xfrm>
             <a:off x="685800" y="4400640"/>
-            <a:ext cx="5486040" cy="3600000"/>
+            <a:ext cx="5485680" cy="3599640"/>
           </a:xfrm>
           <a:prstGeom prst="rect">
             <a:avLst/>
@@ -510,7 +500,7 @@
       </p:sp>
       <p:sp>
         <p:nvSpPr>
-          <p:cNvPr id="226" name="PlaceHolder 3"/>
+          <p:cNvPr id="264" name="PlaceHolder 3"/>
           <p:cNvSpPr>
             <a:spLocks noGrp="1"/>
           </p:cNvSpPr>
@@ -521,7 +511,7 @@
         <p:spPr>
           <a:xfrm>
             <a:off x="3884760" y="8685360"/>
-            <a:ext cx="2971440" cy="458280"/>
+            <a:ext cx="2971080" cy="457920"/>
           </a:xfrm>
           <a:prstGeom prst="rect">
             <a:avLst/>
@@ -541,6 +531,9 @@
                 <a:spcPct val="100000"/>
               </a:lnSpc>
               <a:buNone/>
+              <a:tabLst>
+                <a:tab algn="l" pos="0"/>
+              </a:tabLst>
               <a:defRPr b="0" lang="en-US" sz="1200" strike="noStrike" u="none">
                 <a:solidFill>
                   <a:schemeClr val="dk1"/>
@@ -558,8 +551,11 @@
                 <a:spcPct val="100000"/>
               </a:lnSpc>
               <a:buNone/>
-            </a:pPr>
-            <a:fld id="{AE0DE0F5-3ECF-4548-8B7B-51F24CEEED3B}" type="slidenum">
+              <a:tabLst>
+                <a:tab algn="l" pos="0"/>
+              </a:tabLst>
+            </a:pPr>
+            <a:fld id="{06D2A06F-149C-450D-9FF4-8F14C20B917A}" type="slidenum">
               <a:rPr b="0" lang="en-US" sz="1200" strike="noStrike" u="none">
                 <a:solidFill>
                   <a:schemeClr val="dk1"/>
@@ -569,7 +565,7 @@
                 <a:latin typeface="+mn-lt"/>
                 <a:ea typeface="+mn-ea"/>
               </a:rPr>
-              <a:t>10</a:t>
+              <a:t>13</a:t>
             </a:fld>
             <a:endParaRPr b="0" lang="en-US" sz="1200" strike="noStrike" u="none">
               <a:solidFill>
@@ -606,7 +602,7 @@
       </p:grpSpPr>
       <p:sp>
         <p:nvSpPr>
-          <p:cNvPr id="251" name="PlaceHolder 1"/>
+          <p:cNvPr id="289" name="PlaceHolder 1"/>
           <p:cNvSpPr>
             <a:spLocks noGrp="1"/>
           </p:cNvSpPr>
@@ -617,19 +613,19 @@
         <p:spPr>
           <a:xfrm>
             <a:off x="685800" y="1143000"/>
-            <a:ext cx="5486040" cy="3085920"/>
-          </a:xfrm>
-          <a:prstGeom prst="rect">
-            <a:avLst/>
-          </a:prstGeom>
-          <a:ln w="0">
-            <a:noFill/>
-          </a:ln>
-        </p:spPr>
-      </p:sp>
-      <p:sp>
-        <p:nvSpPr>
-          <p:cNvPr id="252" name="PlaceHolder 2"/>
+            <a:ext cx="5485680" cy="3085560"/>
+          </a:xfrm>
+          <a:prstGeom prst="rect">
+            <a:avLst/>
+          </a:prstGeom>
+          <a:ln w="0">
+            <a:noFill/>
+          </a:ln>
+        </p:spPr>
+      </p:sp>
+      <p:sp>
+        <p:nvSpPr>
+          <p:cNvPr id="290" name="PlaceHolder 2"/>
           <p:cNvSpPr>
             <a:spLocks noGrp="1"/>
           </p:cNvSpPr>
@@ -640,7 +636,7 @@
         <p:spPr>
           <a:xfrm>
             <a:off x="685800" y="4400640"/>
-            <a:ext cx="5486040" cy="3600000"/>
+            <a:ext cx="5485680" cy="3599640"/>
           </a:xfrm>
           <a:prstGeom prst="rect">
             <a:avLst/>
@@ -671,7 +667,7 @@
       </p:sp>
       <p:sp>
         <p:nvSpPr>
-          <p:cNvPr id="253" name="PlaceHolder 3"/>
+          <p:cNvPr id="291" name="PlaceHolder 3"/>
           <p:cNvSpPr>
             <a:spLocks noGrp="1"/>
           </p:cNvSpPr>
@@ -682,7 +678,7 @@
         <p:spPr>
           <a:xfrm>
             <a:off x="3884760" y="8685360"/>
-            <a:ext cx="2971440" cy="458280"/>
+            <a:ext cx="2971080" cy="457920"/>
           </a:xfrm>
           <a:prstGeom prst="rect">
             <a:avLst/>
@@ -702,6 +698,9 @@
                 <a:spcPct val="100000"/>
               </a:lnSpc>
               <a:buNone/>
+              <a:tabLst>
+                <a:tab algn="l" pos="0"/>
+              </a:tabLst>
               <a:defRPr b="0" lang="en-US" sz="1200" strike="noStrike" u="none">
                 <a:solidFill>
                   <a:schemeClr val="dk1"/>
@@ -719,8 +718,11 @@
                 <a:spcPct val="100000"/>
               </a:lnSpc>
               <a:buNone/>
-            </a:pPr>
-            <a:fld id="{70DADA16-42E6-4336-9AA4-549302027C73}" type="slidenum">
+              <a:tabLst>
+                <a:tab algn="l" pos="0"/>
+              </a:tabLst>
+            </a:pPr>
+            <a:fld id="{03AD63FC-7F07-406B-BDC7-78F1996FC361}" type="slidenum">
               <a:rPr b="0" lang="en-US" sz="1200" strike="noStrike" u="none">
                 <a:solidFill>
                   <a:schemeClr val="dk1"/>
@@ -730,7 +732,7 @@
                 <a:latin typeface="+mn-lt"/>
                 <a:ea typeface="+mn-ea"/>
               </a:rPr>
-              <a:t>&lt;number&gt;</a:t>
+              <a:t>13</a:t>
             </a:fld>
             <a:endParaRPr b="0" lang="en-US" sz="1200" strike="noStrike" u="none">
               <a:solidFill>
@@ -767,7 +769,7 @@
       </p:grpSpPr>
       <p:sp>
         <p:nvSpPr>
-          <p:cNvPr id="227" name="PlaceHolder 1"/>
+          <p:cNvPr id="265" name="PlaceHolder 1"/>
           <p:cNvSpPr>
             <a:spLocks noGrp="1"/>
           </p:cNvSpPr>
@@ -778,19 +780,19 @@
         <p:spPr>
           <a:xfrm>
             <a:off x="685800" y="1143000"/>
-            <a:ext cx="5486040" cy="3085920"/>
-          </a:xfrm>
-          <a:prstGeom prst="rect">
-            <a:avLst/>
-          </a:prstGeom>
-          <a:ln w="0">
-            <a:noFill/>
-          </a:ln>
-        </p:spPr>
-      </p:sp>
-      <p:sp>
-        <p:nvSpPr>
-          <p:cNvPr id="228" name="PlaceHolder 2"/>
+            <a:ext cx="5485680" cy="3085560"/>
+          </a:xfrm>
+          <a:prstGeom prst="rect">
+            <a:avLst/>
+          </a:prstGeom>
+          <a:ln w="0">
+            <a:noFill/>
+          </a:ln>
+        </p:spPr>
+      </p:sp>
+      <p:sp>
+        <p:nvSpPr>
+          <p:cNvPr id="266" name="PlaceHolder 2"/>
           <p:cNvSpPr>
             <a:spLocks noGrp="1"/>
           </p:cNvSpPr>
@@ -801,7 +803,7 @@
         <p:spPr>
           <a:xfrm>
             <a:off x="685800" y="4400640"/>
-            <a:ext cx="5486040" cy="3600000"/>
+            <a:ext cx="5485680" cy="3599640"/>
           </a:xfrm>
           <a:prstGeom prst="rect">
             <a:avLst/>
@@ -832,7 +834,7 @@
       </p:sp>
       <p:sp>
         <p:nvSpPr>
-          <p:cNvPr id="229" name="PlaceHolder 3"/>
+          <p:cNvPr id="267" name="PlaceHolder 3"/>
           <p:cNvSpPr>
             <a:spLocks noGrp="1"/>
           </p:cNvSpPr>
@@ -843,7 +845,7 @@
         <p:spPr>
           <a:xfrm>
             <a:off x="3884760" y="8685360"/>
-            <a:ext cx="2971440" cy="458280"/>
+            <a:ext cx="2971080" cy="457920"/>
           </a:xfrm>
           <a:prstGeom prst="rect">
             <a:avLst/>
@@ -863,6 +865,9 @@
                 <a:spcPct val="100000"/>
               </a:lnSpc>
               <a:buNone/>
+              <a:tabLst>
+                <a:tab algn="l" pos="0"/>
+              </a:tabLst>
               <a:defRPr b="0" lang="en-US" sz="1200" strike="noStrike" u="none">
                 <a:solidFill>
                   <a:schemeClr val="dk1"/>
@@ -880,8 +885,11 @@
                 <a:spcPct val="100000"/>
               </a:lnSpc>
               <a:buNone/>
-            </a:pPr>
-            <a:fld id="{D03AC74F-9B52-42E7-A434-7C26FC18A549}" type="slidenum">
+              <a:tabLst>
+                <a:tab algn="l" pos="0"/>
+              </a:tabLst>
+            </a:pPr>
+            <a:fld id="{920FB227-6055-4B90-B6F0-03445B5547A6}" type="slidenum">
               <a:rPr b="0" lang="en-US" sz="1200" strike="noStrike" u="none">
                 <a:solidFill>
                   <a:schemeClr val="dk1"/>
@@ -891,7 +899,7 @@
                 <a:latin typeface="+mn-lt"/>
                 <a:ea typeface="+mn-ea"/>
               </a:rPr>
-              <a:t>10</a:t>
+              <a:t>13</a:t>
             </a:fld>
             <a:endParaRPr b="0" lang="en-US" sz="1200" strike="noStrike" u="none">
               <a:solidFill>
@@ -928,7 +936,7 @@
       </p:grpSpPr>
       <p:sp>
         <p:nvSpPr>
-          <p:cNvPr id="230" name="PlaceHolder 1"/>
+          <p:cNvPr id="268" name="PlaceHolder 1"/>
           <p:cNvSpPr>
             <a:spLocks noGrp="1"/>
           </p:cNvSpPr>
@@ -939,19 +947,19 @@
         <p:spPr>
           <a:xfrm>
             <a:off x="685800" y="1143000"/>
-            <a:ext cx="5486040" cy="3085920"/>
-          </a:xfrm>
-          <a:prstGeom prst="rect">
-            <a:avLst/>
-          </a:prstGeom>
-          <a:ln w="0">
-            <a:noFill/>
-          </a:ln>
-        </p:spPr>
-      </p:sp>
-      <p:sp>
-        <p:nvSpPr>
-          <p:cNvPr id="231" name="PlaceHolder 2"/>
+            <a:ext cx="5485680" cy="3085560"/>
+          </a:xfrm>
+          <a:prstGeom prst="rect">
+            <a:avLst/>
+          </a:prstGeom>
+          <a:ln w="0">
+            <a:noFill/>
+          </a:ln>
+        </p:spPr>
+      </p:sp>
+      <p:sp>
+        <p:nvSpPr>
+          <p:cNvPr id="269" name="PlaceHolder 2"/>
           <p:cNvSpPr>
             <a:spLocks noGrp="1"/>
           </p:cNvSpPr>
@@ -962,7 +970,7 @@
         <p:spPr>
           <a:xfrm>
             <a:off x="685800" y="4400640"/>
-            <a:ext cx="5486040" cy="3600000"/>
+            <a:ext cx="5485680" cy="3599640"/>
           </a:xfrm>
           <a:prstGeom prst="rect">
             <a:avLst/>
@@ -993,7 +1001,7 @@
       </p:sp>
       <p:sp>
         <p:nvSpPr>
-          <p:cNvPr id="232" name="PlaceHolder 3"/>
+          <p:cNvPr id="270" name="PlaceHolder 3"/>
           <p:cNvSpPr>
             <a:spLocks noGrp="1"/>
           </p:cNvSpPr>
@@ -1004,7 +1012,7 @@
         <p:spPr>
           <a:xfrm>
             <a:off x="3884760" y="8685360"/>
-            <a:ext cx="2971440" cy="458280"/>
+            <a:ext cx="2971080" cy="457920"/>
           </a:xfrm>
           <a:prstGeom prst="rect">
             <a:avLst/>
@@ -1024,6 +1032,9 @@
                 <a:spcPct val="100000"/>
               </a:lnSpc>
               <a:buNone/>
+              <a:tabLst>
+                <a:tab algn="l" pos="0"/>
+              </a:tabLst>
               <a:defRPr b="0" lang="en-US" sz="1200" strike="noStrike" u="none">
                 <a:solidFill>
                   <a:schemeClr val="dk1"/>
@@ -1041,8 +1052,11 @@
                 <a:spcPct val="100000"/>
               </a:lnSpc>
               <a:buNone/>
-            </a:pPr>
-            <a:fld id="{9AE9E92A-CCF6-4239-992F-F70E0ABB69BB}" type="slidenum">
+              <a:tabLst>
+                <a:tab algn="l" pos="0"/>
+              </a:tabLst>
+            </a:pPr>
+            <a:fld id="{4BB64ABC-C15B-4441-BF0E-0C770726CFFC}" type="slidenum">
               <a:rPr b="0" lang="en-US" sz="1200" strike="noStrike" u="none">
                 <a:solidFill>
                   <a:schemeClr val="dk1"/>
@@ -1052,7 +1066,7 @@
                 <a:latin typeface="+mn-lt"/>
                 <a:ea typeface="+mn-ea"/>
               </a:rPr>
-              <a:t>10</a:t>
+              <a:t>13</a:t>
             </a:fld>
             <a:endParaRPr b="0" lang="en-US" sz="1200" strike="noStrike" u="none">
               <a:solidFill>
@@ -1089,7 +1103,7 @@
       </p:grpSpPr>
       <p:sp>
         <p:nvSpPr>
-          <p:cNvPr id="233" name="PlaceHolder 1"/>
+          <p:cNvPr id="271" name="PlaceHolder 1"/>
           <p:cNvSpPr>
             <a:spLocks noGrp="1"/>
           </p:cNvSpPr>
@@ -1100,19 +1114,19 @@
         <p:spPr>
           <a:xfrm>
             <a:off x="685800" y="1143000"/>
-            <a:ext cx="5486040" cy="3085920"/>
-          </a:xfrm>
-          <a:prstGeom prst="rect">
-            <a:avLst/>
-          </a:prstGeom>
-          <a:ln w="0">
-            <a:noFill/>
-          </a:ln>
-        </p:spPr>
-      </p:sp>
-      <p:sp>
-        <p:nvSpPr>
-          <p:cNvPr id="234" name="PlaceHolder 2"/>
+            <a:ext cx="5485680" cy="3085560"/>
+          </a:xfrm>
+          <a:prstGeom prst="rect">
+            <a:avLst/>
+          </a:prstGeom>
+          <a:ln w="0">
+            <a:noFill/>
+          </a:ln>
+        </p:spPr>
+      </p:sp>
+      <p:sp>
+        <p:nvSpPr>
+          <p:cNvPr id="272" name="PlaceHolder 2"/>
           <p:cNvSpPr>
             <a:spLocks noGrp="1"/>
           </p:cNvSpPr>
@@ -1123,7 +1137,7 @@
         <p:spPr>
           <a:xfrm>
             <a:off x="685800" y="4400640"/>
-            <a:ext cx="5486040" cy="3600000"/>
+            <a:ext cx="5485680" cy="3599640"/>
           </a:xfrm>
           <a:prstGeom prst="rect">
             <a:avLst/>
@@ -1154,7 +1168,7 @@
       </p:sp>
       <p:sp>
         <p:nvSpPr>
-          <p:cNvPr id="235" name="PlaceHolder 3"/>
+          <p:cNvPr id="273" name="PlaceHolder 3"/>
           <p:cNvSpPr>
             <a:spLocks noGrp="1"/>
           </p:cNvSpPr>
@@ -1165,7 +1179,7 @@
         <p:spPr>
           <a:xfrm>
             <a:off x="3884760" y="8685360"/>
-            <a:ext cx="2971440" cy="458280"/>
+            <a:ext cx="2971080" cy="457920"/>
           </a:xfrm>
           <a:prstGeom prst="rect">
             <a:avLst/>
@@ -1185,6 +1199,9 @@
                 <a:spcPct val="100000"/>
               </a:lnSpc>
               <a:buNone/>
+              <a:tabLst>
+                <a:tab algn="l" pos="0"/>
+              </a:tabLst>
               <a:defRPr b="0" lang="en-US" sz="1200" strike="noStrike" u="none">
                 <a:solidFill>
                   <a:schemeClr val="dk1"/>
@@ -1202,8 +1219,11 @@
                 <a:spcPct val="100000"/>
               </a:lnSpc>
               <a:buNone/>
-            </a:pPr>
-            <a:fld id="{9A8EB309-CE97-4952-B1FF-28E93EEF9B26}" type="slidenum">
+              <a:tabLst>
+                <a:tab algn="l" pos="0"/>
+              </a:tabLst>
+            </a:pPr>
+            <a:fld id="{41FF6EE2-9D89-42C9-AC0A-C52E7DD49806}" type="slidenum">
               <a:rPr b="0" lang="en-US" sz="1200" strike="noStrike" u="none">
                 <a:solidFill>
                   <a:schemeClr val="dk1"/>
@@ -1213,7 +1233,7 @@
                 <a:latin typeface="+mn-lt"/>
                 <a:ea typeface="+mn-ea"/>
               </a:rPr>
-              <a:t>10</a:t>
+              <a:t>13</a:t>
             </a:fld>
             <a:endParaRPr b="0" lang="en-US" sz="1200" strike="noStrike" u="none">
               <a:solidFill>
@@ -1250,7 +1270,7 @@
       </p:grpSpPr>
       <p:sp>
         <p:nvSpPr>
-          <p:cNvPr id="236" name="PlaceHolder 1"/>
+          <p:cNvPr id="274" name="PlaceHolder 1"/>
           <p:cNvSpPr>
             <a:spLocks noGrp="1"/>
           </p:cNvSpPr>
@@ -1261,19 +1281,19 @@
         <p:spPr>
           <a:xfrm>
             <a:off x="685800" y="1143000"/>
-            <a:ext cx="5486040" cy="3085920"/>
-          </a:xfrm>
-          <a:prstGeom prst="rect">
-            <a:avLst/>
-          </a:prstGeom>
-          <a:ln w="0">
-            <a:noFill/>
-          </a:ln>
-        </p:spPr>
-      </p:sp>
-      <p:sp>
-        <p:nvSpPr>
-          <p:cNvPr id="237" name="PlaceHolder 2"/>
+            <a:ext cx="5485680" cy="3085560"/>
+          </a:xfrm>
+          <a:prstGeom prst="rect">
+            <a:avLst/>
+          </a:prstGeom>
+          <a:ln w="0">
+            <a:noFill/>
+          </a:ln>
+        </p:spPr>
+      </p:sp>
+      <p:sp>
+        <p:nvSpPr>
+          <p:cNvPr id="275" name="PlaceHolder 2"/>
           <p:cNvSpPr>
             <a:spLocks noGrp="1"/>
           </p:cNvSpPr>
@@ -1284,7 +1304,7 @@
         <p:spPr>
           <a:xfrm>
             <a:off x="685800" y="4400640"/>
-            <a:ext cx="5486040" cy="3600000"/>
+            <a:ext cx="5485680" cy="3599640"/>
           </a:xfrm>
           <a:prstGeom prst="rect">
             <a:avLst/>
@@ -1315,7 +1335,7 @@
       </p:sp>
       <p:sp>
         <p:nvSpPr>
-          <p:cNvPr id="238" name="PlaceHolder 3"/>
+          <p:cNvPr id="276" name="PlaceHolder 3"/>
           <p:cNvSpPr>
             <a:spLocks noGrp="1"/>
           </p:cNvSpPr>
@@ -1326,7 +1346,7 @@
         <p:spPr>
           <a:xfrm>
             <a:off x="3884760" y="8685360"/>
-            <a:ext cx="2971440" cy="458280"/>
+            <a:ext cx="2971080" cy="457920"/>
           </a:xfrm>
           <a:prstGeom prst="rect">
             <a:avLst/>
@@ -1346,6 +1366,9 @@
                 <a:spcPct val="100000"/>
               </a:lnSpc>
               <a:buNone/>
+              <a:tabLst>
+                <a:tab algn="l" pos="0"/>
+              </a:tabLst>
               <a:defRPr b="0" lang="en-US" sz="1200" strike="noStrike" u="none">
                 <a:solidFill>
                   <a:schemeClr val="dk1"/>
@@ -1363,8 +1386,11 @@
                 <a:spcPct val="100000"/>
               </a:lnSpc>
               <a:buNone/>
-            </a:pPr>
-            <a:fld id="{F197C4D1-C8AF-4A90-B441-7F14449E4B95}" type="slidenum">
+              <a:tabLst>
+                <a:tab algn="l" pos="0"/>
+              </a:tabLst>
+            </a:pPr>
+            <a:fld id="{1E192DE7-3A3A-4D19-A7BC-02FCF5CDA8CB}" type="slidenum">
               <a:rPr b="0" lang="en-US" sz="1200" strike="noStrike" u="none">
                 <a:solidFill>
                   <a:schemeClr val="dk1"/>
@@ -1374,7 +1400,7 @@
                 <a:latin typeface="+mn-lt"/>
                 <a:ea typeface="+mn-ea"/>
               </a:rPr>
-              <a:t>10</a:t>
+              <a:t>13</a:t>
             </a:fld>
             <a:endParaRPr b="0" lang="en-US" sz="1200" strike="noStrike" u="none">
               <a:solidFill>
@@ -1411,7 +1437,7 @@
       </p:grpSpPr>
       <p:sp>
         <p:nvSpPr>
-          <p:cNvPr id="239" name="PlaceHolder 1"/>
+          <p:cNvPr id="277" name="PlaceHolder 1"/>
           <p:cNvSpPr>
             <a:spLocks noGrp="1"/>
           </p:cNvSpPr>
@@ -1422,19 +1448,19 @@
         <p:spPr>
           <a:xfrm>
             <a:off x="685800" y="1143000"/>
-            <a:ext cx="5486040" cy="3085920"/>
-          </a:xfrm>
-          <a:prstGeom prst="rect">
-            <a:avLst/>
-          </a:prstGeom>
-          <a:ln w="0">
-            <a:noFill/>
-          </a:ln>
-        </p:spPr>
-      </p:sp>
-      <p:sp>
-        <p:nvSpPr>
-          <p:cNvPr id="240" name="PlaceHolder 2"/>
+            <a:ext cx="5485680" cy="3085560"/>
+          </a:xfrm>
+          <a:prstGeom prst="rect">
+            <a:avLst/>
+          </a:prstGeom>
+          <a:ln w="0">
+            <a:noFill/>
+          </a:ln>
+        </p:spPr>
+      </p:sp>
+      <p:sp>
+        <p:nvSpPr>
+          <p:cNvPr id="278" name="PlaceHolder 2"/>
           <p:cNvSpPr>
             <a:spLocks noGrp="1"/>
           </p:cNvSpPr>
@@ -1445,7 +1471,7 @@
         <p:spPr>
           <a:xfrm>
             <a:off x="685800" y="4400640"/>
-            <a:ext cx="5486040" cy="3600000"/>
+            <a:ext cx="5485680" cy="3599640"/>
           </a:xfrm>
           <a:prstGeom prst="rect">
             <a:avLst/>
@@ -1476,7 +1502,7 @@
       </p:sp>
       <p:sp>
         <p:nvSpPr>
-          <p:cNvPr id="241" name="PlaceHolder 3"/>
+          <p:cNvPr id="279" name="PlaceHolder 3"/>
           <p:cNvSpPr>
             <a:spLocks noGrp="1"/>
           </p:cNvSpPr>
@@ -1487,7 +1513,7 @@
         <p:spPr>
           <a:xfrm>
             <a:off x="3884760" y="8685360"/>
-            <a:ext cx="2971440" cy="458280"/>
+            <a:ext cx="2971080" cy="457920"/>
           </a:xfrm>
           <a:prstGeom prst="rect">
             <a:avLst/>
@@ -1507,6 +1533,9 @@
                 <a:spcPct val="100000"/>
               </a:lnSpc>
               <a:buNone/>
+              <a:tabLst>
+                <a:tab algn="l" pos="0"/>
+              </a:tabLst>
               <a:defRPr b="0" lang="en-US" sz="1200" strike="noStrike" u="none">
                 <a:solidFill>
                   <a:schemeClr val="dk1"/>
@@ -1524,8 +1553,11 @@
                 <a:spcPct val="100000"/>
               </a:lnSpc>
               <a:buNone/>
-            </a:pPr>
-            <a:fld id="{3EFC9A60-E426-4B14-AE34-4A49B363693F}" type="slidenum">
+              <a:tabLst>
+                <a:tab algn="l" pos="0"/>
+              </a:tabLst>
+            </a:pPr>
+            <a:fld id="{5720BB09-18A1-4F61-9EA1-683BACAC14D4}" type="slidenum">
               <a:rPr b="0" lang="en-US" sz="1200" strike="noStrike" u="none">
                 <a:solidFill>
                   <a:schemeClr val="dk1"/>
@@ -1535,7 +1567,7 @@
                 <a:latin typeface="+mn-lt"/>
                 <a:ea typeface="+mn-ea"/>
               </a:rPr>
-              <a:t>10</a:t>
+              <a:t>13</a:t>
             </a:fld>
             <a:endParaRPr b="0" lang="en-US" sz="1200" strike="noStrike" u="none">
               <a:solidFill>
@@ -1572,7 +1604,7 @@
       </p:grpSpPr>
       <p:sp>
         <p:nvSpPr>
-          <p:cNvPr id="242" name="PlaceHolder 1"/>
+          <p:cNvPr id="280" name="PlaceHolder 1"/>
           <p:cNvSpPr>
             <a:spLocks noGrp="1"/>
           </p:cNvSpPr>
@@ -1583,19 +1615,19 @@
         <p:spPr>
           <a:xfrm>
             <a:off x="685800" y="1143000"/>
-            <a:ext cx="5486040" cy="3085920"/>
-          </a:xfrm>
-          <a:prstGeom prst="rect">
-            <a:avLst/>
-          </a:prstGeom>
-          <a:ln w="0">
-            <a:noFill/>
-          </a:ln>
-        </p:spPr>
-      </p:sp>
-      <p:sp>
-        <p:nvSpPr>
-          <p:cNvPr id="243" name="PlaceHolder 2"/>
+            <a:ext cx="5485680" cy="3085560"/>
+          </a:xfrm>
+          <a:prstGeom prst="rect">
+            <a:avLst/>
+          </a:prstGeom>
+          <a:ln w="0">
+            <a:noFill/>
+          </a:ln>
+        </p:spPr>
+      </p:sp>
+      <p:sp>
+        <p:nvSpPr>
+          <p:cNvPr id="281" name="PlaceHolder 2"/>
           <p:cNvSpPr>
             <a:spLocks noGrp="1"/>
           </p:cNvSpPr>
@@ -1606,7 +1638,7 @@
         <p:spPr>
           <a:xfrm>
             <a:off x="685800" y="4400640"/>
-            <a:ext cx="5486040" cy="3600000"/>
+            <a:ext cx="5485680" cy="3599640"/>
           </a:xfrm>
           <a:prstGeom prst="rect">
             <a:avLst/>
@@ -1637,7 +1669,7 @@
       </p:sp>
       <p:sp>
         <p:nvSpPr>
-          <p:cNvPr id="244" name="PlaceHolder 3"/>
+          <p:cNvPr id="282" name="PlaceHolder 3"/>
           <p:cNvSpPr>
             <a:spLocks noGrp="1"/>
           </p:cNvSpPr>
@@ -1648,7 +1680,7 @@
         <p:spPr>
           <a:xfrm>
             <a:off x="3884760" y="8685360"/>
-            <a:ext cx="2971440" cy="458280"/>
+            <a:ext cx="2971080" cy="457920"/>
           </a:xfrm>
           <a:prstGeom prst="rect">
             <a:avLst/>
@@ -1668,6 +1700,9 @@
                 <a:spcPct val="100000"/>
               </a:lnSpc>
               <a:buNone/>
+              <a:tabLst>
+                <a:tab algn="l" pos="0"/>
+              </a:tabLst>
               <a:defRPr b="0" lang="en-US" sz="1200" strike="noStrike" u="none">
                 <a:solidFill>
                   <a:schemeClr val="dk1"/>
@@ -1685,8 +1720,11 @@
                 <a:spcPct val="100000"/>
               </a:lnSpc>
               <a:buNone/>
-            </a:pPr>
-            <a:fld id="{924F5BCE-2C3E-48A2-89E6-F64230DA4670}" type="slidenum">
+              <a:tabLst>
+                <a:tab algn="l" pos="0"/>
+              </a:tabLst>
+            </a:pPr>
+            <a:fld id="{B185CC88-62EA-4C79-B32D-3F44ED23A95B}" type="slidenum">
               <a:rPr b="0" lang="en-US" sz="1200" strike="noStrike" u="none">
                 <a:solidFill>
                   <a:schemeClr val="dk1"/>
@@ -1696,7 +1734,7 @@
                 <a:latin typeface="+mn-lt"/>
                 <a:ea typeface="+mn-ea"/>
               </a:rPr>
-              <a:t>10</a:t>
+              <a:t>13</a:t>
             </a:fld>
             <a:endParaRPr b="0" lang="en-US" sz="1200" strike="noStrike" u="none">
               <a:solidFill>
@@ -1733,7 +1771,7 @@
       </p:grpSpPr>
       <p:sp>
         <p:nvSpPr>
-          <p:cNvPr id="245" name="PlaceHolder 1"/>
+          <p:cNvPr id="283" name="PlaceHolder 1"/>
           <p:cNvSpPr>
             <a:spLocks noGrp="1"/>
           </p:cNvSpPr>
@@ -1744,19 +1782,19 @@
         <p:spPr>
           <a:xfrm>
             <a:off x="685800" y="1143000"/>
-            <a:ext cx="5486040" cy="3085920"/>
-          </a:xfrm>
-          <a:prstGeom prst="rect">
-            <a:avLst/>
-          </a:prstGeom>
-          <a:ln w="0">
-            <a:noFill/>
-          </a:ln>
-        </p:spPr>
-      </p:sp>
-      <p:sp>
-        <p:nvSpPr>
-          <p:cNvPr id="246" name="PlaceHolder 2"/>
+            <a:ext cx="5485680" cy="3085560"/>
+          </a:xfrm>
+          <a:prstGeom prst="rect">
+            <a:avLst/>
+          </a:prstGeom>
+          <a:ln w="0">
+            <a:noFill/>
+          </a:ln>
+        </p:spPr>
+      </p:sp>
+      <p:sp>
+        <p:nvSpPr>
+          <p:cNvPr id="284" name="PlaceHolder 2"/>
           <p:cNvSpPr>
             <a:spLocks noGrp="1"/>
           </p:cNvSpPr>
@@ -1767,7 +1805,7 @@
         <p:spPr>
           <a:xfrm>
             <a:off x="685800" y="4400640"/>
-            <a:ext cx="5486040" cy="3600000"/>
+            <a:ext cx="5485680" cy="3599640"/>
           </a:xfrm>
           <a:prstGeom prst="rect">
             <a:avLst/>
@@ -1798,7 +1836,7 @@
       </p:sp>
       <p:sp>
         <p:nvSpPr>
-          <p:cNvPr id="247" name="PlaceHolder 3"/>
+          <p:cNvPr id="285" name="PlaceHolder 3"/>
           <p:cNvSpPr>
             <a:spLocks noGrp="1"/>
           </p:cNvSpPr>
@@ -1809,7 +1847,7 @@
         <p:spPr>
           <a:xfrm>
             <a:off x="3884760" y="8685360"/>
-            <a:ext cx="2971440" cy="458280"/>
+            <a:ext cx="2971080" cy="457920"/>
           </a:xfrm>
           <a:prstGeom prst="rect">
             <a:avLst/>
@@ -1829,6 +1867,9 @@
                 <a:spcPct val="100000"/>
               </a:lnSpc>
               <a:buNone/>
+              <a:tabLst>
+                <a:tab algn="l" pos="0"/>
+              </a:tabLst>
               <a:defRPr b="0" lang="en-US" sz="1200" strike="noStrike" u="none">
                 <a:solidFill>
                   <a:schemeClr val="dk1"/>
@@ -1846,8 +1887,11 @@
                 <a:spcPct val="100000"/>
               </a:lnSpc>
               <a:buNone/>
-            </a:pPr>
-            <a:fld id="{4F0B1CBB-91E0-4A6B-A9B8-400D414B0525}" type="slidenum">
+              <a:tabLst>
+                <a:tab algn="l" pos="0"/>
+              </a:tabLst>
+            </a:pPr>
+            <a:fld id="{06B7A808-EA65-418F-B10F-6511C3DF3C1D}" type="slidenum">
               <a:rPr b="0" lang="en-US" sz="1200" strike="noStrike" u="none">
                 <a:solidFill>
                   <a:schemeClr val="dk1"/>
@@ -1857,7 +1901,7 @@
                 <a:latin typeface="+mn-lt"/>
                 <a:ea typeface="+mn-ea"/>
               </a:rPr>
-              <a:t>10</a:t>
+              <a:t>13</a:t>
             </a:fld>
             <a:endParaRPr b="0" lang="en-US" sz="1200" strike="noStrike" u="none">
               <a:solidFill>
@@ -1894,7 +1938,7 @@
       </p:grpSpPr>
       <p:sp>
         <p:nvSpPr>
-          <p:cNvPr id="248" name="PlaceHolder 1"/>
+          <p:cNvPr id="286" name="PlaceHolder 1"/>
           <p:cNvSpPr>
             <a:spLocks noGrp="1"/>
           </p:cNvSpPr>
@@ -1905,19 +1949,19 @@
         <p:spPr>
           <a:xfrm>
             <a:off x="685800" y="1143000"/>
-            <a:ext cx="5486040" cy="3085920"/>
-          </a:xfrm>
-          <a:prstGeom prst="rect">
-            <a:avLst/>
-          </a:prstGeom>
-          <a:ln w="0">
-            <a:noFill/>
-          </a:ln>
-        </p:spPr>
-      </p:sp>
-      <p:sp>
-        <p:nvSpPr>
-          <p:cNvPr id="249" name="PlaceHolder 2"/>
+            <a:ext cx="5485680" cy="3085560"/>
+          </a:xfrm>
+          <a:prstGeom prst="rect">
+            <a:avLst/>
+          </a:prstGeom>
+          <a:ln w="0">
+            <a:noFill/>
+          </a:ln>
+        </p:spPr>
+      </p:sp>
+      <p:sp>
+        <p:nvSpPr>
+          <p:cNvPr id="287" name="PlaceHolder 2"/>
           <p:cNvSpPr>
             <a:spLocks noGrp="1"/>
           </p:cNvSpPr>
@@ -1928,7 +1972,7 @@
         <p:spPr>
           <a:xfrm>
             <a:off x="685800" y="4400640"/>
-            <a:ext cx="5486040" cy="3600000"/>
+            <a:ext cx="5485680" cy="3599640"/>
           </a:xfrm>
           <a:prstGeom prst="rect">
             <a:avLst/>
@@ -1959,7 +2003,7 @@
       </p:sp>
       <p:sp>
         <p:nvSpPr>
-          <p:cNvPr id="250" name="PlaceHolder 3"/>
+          <p:cNvPr id="288" name="PlaceHolder 3"/>
           <p:cNvSpPr>
             <a:spLocks noGrp="1"/>
           </p:cNvSpPr>
@@ -1970,7 +2014,7 @@
         <p:spPr>
           <a:xfrm>
             <a:off x="3884760" y="8685360"/>
-            <a:ext cx="2971440" cy="458280"/>
+            <a:ext cx="2971080" cy="457920"/>
           </a:xfrm>
           <a:prstGeom prst="rect">
             <a:avLst/>
@@ -1990,6 +2034,9 @@
                 <a:spcPct val="100000"/>
               </a:lnSpc>
               <a:buNone/>
+              <a:tabLst>
+                <a:tab algn="l" pos="0"/>
+              </a:tabLst>
               <a:defRPr b="0" lang="en-US" sz="1200" strike="noStrike" u="none">
                 <a:solidFill>
                   <a:schemeClr val="dk1"/>
@@ -2007,8 +2054,11 @@
                 <a:spcPct val="100000"/>
               </a:lnSpc>
               <a:buNone/>
-            </a:pPr>
-            <a:fld id="{090759FA-2DF9-425A-B6ED-08652809926F}" type="slidenum">
+              <a:tabLst>
+                <a:tab algn="l" pos="0"/>
+              </a:tabLst>
+            </a:pPr>
+            <a:fld id="{451E2679-E1E6-4518-B339-C08076434461}" type="slidenum">
               <a:rPr b="0" lang="en-US" sz="1200" strike="noStrike" u="none">
                 <a:solidFill>
                   <a:schemeClr val="dk1"/>
@@ -2018,7 +2068,7 @@
                 <a:latin typeface="+mn-lt"/>
                 <a:ea typeface="+mn-ea"/>
               </a:rPr>
-              <a:t>10</a:t>
+              <a:t>13</a:t>
             </a:fld>
             <a:endParaRPr b="0" lang="en-US" sz="1200" strike="noStrike" u="none">
               <a:solidFill>
@@ -2110,49 +2160,38 @@
             <a:noAutofit/>
           </a:bodyPr>
           <a:p>
-            <a:pPr indent="0">
+            <a:pPr indent="0" algn="ctr">
               <a:buNone/>
             </a:pPr>
             <a:r>
-              <a:rPr b="0" lang="en-US" sz="1800" strike="noStrike" u="none">
-                <a:solidFill>
-                  <a:schemeClr val="dk1"/>
-                </a:solidFill>
-                <a:effectLst/>
-                <a:uFillTx/>
-                <a:latin typeface="Calibri"/>
-              </a:rPr>
-              <a:t>Click to edit </a:t>
-            </a:r>
-            <a:r>
-              <a:rPr b="0" lang="en-US" sz="1800" strike="noStrike" u="none">
-                <a:solidFill>
-                  <a:schemeClr val="dk1"/>
-                </a:solidFill>
-                <a:effectLst/>
-                <a:uFillTx/>
-                <a:latin typeface="Calibri"/>
-              </a:rPr>
-              <a:t>the title text </a:t>
-            </a:r>
-            <a:r>
-              <a:rPr b="0" lang="en-US" sz="1800" strike="noStrike" u="none">
-                <a:solidFill>
-                  <a:schemeClr val="dk1"/>
-                </a:solidFill>
-                <a:effectLst/>
-                <a:uFillTx/>
-                <a:latin typeface="Calibri"/>
-              </a:rPr>
-              <a:t>format</a:t>
-            </a:r>
-            <a:endParaRPr b="0" lang="en-US" sz="1800" strike="noStrike" u="none">
-              <a:solidFill>
-                <a:schemeClr val="dk1"/>
-              </a:solidFill>
-              <a:effectLst/>
-              <a:uFillTx/>
-              <a:latin typeface="Calibri"/>
+              <a:rPr b="0" lang="en-US" sz="4400" strike="noStrike" u="none">
+                <a:solidFill>
+                  <a:srgbClr val="000000"/>
+                </a:solidFill>
+                <a:effectLst/>
+                <a:uFillTx/>
+                <a:latin typeface="Arial"/>
+              </a:rPr>
+              <a:t>Click to edit the title </a:t>
+            </a:r>
+            <a:r>
+              <a:rPr b="0" lang="en-US" sz="4400" strike="noStrike" u="none">
+                <a:solidFill>
+                  <a:srgbClr val="000000"/>
+                </a:solidFill>
+                <a:effectLst/>
+                <a:uFillTx/>
+                <a:latin typeface="Arial"/>
+              </a:rPr>
+              <a:t>text format</a:t>
+            </a:r>
+            <a:endParaRPr b="0" lang="en-US" sz="4400" strike="noStrike" u="none">
+              <a:solidFill>
+                <a:srgbClr val="000000"/>
+              </a:solidFill>
+              <a:effectLst/>
+              <a:uFillTx/>
+              <a:latin typeface="Arial"/>
             </a:endParaRPr>
           </a:p>
         </p:txBody>
@@ -2199,21 +2238,21 @@
             <a:r>
               <a:rPr b="0" lang="en-US" sz="3200" strike="noStrike" u="none">
                 <a:solidFill>
-                  <a:schemeClr val="dk1"/>
-                </a:solidFill>
-                <a:effectLst/>
-                <a:uFillTx/>
-                <a:latin typeface="Calibri"/>
+                  <a:srgbClr val="000000"/>
+                </a:solidFill>
+                <a:effectLst/>
+                <a:uFillTx/>
+                <a:latin typeface="Arial"/>
               </a:rPr>
               <a:t>Click to edit the outline text format</a:t>
             </a:r>
             <a:endParaRPr b="0" lang="en-US" sz="3200" strike="noStrike" u="none">
               <a:solidFill>
-                <a:schemeClr val="dk1"/>
-              </a:solidFill>
-              <a:effectLst/>
-              <a:uFillTx/>
-              <a:latin typeface="Calibri"/>
+                <a:srgbClr val="000000"/>
+              </a:solidFill>
+              <a:effectLst/>
+              <a:uFillTx/>
+              <a:latin typeface="Arial"/>
             </a:endParaRPr>
           </a:p>
           <a:p>
@@ -2229,23 +2268,23 @@
               <a:buChar char=""/>
             </a:pPr>
             <a:r>
-              <a:rPr b="0" lang="en-US" sz="2400" strike="noStrike" u="none">
-                <a:solidFill>
-                  <a:schemeClr val="dk1"/>
-                </a:solidFill>
-                <a:effectLst/>
-                <a:uFillTx/>
-                <a:latin typeface="Calibri"/>
+              <a:rPr b="0" lang="en-US" sz="2800" strike="noStrike" u="none">
+                <a:solidFill>
+                  <a:srgbClr val="000000"/>
+                </a:solidFill>
+                <a:effectLst/>
+                <a:uFillTx/>
+                <a:latin typeface="Arial"/>
               </a:rPr>
               <a:t>Second Outline Level</a:t>
             </a:r>
-            <a:endParaRPr b="0" lang="en-US" sz="2400" strike="noStrike" u="none">
-              <a:solidFill>
-                <a:schemeClr val="dk1"/>
-              </a:solidFill>
-              <a:effectLst/>
-              <a:uFillTx/>
-              <a:latin typeface="Calibri"/>
+            <a:endParaRPr b="0" lang="en-US" sz="2800" strike="noStrike" u="none">
+              <a:solidFill>
+                <a:srgbClr val="000000"/>
+              </a:solidFill>
+              <a:effectLst/>
+              <a:uFillTx/>
+              <a:latin typeface="Arial"/>
             </a:endParaRPr>
           </a:p>
           <a:p>
@@ -2261,23 +2300,23 @@
               <a:buChar char=""/>
             </a:pPr>
             <a:r>
-              <a:rPr b="0" lang="en-US" sz="2000" strike="noStrike" u="none">
-                <a:solidFill>
-                  <a:schemeClr val="dk1"/>
-                </a:solidFill>
-                <a:effectLst/>
-                <a:uFillTx/>
-                <a:latin typeface="Calibri"/>
+              <a:rPr b="0" lang="en-US" sz="2400" strike="noStrike" u="none">
+                <a:solidFill>
+                  <a:srgbClr val="000000"/>
+                </a:solidFill>
+                <a:effectLst/>
+                <a:uFillTx/>
+                <a:latin typeface="Arial"/>
               </a:rPr>
               <a:t>Third Outline Level</a:t>
             </a:r>
-            <a:endParaRPr b="0" lang="en-US" sz="2000" strike="noStrike" u="none">
-              <a:solidFill>
-                <a:schemeClr val="dk1"/>
-              </a:solidFill>
-              <a:effectLst/>
-              <a:uFillTx/>
-              <a:latin typeface="Calibri"/>
+            <a:endParaRPr b="0" lang="en-US" sz="2400" strike="noStrike" u="none">
+              <a:solidFill>
+                <a:srgbClr val="000000"/>
+              </a:solidFill>
+              <a:effectLst/>
+              <a:uFillTx/>
+              <a:latin typeface="Arial"/>
             </a:endParaRPr>
           </a:p>
           <a:p>
@@ -2295,21 +2334,21 @@
             <a:r>
               <a:rPr b="0" lang="en-US" sz="2000" strike="noStrike" u="none">
                 <a:solidFill>
-                  <a:schemeClr val="dk1"/>
-                </a:solidFill>
-                <a:effectLst/>
-                <a:uFillTx/>
-                <a:latin typeface="Calibri"/>
+                  <a:srgbClr val="000000"/>
+                </a:solidFill>
+                <a:effectLst/>
+                <a:uFillTx/>
+                <a:latin typeface="Arial"/>
               </a:rPr>
               <a:t>Fourth Outline Level</a:t>
             </a:r>
             <a:endParaRPr b="0" lang="en-US" sz="2000" strike="noStrike" u="none">
               <a:solidFill>
-                <a:schemeClr val="dk1"/>
-              </a:solidFill>
-              <a:effectLst/>
-              <a:uFillTx/>
-              <a:latin typeface="Calibri"/>
+                <a:srgbClr val="000000"/>
+              </a:solidFill>
+              <a:effectLst/>
+              <a:uFillTx/>
+              <a:latin typeface="Arial"/>
             </a:endParaRPr>
           </a:p>
           <a:p>
@@ -2327,21 +2366,21 @@
             <a:r>
               <a:rPr b="0" lang="en-US" sz="2000" strike="noStrike" u="none">
                 <a:solidFill>
-                  <a:schemeClr val="dk1"/>
-                </a:solidFill>
-                <a:effectLst/>
-                <a:uFillTx/>
-                <a:latin typeface="Calibri"/>
+                  <a:srgbClr val="000000"/>
+                </a:solidFill>
+                <a:effectLst/>
+                <a:uFillTx/>
+                <a:latin typeface="Arial"/>
               </a:rPr>
               <a:t>Fifth Outline Level</a:t>
             </a:r>
             <a:endParaRPr b="0" lang="en-US" sz="2000" strike="noStrike" u="none">
               <a:solidFill>
-                <a:schemeClr val="dk1"/>
-              </a:solidFill>
-              <a:effectLst/>
-              <a:uFillTx/>
-              <a:latin typeface="Calibri"/>
+                <a:srgbClr val="000000"/>
+              </a:solidFill>
+              <a:effectLst/>
+              <a:uFillTx/>
+              <a:latin typeface="Arial"/>
             </a:endParaRPr>
           </a:p>
           <a:p>
@@ -2359,21 +2398,21 @@
             <a:r>
               <a:rPr b="0" lang="en-US" sz="2000" strike="noStrike" u="none">
                 <a:solidFill>
-                  <a:schemeClr val="dk1"/>
-                </a:solidFill>
-                <a:effectLst/>
-                <a:uFillTx/>
-                <a:latin typeface="Calibri"/>
+                  <a:srgbClr val="000000"/>
+                </a:solidFill>
+                <a:effectLst/>
+                <a:uFillTx/>
+                <a:latin typeface="Arial"/>
               </a:rPr>
               <a:t>Sixth Outline Level</a:t>
             </a:r>
             <a:endParaRPr b="0" lang="en-US" sz="2000" strike="noStrike" u="none">
               <a:solidFill>
-                <a:schemeClr val="dk1"/>
-              </a:solidFill>
-              <a:effectLst/>
-              <a:uFillTx/>
-              <a:latin typeface="Calibri"/>
+                <a:srgbClr val="000000"/>
+              </a:solidFill>
+              <a:effectLst/>
+              <a:uFillTx/>
+              <a:latin typeface="Arial"/>
             </a:endParaRPr>
           </a:p>
           <a:p>
@@ -2391,21 +2430,21 @@
             <a:r>
               <a:rPr b="0" lang="en-US" sz="2000" strike="noStrike" u="none">
                 <a:solidFill>
-                  <a:schemeClr val="dk1"/>
-                </a:solidFill>
-                <a:effectLst/>
-                <a:uFillTx/>
-                <a:latin typeface="Calibri"/>
+                  <a:srgbClr val="000000"/>
+                </a:solidFill>
+                <a:effectLst/>
+                <a:uFillTx/>
+                <a:latin typeface="Arial"/>
               </a:rPr>
               <a:t>Seventh Outline Level</a:t>
             </a:r>
             <a:endParaRPr b="0" lang="en-US" sz="2000" strike="noStrike" u="none">
               <a:solidFill>
-                <a:schemeClr val="dk1"/>
-              </a:solidFill>
-              <a:effectLst/>
-              <a:uFillTx/>
-              <a:latin typeface="Calibri"/>
+                <a:srgbClr val="000000"/>
+              </a:solidFill>
+              <a:effectLst/>
+              <a:uFillTx/>
+              <a:latin typeface="Arial"/>
             </a:endParaRPr>
           </a:p>
         </p:txBody>
@@ -2452,7 +2491,7 @@
         <p:spPr>
           <a:xfrm>
             <a:off x="0" y="0"/>
-            <a:ext cx="12191400" cy="127800"/>
+            <a:ext cx="12191040" cy="127440"/>
           </a:xfrm>
           <a:prstGeom prst="roundRect">
             <a:avLst>
@@ -2467,6 +2506,8 @@
               <a:srgbClr val="ee791f"/>
             </a:solidFill>
             <a:round/>
+            <a:headEnd len="med" type="triangle" w="med"/>
+            <a:tailEnd len="med" type="triangle" w="med"/>
           </a:ln>
         </p:spPr>
         <p:style>
@@ -2480,6 +2521,11 @@
             <a:noAutofit/>
           </a:bodyPr>
           <a:p>
+            <a:pPr>
+              <a:lnSpc>
+                <a:spcPct val="100000"/>
+              </a:lnSpc>
+            </a:pPr>
             <a:endParaRPr b="0" lang="en-US" sz="1800" strike="noStrike" u="none">
               <a:solidFill>
                 <a:srgbClr val="ffffff"/>
@@ -2504,7 +2550,7 @@
         <p:spPr>
           <a:xfrm>
             <a:off x="594360" y="576000"/>
-            <a:ext cx="3108600" cy="1115280"/>
+            <a:ext cx="3108240" cy="1114920"/>
           </a:xfrm>
           <a:prstGeom prst="rect">
             <a:avLst/>
@@ -2528,7 +2574,7 @@
         <p:spPr>
           <a:xfrm>
             <a:off x="7909560" y="603360"/>
-            <a:ext cx="3337200" cy="1096920"/>
+            <a:ext cx="3336840" cy="1096560"/>
           </a:xfrm>
           <a:prstGeom prst="rect">
             <a:avLst/>
@@ -2548,7 +2594,7 @@
         <p:spPr>
           <a:xfrm>
             <a:off x="713160" y="2011680"/>
-            <a:ext cx="10743840" cy="1508400"/>
+            <a:ext cx="10743480" cy="1508040"/>
           </a:xfrm>
           <a:prstGeom prst="rect">
             <a:avLst/>
@@ -2639,7 +2685,7 @@
         <p:spPr>
           <a:xfrm>
             <a:off x="767520" y="3429000"/>
-            <a:ext cx="10433880" cy="1014480"/>
+            <a:ext cx="10433520" cy="1014120"/>
           </a:xfrm>
           <a:prstGeom prst="rect">
             <a:avLst/>
@@ -2772,7 +2818,7 @@
         <p:spPr>
           <a:xfrm>
             <a:off x="731520" y="4883040"/>
-            <a:ext cx="10652400" cy="758520"/>
+            <a:ext cx="10652040" cy="758160"/>
           </a:xfrm>
           <a:prstGeom prst="roundRect">
             <a:avLst>
@@ -2787,6 +2833,8 @@
               <a:srgbClr val="203e57"/>
             </a:solidFill>
             <a:round/>
+            <a:headEnd len="med" type="triangle" w="med"/>
+            <a:tailEnd len="med" type="triangle" w="med"/>
           </a:ln>
         </p:spPr>
         <p:style>
@@ -2800,6 +2848,11 @@
             <a:noAutofit/>
           </a:bodyPr>
           <a:p>
+            <a:pPr>
+              <a:lnSpc>
+                <a:spcPct val="100000"/>
+              </a:lnSpc>
+            </a:pPr>
             <a:endParaRPr b="0" lang="en-US" sz="1800" strike="noStrike" u="none">
               <a:solidFill>
                 <a:srgbClr val="ffffff"/>
@@ -2820,7 +2873,7 @@
         <p:spPr>
           <a:xfrm>
             <a:off x="1014840" y="5074920"/>
-            <a:ext cx="10149480" cy="328680"/>
+            <a:ext cx="10149120" cy="328320"/>
           </a:xfrm>
           <a:prstGeom prst="rect">
             <a:avLst/>
@@ -2885,7 +2938,7 @@
         <p:spPr>
           <a:xfrm>
             <a:off x="685800" y="5715000"/>
-            <a:ext cx="1549080" cy="928080"/>
+            <a:ext cx="1548720" cy="927720"/>
           </a:xfrm>
           <a:prstGeom prst="rect">
             <a:avLst/>
@@ -2909,7 +2962,7 @@
         <p:spPr>
           <a:xfrm>
             <a:off x="5257800" y="5715000"/>
-            <a:ext cx="1604160" cy="914400"/>
+            <a:ext cx="1603800" cy="914040"/>
           </a:xfrm>
           <a:prstGeom prst="rect">
             <a:avLst/>
@@ -2933,7 +2986,7 @@
         <p:spPr>
           <a:xfrm>
             <a:off x="8204760" y="5715000"/>
-            <a:ext cx="3225240" cy="943920"/>
+            <a:ext cx="3224880" cy="943560"/>
           </a:xfrm>
           <a:prstGeom prst="rect">
             <a:avLst/>
@@ -2983,14 +3036,14 @@
       </p:grpSpPr>
       <p:sp>
         <p:nvSpPr>
-          <p:cNvPr id="197" name="Shape 0"/>
+          <p:cNvPr id="191" name="Shape 0"/>
           <p:cNvSpPr/>
           <p:nvPr/>
         </p:nvSpPr>
         <p:spPr>
           <a:xfrm>
             <a:off x="0" y="0"/>
-            <a:ext cx="12191400" cy="109440"/>
+            <a:ext cx="12191040" cy="109080"/>
           </a:xfrm>
           <a:prstGeom prst="rect">
             <a:avLst/>
@@ -3003,6 +3056,8 @@
               <a:srgbClr val="ee791f"/>
             </a:solidFill>
             <a:round/>
+            <a:headEnd len="med" type="triangle" w="med"/>
+            <a:tailEnd len="med" type="triangle" w="med"/>
           </a:ln>
         </p:spPr>
         <p:style>
@@ -3016,6 +3071,11 @@
             <a:noAutofit/>
           </a:bodyPr>
           <a:p>
+            <a:pPr>
+              <a:lnSpc>
+                <a:spcPct val="100000"/>
+              </a:lnSpc>
+            </a:pPr>
             <a:endParaRPr b="0" lang="en-US" sz="1800" strike="noStrike" u="none">
               <a:solidFill>
                 <a:srgbClr val="ffffff"/>
@@ -3029,14 +3089,14 @@
       </p:sp>
       <p:sp>
         <p:nvSpPr>
-          <p:cNvPr id="198" name="Text 1"/>
+          <p:cNvPr id="192" name="Text 1"/>
           <p:cNvSpPr/>
           <p:nvPr/>
         </p:nvSpPr>
         <p:spPr>
           <a:xfrm>
             <a:off x="530280" y="311040"/>
-            <a:ext cx="10881000" cy="548280"/>
+            <a:ext cx="10880640" cy="547920"/>
           </a:xfrm>
           <a:prstGeom prst="rect">
             <a:avLst/>
@@ -3090,14 +3150,14 @@
       </p:sp>
       <p:sp>
         <p:nvSpPr>
-          <p:cNvPr id="199" name="Shape 2"/>
+          <p:cNvPr id="193" name="Shape 2"/>
           <p:cNvSpPr/>
           <p:nvPr/>
         </p:nvSpPr>
         <p:spPr>
           <a:xfrm>
             <a:off x="530280" y="951120"/>
-            <a:ext cx="11100600" cy="31680"/>
+            <a:ext cx="11100240" cy="31320"/>
           </a:xfrm>
           <a:prstGeom prst="rect">
             <a:avLst/>
@@ -3110,6 +3170,8 @@
               <a:srgbClr val="ee791f"/>
             </a:solidFill>
             <a:round/>
+            <a:headEnd len="med" type="triangle" w="med"/>
+            <a:tailEnd len="med" type="triangle" w="med"/>
           </a:ln>
         </p:spPr>
         <p:style>
@@ -3123,6 +3185,11 @@
             <a:noAutofit/>
           </a:bodyPr>
           <a:p>
+            <a:pPr>
+              <a:lnSpc>
+                <a:spcPct val="100000"/>
+              </a:lnSpc>
+            </a:pPr>
             <a:endParaRPr b="0" lang="en-US" sz="1800" strike="noStrike" u="none">
               <a:solidFill>
                 <a:srgbClr val="ffffff"/>
@@ -3136,14 +3203,14 @@
       </p:sp>
       <p:sp>
         <p:nvSpPr>
-          <p:cNvPr id="200" name="Text 3"/>
+          <p:cNvPr id="194" name="Text 3"/>
           <p:cNvSpPr/>
           <p:nvPr/>
         </p:nvSpPr>
         <p:spPr>
           <a:xfrm>
             <a:off x="548640" y="6473880"/>
-            <a:ext cx="9143640" cy="200880"/>
+            <a:ext cx="9143280" cy="200520"/>
           </a:xfrm>
           <a:prstGeom prst="rect">
             <a:avLst/>
@@ -3197,14 +3264,14 @@
       </p:sp>
       <p:sp>
         <p:nvSpPr>
-          <p:cNvPr id="201" name="Text 4"/>
+          <p:cNvPr id="195" name="Text 4"/>
           <p:cNvSpPr/>
           <p:nvPr/>
         </p:nvSpPr>
         <p:spPr>
           <a:xfrm>
             <a:off x="11018520" y="6473880"/>
-            <a:ext cx="511560" cy="200880"/>
+            <a:ext cx="511200" cy="200520"/>
           </a:xfrm>
           <a:prstGeom prst="rect">
             <a:avLst/>
@@ -3258,14 +3325,14 @@
       </p:sp>
       <p:sp>
         <p:nvSpPr>
-          <p:cNvPr id="202" name="Shape 5"/>
+          <p:cNvPr id="196" name="Shape 5"/>
           <p:cNvSpPr/>
           <p:nvPr/>
         </p:nvSpPr>
         <p:spPr>
           <a:xfrm>
             <a:off x="548640" y="1307520"/>
-            <a:ext cx="2660400" cy="1325520"/>
+            <a:ext cx="2660040" cy="1325160"/>
           </a:xfrm>
           <a:prstGeom prst="roundRect">
             <a:avLst>
@@ -3280,6 +3347,8 @@
               <a:srgbClr val="f2f6fa"/>
             </a:solidFill>
             <a:round/>
+            <a:headEnd len="med" type="triangle" w="med"/>
+            <a:tailEnd len="med" type="triangle" w="med"/>
           </a:ln>
         </p:spPr>
         <p:style>
@@ -3293,6 +3362,11 @@
             <a:noAutofit/>
           </a:bodyPr>
           <a:p>
+            <a:pPr>
+              <a:lnSpc>
+                <a:spcPct val="100000"/>
+              </a:lnSpc>
+            </a:pPr>
             <a:endParaRPr b="0" lang="en-US" sz="1800" strike="noStrike" u="none">
               <a:solidFill>
                 <a:srgbClr val="000000"/>
@@ -3306,14 +3380,14 @@
       </p:sp>
       <p:sp>
         <p:nvSpPr>
-          <p:cNvPr id="203" name="Text 6"/>
+          <p:cNvPr id="197" name="Text 6"/>
           <p:cNvSpPr/>
           <p:nvPr/>
         </p:nvSpPr>
         <p:spPr>
           <a:xfrm>
             <a:off x="713160" y="1563480"/>
-            <a:ext cx="2285640" cy="328680"/>
+            <a:ext cx="2285280" cy="328320"/>
           </a:xfrm>
           <a:prstGeom prst="rect">
             <a:avLst/>
@@ -3367,14 +3441,14 @@
       </p:sp>
       <p:sp>
         <p:nvSpPr>
-          <p:cNvPr id="204" name="Text 7"/>
+          <p:cNvPr id="198" name="Text 7"/>
           <p:cNvSpPr/>
           <p:nvPr/>
         </p:nvSpPr>
         <p:spPr>
           <a:xfrm>
             <a:off x="713160" y="1965960"/>
-            <a:ext cx="2304000" cy="484200"/>
+            <a:ext cx="2303640" cy="483840"/>
           </a:xfrm>
           <a:prstGeom prst="rect">
             <a:avLst/>
@@ -3428,14 +3502,14 @@
       </p:sp>
       <p:sp>
         <p:nvSpPr>
-          <p:cNvPr id="205" name="Shape 8"/>
+          <p:cNvPr id="199" name="Shape 8"/>
           <p:cNvSpPr/>
           <p:nvPr/>
         </p:nvSpPr>
         <p:spPr>
           <a:xfrm>
             <a:off x="3456360" y="1307520"/>
-            <a:ext cx="2660400" cy="1325520"/>
+            <a:ext cx="2660040" cy="1325160"/>
           </a:xfrm>
           <a:prstGeom prst="roundRect">
             <a:avLst>
@@ -3450,6 +3524,8 @@
               <a:srgbClr val="eaf4fa"/>
             </a:solidFill>
             <a:round/>
+            <a:headEnd len="med" type="triangle" w="med"/>
+            <a:tailEnd len="med" type="triangle" w="med"/>
           </a:ln>
         </p:spPr>
         <p:style>
@@ -3463,6 +3539,11 @@
             <a:noAutofit/>
           </a:bodyPr>
           <a:p>
+            <a:pPr>
+              <a:lnSpc>
+                <a:spcPct val="100000"/>
+              </a:lnSpc>
+            </a:pPr>
             <a:endParaRPr b="0" lang="en-US" sz="1800" strike="noStrike" u="none">
               <a:solidFill>
                 <a:srgbClr val="000000"/>
@@ -3476,14 +3557,14 @@
       </p:sp>
       <p:sp>
         <p:nvSpPr>
-          <p:cNvPr id="206" name="Text 9"/>
+          <p:cNvPr id="200" name="Text 9"/>
           <p:cNvSpPr/>
           <p:nvPr/>
         </p:nvSpPr>
         <p:spPr>
           <a:xfrm>
             <a:off x="3620880" y="1563480"/>
-            <a:ext cx="2285640" cy="328680"/>
+            <a:ext cx="2285280" cy="328320"/>
           </a:xfrm>
           <a:prstGeom prst="rect">
             <a:avLst/>
@@ -3537,14 +3618,14 @@
       </p:sp>
       <p:sp>
         <p:nvSpPr>
-          <p:cNvPr id="207" name="Text 10"/>
+          <p:cNvPr id="201" name="Text 10"/>
           <p:cNvSpPr/>
           <p:nvPr/>
         </p:nvSpPr>
         <p:spPr>
           <a:xfrm>
             <a:off x="3620880" y="1965960"/>
-            <a:ext cx="2304000" cy="484200"/>
+            <a:ext cx="2303640" cy="483840"/>
           </a:xfrm>
           <a:prstGeom prst="rect">
             <a:avLst/>
@@ -3598,14 +3679,14 @@
       </p:sp>
       <p:sp>
         <p:nvSpPr>
-          <p:cNvPr id="208" name="Shape 11"/>
+          <p:cNvPr id="202" name="Shape 11"/>
           <p:cNvSpPr/>
           <p:nvPr/>
         </p:nvSpPr>
         <p:spPr>
           <a:xfrm>
             <a:off x="6364080" y="1307520"/>
-            <a:ext cx="2660400" cy="1325520"/>
+            <a:ext cx="2660040" cy="1325160"/>
           </a:xfrm>
           <a:prstGeom prst="roundRect">
             <a:avLst>
@@ -3620,6 +3701,8 @@
               <a:srgbClr val="f2f6fa"/>
             </a:solidFill>
             <a:round/>
+            <a:headEnd len="med" type="triangle" w="med"/>
+            <a:tailEnd len="med" type="triangle" w="med"/>
           </a:ln>
         </p:spPr>
         <p:style>
@@ -3633,6 +3716,11 @@
             <a:noAutofit/>
           </a:bodyPr>
           <a:p>
+            <a:pPr>
+              <a:lnSpc>
+                <a:spcPct val="100000"/>
+              </a:lnSpc>
+            </a:pPr>
             <a:endParaRPr b="0" lang="en-US" sz="1800" strike="noStrike" u="none">
               <a:solidFill>
                 <a:srgbClr val="000000"/>
@@ -3646,14 +3734,14 @@
       </p:sp>
       <p:sp>
         <p:nvSpPr>
-          <p:cNvPr id="209" name="Text 12"/>
+          <p:cNvPr id="203" name="Text 12"/>
           <p:cNvSpPr/>
           <p:nvPr/>
         </p:nvSpPr>
         <p:spPr>
           <a:xfrm>
             <a:off x="6528960" y="1563480"/>
-            <a:ext cx="2285640" cy="328680"/>
+            <a:ext cx="2285280" cy="328320"/>
           </a:xfrm>
           <a:prstGeom prst="rect">
             <a:avLst/>
@@ -3707,14 +3795,14 @@
       </p:sp>
       <p:sp>
         <p:nvSpPr>
-          <p:cNvPr id="210" name="Text 13"/>
+          <p:cNvPr id="204" name="Text 13"/>
           <p:cNvSpPr/>
           <p:nvPr/>
         </p:nvSpPr>
         <p:spPr>
           <a:xfrm>
             <a:off x="6528960" y="1965960"/>
-            <a:ext cx="2304000" cy="484200"/>
+            <a:ext cx="2303640" cy="483840"/>
           </a:xfrm>
           <a:prstGeom prst="rect">
             <a:avLst/>
@@ -3768,14 +3856,14 @@
       </p:sp>
       <p:sp>
         <p:nvSpPr>
-          <p:cNvPr id="211" name="Shape 14"/>
+          <p:cNvPr id="205" name="Shape 14"/>
           <p:cNvSpPr/>
           <p:nvPr/>
         </p:nvSpPr>
         <p:spPr>
           <a:xfrm>
             <a:off x="9272160" y="1307520"/>
-            <a:ext cx="2660400" cy="1325520"/>
+            <a:ext cx="2660040" cy="1325160"/>
           </a:xfrm>
           <a:prstGeom prst="roundRect">
             <a:avLst>
@@ -3790,6 +3878,8 @@
               <a:srgbClr val="eaf4fa"/>
             </a:solidFill>
             <a:round/>
+            <a:headEnd len="med" type="triangle" w="med"/>
+            <a:tailEnd len="med" type="triangle" w="med"/>
           </a:ln>
         </p:spPr>
         <p:style>
@@ -3803,6 +3893,11 @@
             <a:noAutofit/>
           </a:bodyPr>
           <a:p>
+            <a:pPr>
+              <a:lnSpc>
+                <a:spcPct val="100000"/>
+              </a:lnSpc>
+            </a:pPr>
             <a:endParaRPr b="0" lang="en-US" sz="1800" strike="noStrike" u="none">
               <a:solidFill>
                 <a:srgbClr val="000000"/>
@@ -3816,14 +3911,14 @@
       </p:sp>
       <p:sp>
         <p:nvSpPr>
-          <p:cNvPr id="212" name="Text 15"/>
+          <p:cNvPr id="206" name="Text 15"/>
           <p:cNvSpPr/>
           <p:nvPr/>
         </p:nvSpPr>
         <p:spPr>
           <a:xfrm>
             <a:off x="9436680" y="1563480"/>
-            <a:ext cx="2285640" cy="328680"/>
+            <a:ext cx="2285280" cy="328320"/>
           </a:xfrm>
           <a:prstGeom prst="rect">
             <a:avLst/>
@@ -3877,14 +3972,14 @@
       </p:sp>
       <p:sp>
         <p:nvSpPr>
-          <p:cNvPr id="213" name="Text 16"/>
+          <p:cNvPr id="207" name="Text 16"/>
           <p:cNvSpPr/>
           <p:nvPr/>
         </p:nvSpPr>
         <p:spPr>
           <a:xfrm>
             <a:off x="9436680" y="1965960"/>
-            <a:ext cx="2304000" cy="484200"/>
+            <a:ext cx="2303640" cy="483840"/>
           </a:xfrm>
           <a:prstGeom prst="rect">
             <a:avLst/>
@@ -3938,14 +4033,14 @@
       </p:sp>
       <p:sp>
         <p:nvSpPr>
-          <p:cNvPr id="214" name="Text 17"/>
+          <p:cNvPr id="208" name="Text 17"/>
           <p:cNvSpPr/>
           <p:nvPr/>
         </p:nvSpPr>
         <p:spPr>
           <a:xfrm>
             <a:off x="685800" y="3017520"/>
-            <a:ext cx="9692280" cy="429480"/>
+            <a:ext cx="9691920" cy="429120"/>
           </a:xfrm>
           <a:prstGeom prst="rect">
             <a:avLst/>
@@ -3999,14 +4094,14 @@
       </p:sp>
       <p:sp>
         <p:nvSpPr>
-          <p:cNvPr id="215" name="Shape 18"/>
+          <p:cNvPr id="209" name="Shape 18"/>
           <p:cNvSpPr/>
           <p:nvPr/>
         </p:nvSpPr>
         <p:spPr>
           <a:xfrm>
             <a:off x="786240" y="3694320"/>
-            <a:ext cx="77400" cy="77400"/>
+            <a:ext cx="77040" cy="77040"/>
           </a:xfrm>
           <a:prstGeom prst="roundRect">
             <a:avLst>
@@ -4021,6 +4116,8 @@
               <a:srgbClr val="ee791f"/>
             </a:solidFill>
             <a:round/>
+            <a:headEnd len="med" type="triangle" w="med"/>
+            <a:tailEnd len="med" type="triangle" w="med"/>
           </a:ln>
         </p:spPr>
         <p:style>
@@ -4034,6 +4131,11 @@
             <a:noAutofit/>
           </a:bodyPr>
           <a:p>
+            <a:pPr>
+              <a:lnSpc>
+                <a:spcPct val="100000"/>
+              </a:lnSpc>
+            </a:pPr>
             <a:endParaRPr b="0" lang="en-US" sz="1800" strike="noStrike" u="none">
               <a:solidFill>
                 <a:srgbClr val="ffffff"/>
@@ -4047,14 +4149,14 @@
       </p:sp>
       <p:sp>
         <p:nvSpPr>
-          <p:cNvPr id="216" name="Text 19"/>
+          <p:cNvPr id="210" name="Text 19"/>
           <p:cNvSpPr/>
           <p:nvPr/>
         </p:nvSpPr>
         <p:spPr>
           <a:xfrm>
             <a:off x="1033200" y="3575160"/>
-            <a:ext cx="10332360" cy="456840"/>
+            <a:ext cx="10332000" cy="456480"/>
           </a:xfrm>
           <a:prstGeom prst="rect">
             <a:avLst/>
@@ -4108,14 +4210,14 @@
       </p:sp>
       <p:sp>
         <p:nvSpPr>
-          <p:cNvPr id="217" name="Shape 20"/>
+          <p:cNvPr id="211" name="Shape 20"/>
           <p:cNvSpPr/>
           <p:nvPr/>
         </p:nvSpPr>
         <p:spPr>
           <a:xfrm>
             <a:off x="786240" y="4260960"/>
-            <a:ext cx="77400" cy="77400"/>
+            <a:ext cx="77040" cy="77040"/>
           </a:xfrm>
           <a:prstGeom prst="roundRect">
             <a:avLst>
@@ -4130,6 +4232,8 @@
               <a:srgbClr val="ee791f"/>
             </a:solidFill>
             <a:round/>
+            <a:headEnd len="med" type="triangle" w="med"/>
+            <a:tailEnd len="med" type="triangle" w="med"/>
           </a:ln>
         </p:spPr>
         <p:style>
@@ -4143,6 +4247,11 @@
             <a:noAutofit/>
           </a:bodyPr>
           <a:p>
+            <a:pPr>
+              <a:lnSpc>
+                <a:spcPct val="100000"/>
+              </a:lnSpc>
+            </a:pPr>
             <a:endParaRPr b="0" lang="en-US" sz="1800" strike="noStrike" u="none">
               <a:solidFill>
                 <a:srgbClr val="ffffff"/>
@@ -4156,14 +4265,14 @@
       </p:sp>
       <p:sp>
         <p:nvSpPr>
-          <p:cNvPr id="218" name="Text 21"/>
+          <p:cNvPr id="212" name="Text 21"/>
           <p:cNvSpPr/>
           <p:nvPr/>
         </p:nvSpPr>
         <p:spPr>
           <a:xfrm>
             <a:off x="1033200" y="4142160"/>
-            <a:ext cx="10332360" cy="456840"/>
+            <a:ext cx="10332000" cy="456480"/>
           </a:xfrm>
           <a:prstGeom prst="rect">
             <a:avLst/>
@@ -4217,14 +4326,14 @@
       </p:sp>
       <p:sp>
         <p:nvSpPr>
-          <p:cNvPr id="219" name="Shape 22"/>
+          <p:cNvPr id="213" name="Shape 22"/>
           <p:cNvSpPr/>
           <p:nvPr/>
         </p:nvSpPr>
         <p:spPr>
           <a:xfrm>
             <a:off x="786240" y="4827960"/>
-            <a:ext cx="77400" cy="77400"/>
+            <a:ext cx="77040" cy="77040"/>
           </a:xfrm>
           <a:prstGeom prst="roundRect">
             <a:avLst>
@@ -4239,6 +4348,8 @@
               <a:srgbClr val="ee791f"/>
             </a:solidFill>
             <a:round/>
+            <a:headEnd len="med" type="triangle" w="med"/>
+            <a:tailEnd len="med" type="triangle" w="med"/>
           </a:ln>
         </p:spPr>
         <p:style>
@@ -4252,6 +4363,11 @@
             <a:noAutofit/>
           </a:bodyPr>
           <a:p>
+            <a:pPr>
+              <a:lnSpc>
+                <a:spcPct val="100000"/>
+              </a:lnSpc>
+            </a:pPr>
             <a:endParaRPr b="0" lang="en-US" sz="1800" strike="noStrike" u="none">
               <a:solidFill>
                 <a:srgbClr val="ffffff"/>
@@ -4265,14 +4381,14 @@
       </p:sp>
       <p:sp>
         <p:nvSpPr>
-          <p:cNvPr id="220" name="Text 23"/>
+          <p:cNvPr id="214" name="Text 23"/>
           <p:cNvSpPr/>
           <p:nvPr/>
         </p:nvSpPr>
         <p:spPr>
           <a:xfrm>
             <a:off x="1033200" y="4709160"/>
-            <a:ext cx="10332360" cy="456840"/>
+            <a:ext cx="10332000" cy="456480"/>
           </a:xfrm>
           <a:prstGeom prst="rect">
             <a:avLst/>
@@ -4326,14 +4442,14 @@
       </p:sp>
       <p:sp>
         <p:nvSpPr>
-          <p:cNvPr id="221" name="Shape 24"/>
+          <p:cNvPr id="215" name="Shape 24"/>
           <p:cNvSpPr/>
           <p:nvPr/>
         </p:nvSpPr>
         <p:spPr>
           <a:xfrm>
             <a:off x="786240" y="5394960"/>
-            <a:ext cx="77400" cy="77400"/>
+            <a:ext cx="77040" cy="77040"/>
           </a:xfrm>
           <a:prstGeom prst="roundRect">
             <a:avLst>
@@ -4348,6 +4464,8 @@
               <a:srgbClr val="ee791f"/>
             </a:solidFill>
             <a:round/>
+            <a:headEnd len="med" type="triangle" w="med"/>
+            <a:tailEnd len="med" type="triangle" w="med"/>
           </a:ln>
         </p:spPr>
         <p:style>
@@ -4361,6 +4479,11 @@
             <a:noAutofit/>
           </a:bodyPr>
           <a:p>
+            <a:pPr>
+              <a:lnSpc>
+                <a:spcPct val="100000"/>
+              </a:lnSpc>
+            </a:pPr>
             <a:endParaRPr b="0" lang="en-US" sz="1800" strike="noStrike" u="none">
               <a:solidFill>
                 <a:srgbClr val="ffffff"/>
@@ -4374,14 +4497,14 @@
       </p:sp>
       <p:sp>
         <p:nvSpPr>
-          <p:cNvPr id="222" name="Text 25"/>
+          <p:cNvPr id="216" name="Text 25"/>
           <p:cNvSpPr/>
           <p:nvPr/>
         </p:nvSpPr>
         <p:spPr>
           <a:xfrm>
             <a:off x="1033200" y="5276160"/>
-            <a:ext cx="10332360" cy="456840"/>
+            <a:ext cx="10332000" cy="456480"/>
           </a:xfrm>
           <a:prstGeom prst="rect">
             <a:avLst/>
@@ -4435,14 +4558,14 @@
       </p:sp>
       <p:sp>
         <p:nvSpPr>
-          <p:cNvPr id="223" name="Text 26"/>
+          <p:cNvPr id="217" name="Text 26"/>
           <p:cNvSpPr/>
           <p:nvPr/>
         </p:nvSpPr>
         <p:spPr>
           <a:xfrm>
             <a:off x="722520" y="6126480"/>
-            <a:ext cx="10926720" cy="273960"/>
+            <a:ext cx="10926360" cy="273600"/>
           </a:xfrm>
           <a:prstGeom prst="rect">
             <a:avLst/>
@@ -4533,14 +4656,14 @@
       </p:grpSpPr>
       <p:sp>
         <p:nvSpPr>
-          <p:cNvPr id="135" name="Shape 0"/>
+          <p:cNvPr id="218" name="Shape 0"/>
           <p:cNvSpPr/>
           <p:nvPr/>
         </p:nvSpPr>
         <p:spPr>
           <a:xfrm>
             <a:off x="0" y="0"/>
-            <a:ext cx="12191400" cy="109440"/>
+            <a:ext cx="12191040" cy="109080"/>
           </a:xfrm>
           <a:prstGeom prst="rect">
             <a:avLst/>
@@ -4553,6 +4676,8 @@
               <a:srgbClr val="ee791f"/>
             </a:solidFill>
             <a:round/>
+            <a:headEnd len="med" type="triangle" w="med"/>
+            <a:tailEnd len="med" type="triangle" w="med"/>
           </a:ln>
         </p:spPr>
         <p:style>
@@ -4566,6 +4691,11 @@
             <a:noAutofit/>
           </a:bodyPr>
           <a:p>
+            <a:pPr>
+              <a:lnSpc>
+                <a:spcPct val="100000"/>
+              </a:lnSpc>
+            </a:pPr>
             <a:endParaRPr b="0" lang="en-US" sz="1800" strike="noStrike" u="none">
               <a:solidFill>
                 <a:srgbClr val="ffffff"/>
@@ -4579,14 +4709,14 @@
       </p:sp>
       <p:sp>
         <p:nvSpPr>
-          <p:cNvPr id="136" name="Text 1"/>
+          <p:cNvPr id="219" name="Text 1"/>
           <p:cNvSpPr/>
           <p:nvPr/>
         </p:nvSpPr>
         <p:spPr>
           <a:xfrm>
             <a:off x="530280" y="311040"/>
-            <a:ext cx="10881000" cy="548280"/>
+            <a:ext cx="10880640" cy="547920"/>
           </a:xfrm>
           <a:prstGeom prst="rect">
             <a:avLst/>
@@ -4640,14 +4770,14 @@
       </p:sp>
       <p:sp>
         <p:nvSpPr>
-          <p:cNvPr id="137" name="Shape 2"/>
+          <p:cNvPr id="220" name="Shape 2"/>
           <p:cNvSpPr/>
           <p:nvPr/>
         </p:nvSpPr>
         <p:spPr>
           <a:xfrm>
             <a:off x="530280" y="951120"/>
-            <a:ext cx="11100600" cy="31680"/>
+            <a:ext cx="11100240" cy="31320"/>
           </a:xfrm>
           <a:prstGeom prst="rect">
             <a:avLst/>
@@ -4660,6 +4790,8 @@
               <a:srgbClr val="ee791f"/>
             </a:solidFill>
             <a:round/>
+            <a:headEnd len="med" type="triangle" w="med"/>
+            <a:tailEnd len="med" type="triangle" w="med"/>
           </a:ln>
         </p:spPr>
         <p:style>
@@ -4673,6 +4805,11 @@
             <a:noAutofit/>
           </a:bodyPr>
           <a:p>
+            <a:pPr>
+              <a:lnSpc>
+                <a:spcPct val="100000"/>
+              </a:lnSpc>
+            </a:pPr>
             <a:endParaRPr b="0" lang="en-US" sz="1800" strike="noStrike" u="none">
               <a:solidFill>
                 <a:srgbClr val="ffffff"/>
@@ -4686,14 +4823,14 @@
       </p:sp>
       <p:sp>
         <p:nvSpPr>
-          <p:cNvPr id="138" name="Text 3"/>
+          <p:cNvPr id="221" name="Text 3"/>
           <p:cNvSpPr/>
           <p:nvPr/>
         </p:nvSpPr>
         <p:spPr>
           <a:xfrm>
             <a:off x="548640" y="6473880"/>
-            <a:ext cx="9143640" cy="200880"/>
+            <a:ext cx="9143280" cy="200520"/>
           </a:xfrm>
           <a:prstGeom prst="rect">
             <a:avLst/>
@@ -4747,14 +4884,14 @@
       </p:sp>
       <p:sp>
         <p:nvSpPr>
-          <p:cNvPr id="139" name="Text 4"/>
+          <p:cNvPr id="222" name="Text 4"/>
           <p:cNvSpPr/>
           <p:nvPr/>
         </p:nvSpPr>
         <p:spPr>
           <a:xfrm>
             <a:off x="11018520" y="6473880"/>
-            <a:ext cx="511560" cy="200880"/>
+            <a:ext cx="511200" cy="200520"/>
           </a:xfrm>
           <a:prstGeom prst="rect">
             <a:avLst/>
@@ -4808,14 +4945,14 @@
       </p:sp>
       <p:sp>
         <p:nvSpPr>
-          <p:cNvPr id="140" name="Shape 5"/>
+          <p:cNvPr id="223" name="Shape 5"/>
           <p:cNvSpPr/>
           <p:nvPr/>
         </p:nvSpPr>
         <p:spPr>
           <a:xfrm>
             <a:off x="612720" y="1271160"/>
-            <a:ext cx="7086240" cy="4361400"/>
+            <a:ext cx="7085880" cy="4361040"/>
           </a:xfrm>
           <a:prstGeom prst="roundRect">
             <a:avLst>
@@ -4830,6 +4967,8 @@
               <a:srgbClr val="11233b"/>
             </a:solidFill>
             <a:round/>
+            <a:headEnd len="med" type="triangle" w="med"/>
+            <a:tailEnd len="med" type="triangle" w="med"/>
           </a:ln>
         </p:spPr>
         <p:style>
@@ -4843,6 +4982,11 @@
             <a:noAutofit/>
           </a:bodyPr>
           <a:p>
+            <a:pPr>
+              <a:lnSpc>
+                <a:spcPct val="100000"/>
+              </a:lnSpc>
+            </a:pPr>
             <a:endParaRPr b="0" lang="en-US" sz="1800" strike="noStrike" u="none">
               <a:solidFill>
                 <a:srgbClr val="ffffff"/>
@@ -4856,14 +5000,14 @@
       </p:sp>
       <p:sp>
         <p:nvSpPr>
-          <p:cNvPr id="141" name="Text 6"/>
+          <p:cNvPr id="224" name="Text 6"/>
           <p:cNvSpPr/>
           <p:nvPr/>
         </p:nvSpPr>
         <p:spPr>
           <a:xfrm>
             <a:off x="795600" y="1380600"/>
-            <a:ext cx="6738840" cy="4178520"/>
+            <a:ext cx="6738480" cy="4178160"/>
           </a:xfrm>
           <a:prstGeom prst="rect">
             <a:avLst/>
@@ -5157,14 +5301,14 @@
       </p:sp>
       <p:sp>
         <p:nvSpPr>
-          <p:cNvPr id="142" name="Shape 7"/>
+          <p:cNvPr id="225" name="Shape 7"/>
           <p:cNvSpPr/>
           <p:nvPr/>
         </p:nvSpPr>
         <p:spPr>
           <a:xfrm>
             <a:off x="8010000" y="1271160"/>
-            <a:ext cx="3501720" cy="4379760"/>
+            <a:ext cx="3501360" cy="4379400"/>
           </a:xfrm>
           <a:prstGeom prst="roundRect">
             <a:avLst>
@@ -5179,6 +5323,8 @@
               <a:srgbClr val="f2f6fa"/>
             </a:solidFill>
             <a:round/>
+            <a:headEnd len="med" type="triangle" w="med"/>
+            <a:tailEnd len="med" type="triangle" w="med"/>
           </a:ln>
         </p:spPr>
         <p:style>
@@ -5192,6 +5338,11 @@
             <a:noAutofit/>
           </a:bodyPr>
           <a:p>
+            <a:pPr>
+              <a:lnSpc>
+                <a:spcPct val="100000"/>
+              </a:lnSpc>
+            </a:pPr>
             <a:endParaRPr b="0" lang="en-US" sz="1800" strike="noStrike" u="none">
               <a:solidFill>
                 <a:srgbClr val="000000"/>
@@ -5205,14 +5356,14 @@
       </p:sp>
       <p:sp>
         <p:nvSpPr>
-          <p:cNvPr id="143" name="Text 8"/>
+          <p:cNvPr id="226" name="Text 8"/>
           <p:cNvSpPr/>
           <p:nvPr/>
         </p:nvSpPr>
         <p:spPr>
           <a:xfrm>
             <a:off x="8275320" y="1508760"/>
-            <a:ext cx="2880000" cy="411120"/>
+            <a:ext cx="2879640" cy="410760"/>
           </a:xfrm>
           <a:prstGeom prst="rect">
             <a:avLst/>
@@ -5266,14 +5417,14 @@
       </p:sp>
       <p:sp>
         <p:nvSpPr>
-          <p:cNvPr id="144" name="Text 9"/>
+          <p:cNvPr id="227" name="Text 9"/>
           <p:cNvSpPr/>
           <p:nvPr/>
         </p:nvSpPr>
         <p:spPr>
           <a:xfrm>
             <a:off x="8284320" y="2066400"/>
-            <a:ext cx="2898360" cy="3135960"/>
+            <a:ext cx="2898000" cy="3135600"/>
           </a:xfrm>
           <a:prstGeom prst="rect">
             <a:avLst/>
@@ -5460,14 +5611,14 @@
       </p:grpSpPr>
       <p:sp>
         <p:nvSpPr>
-          <p:cNvPr id="163" name="Shape 0"/>
+          <p:cNvPr id="228" name="Shape 0"/>
           <p:cNvSpPr/>
           <p:nvPr/>
         </p:nvSpPr>
         <p:spPr>
           <a:xfrm>
             <a:off x="0" y="0"/>
-            <a:ext cx="12191400" cy="109440"/>
+            <a:ext cx="12191040" cy="109080"/>
           </a:xfrm>
           <a:prstGeom prst="rect">
             <a:avLst/>
@@ -5480,6 +5631,8 @@
               <a:srgbClr val="ee791f"/>
             </a:solidFill>
             <a:round/>
+            <a:headEnd len="med" type="triangle" w="med"/>
+            <a:tailEnd len="med" type="triangle" w="med"/>
           </a:ln>
         </p:spPr>
         <p:style>
@@ -5493,6 +5646,11 @@
             <a:noAutofit/>
           </a:bodyPr>
           <a:p>
+            <a:pPr>
+              <a:lnSpc>
+                <a:spcPct val="100000"/>
+              </a:lnSpc>
+            </a:pPr>
             <a:endParaRPr b="0" lang="en-US" sz="1800" strike="noStrike" u="none">
               <a:solidFill>
                 <a:srgbClr val="ffffff"/>
@@ -5506,14 +5664,14 @@
       </p:sp>
       <p:sp>
         <p:nvSpPr>
-          <p:cNvPr id="164" name="Text 1"/>
+          <p:cNvPr id="229" name="Text 1"/>
           <p:cNvSpPr/>
           <p:nvPr/>
         </p:nvSpPr>
         <p:spPr>
           <a:xfrm>
             <a:off x="530280" y="311040"/>
-            <a:ext cx="10881000" cy="548280"/>
+            <a:ext cx="10880640" cy="547920"/>
           </a:xfrm>
           <a:prstGeom prst="rect">
             <a:avLst/>
@@ -5567,14 +5725,14 @@
       </p:sp>
       <p:sp>
         <p:nvSpPr>
-          <p:cNvPr id="165" name="Shape 2"/>
+          <p:cNvPr id="230" name="Shape 2"/>
           <p:cNvSpPr/>
           <p:nvPr/>
         </p:nvSpPr>
         <p:spPr>
           <a:xfrm>
             <a:off x="530280" y="951120"/>
-            <a:ext cx="11100600" cy="31680"/>
+            <a:ext cx="11100240" cy="31320"/>
           </a:xfrm>
           <a:prstGeom prst="rect">
             <a:avLst/>
@@ -5587,6 +5745,8 @@
               <a:srgbClr val="ee791f"/>
             </a:solidFill>
             <a:round/>
+            <a:headEnd len="med" type="triangle" w="med"/>
+            <a:tailEnd len="med" type="triangle" w="med"/>
           </a:ln>
         </p:spPr>
         <p:style>
@@ -5600,6 +5760,11 @@
             <a:noAutofit/>
           </a:bodyPr>
           <a:p>
+            <a:pPr>
+              <a:lnSpc>
+                <a:spcPct val="100000"/>
+              </a:lnSpc>
+            </a:pPr>
             <a:endParaRPr b="0" lang="en-US" sz="1800" strike="noStrike" u="none">
               <a:solidFill>
                 <a:srgbClr val="ffffff"/>
@@ -5613,14 +5778,14 @@
       </p:sp>
       <p:sp>
         <p:nvSpPr>
-          <p:cNvPr id="166" name="Text 3"/>
+          <p:cNvPr id="231" name="Text 3"/>
           <p:cNvSpPr/>
           <p:nvPr/>
         </p:nvSpPr>
         <p:spPr>
           <a:xfrm>
             <a:off x="548640" y="6473880"/>
-            <a:ext cx="9143640" cy="200880"/>
+            <a:ext cx="9143280" cy="200520"/>
           </a:xfrm>
           <a:prstGeom prst="rect">
             <a:avLst/>
@@ -5674,14 +5839,14 @@
       </p:sp>
       <p:sp>
         <p:nvSpPr>
-          <p:cNvPr id="167" name="Text 4"/>
+          <p:cNvPr id="232" name="Text 4"/>
           <p:cNvSpPr/>
           <p:nvPr/>
         </p:nvSpPr>
         <p:spPr>
           <a:xfrm>
             <a:off x="11018520" y="6473880"/>
-            <a:ext cx="511560" cy="200880"/>
+            <a:ext cx="511200" cy="200520"/>
           </a:xfrm>
           <a:prstGeom prst="rect">
             <a:avLst/>
@@ -5735,14 +5900,14 @@
       </p:sp>
       <p:sp>
         <p:nvSpPr>
-          <p:cNvPr id="168" name="Shape 5"/>
+          <p:cNvPr id="233" name="Shape 5"/>
           <p:cNvSpPr/>
           <p:nvPr/>
         </p:nvSpPr>
         <p:spPr>
           <a:xfrm>
             <a:off x="603360" y="1188720"/>
-            <a:ext cx="10999800" cy="1508400"/>
+            <a:ext cx="10999440" cy="1508040"/>
           </a:xfrm>
           <a:prstGeom prst="roundRect">
             <a:avLst>
@@ -5757,6 +5922,8 @@
               <a:srgbClr val="11233b"/>
             </a:solidFill>
             <a:round/>
+            <a:headEnd len="med" type="triangle" w="med"/>
+            <a:tailEnd len="med" type="triangle" w="med"/>
           </a:ln>
         </p:spPr>
         <p:style>
@@ -5770,6 +5937,11 @@
             <a:noAutofit/>
           </a:bodyPr>
           <a:p>
+            <a:pPr>
+              <a:lnSpc>
+                <a:spcPct val="100000"/>
+              </a:lnSpc>
+            </a:pPr>
             <a:endParaRPr b="0" lang="en-US" sz="1800" strike="noStrike" u="none">
               <a:solidFill>
                 <a:srgbClr val="ffffff"/>
@@ -5783,14 +5955,14 @@
       </p:sp>
       <p:sp>
         <p:nvSpPr>
-          <p:cNvPr id="169" name="Text 6"/>
+          <p:cNvPr id="234" name="Text 6"/>
           <p:cNvSpPr/>
           <p:nvPr/>
         </p:nvSpPr>
         <p:spPr>
           <a:xfrm>
             <a:off x="786240" y="1298520"/>
-            <a:ext cx="10652400" cy="1325520"/>
+            <a:ext cx="10652040" cy="1325160"/>
           </a:xfrm>
           <a:prstGeom prst="rect">
             <a:avLst/>
@@ -5964,14 +6136,14 @@
       </p:sp>
       <p:sp>
         <p:nvSpPr>
-          <p:cNvPr id="170" name="Shape 7"/>
+          <p:cNvPr id="235" name="Shape 7"/>
           <p:cNvSpPr/>
           <p:nvPr/>
         </p:nvSpPr>
         <p:spPr>
           <a:xfrm>
             <a:off x="631080" y="2907720"/>
-            <a:ext cx="10917720" cy="914040"/>
+            <a:ext cx="10917360" cy="913680"/>
           </a:xfrm>
           <a:prstGeom prst="roundRect">
             <a:avLst>
@@ -5986,6 +6158,8 @@
               <a:srgbClr val="edf5f8"/>
             </a:solidFill>
             <a:round/>
+            <a:headEnd len="med" type="triangle" w="med"/>
+            <a:tailEnd len="med" type="triangle" w="med"/>
           </a:ln>
         </p:spPr>
         <p:style>
@@ -5999,6 +6173,11 @@
             <a:noAutofit/>
           </a:bodyPr>
           <a:p>
+            <a:pPr>
+              <a:lnSpc>
+                <a:spcPct val="100000"/>
+              </a:lnSpc>
+            </a:pPr>
             <a:endParaRPr b="0" lang="en-US" sz="1800" strike="noStrike" u="none">
               <a:solidFill>
                 <a:srgbClr val="000000"/>
@@ -6012,14 +6191,14 @@
       </p:sp>
       <p:sp>
         <p:nvSpPr>
-          <p:cNvPr id="171" name="Text 8"/>
+          <p:cNvPr id="236" name="Text 8"/>
           <p:cNvSpPr/>
           <p:nvPr/>
         </p:nvSpPr>
         <p:spPr>
           <a:xfrm>
             <a:off x="804600" y="3017520"/>
-            <a:ext cx="2011320" cy="273960"/>
+            <a:ext cx="2010960" cy="273600"/>
           </a:xfrm>
           <a:prstGeom prst="rect">
             <a:avLst/>
@@ -6073,14 +6252,14 @@
       </p:sp>
       <p:sp>
         <p:nvSpPr>
-          <p:cNvPr id="172" name="Text 9"/>
+          <p:cNvPr id="237" name="Text 9"/>
           <p:cNvSpPr/>
           <p:nvPr/>
         </p:nvSpPr>
         <p:spPr>
           <a:xfrm>
             <a:off x="2752200" y="2990160"/>
-            <a:ext cx="8412120" cy="282960"/>
+            <a:ext cx="8411760" cy="282600"/>
           </a:xfrm>
           <a:prstGeom prst="rect">
             <a:avLst/>
@@ -6134,14 +6313,14 @@
       </p:sp>
       <p:sp>
         <p:nvSpPr>
-          <p:cNvPr id="173" name="Text 10"/>
+          <p:cNvPr id="238" name="Text 10"/>
           <p:cNvSpPr/>
           <p:nvPr/>
         </p:nvSpPr>
         <p:spPr>
           <a:xfrm>
             <a:off x="2761560" y="3319200"/>
-            <a:ext cx="8476200" cy="383760"/>
+            <a:ext cx="8475840" cy="383400"/>
           </a:xfrm>
           <a:prstGeom prst="rect">
             <a:avLst/>
@@ -6225,14 +6404,14 @@
       </p:sp>
       <p:sp>
         <p:nvSpPr>
-          <p:cNvPr id="174" name="Shape 11"/>
+          <p:cNvPr id="239" name="Shape 11"/>
           <p:cNvSpPr/>
           <p:nvPr/>
         </p:nvSpPr>
         <p:spPr>
           <a:xfrm>
             <a:off x="631080" y="3913560"/>
-            <a:ext cx="10917720" cy="914040"/>
+            <a:ext cx="10917360" cy="913680"/>
           </a:xfrm>
           <a:prstGeom prst="roundRect">
             <a:avLst>
@@ -6247,6 +6426,8 @@
               <a:srgbClr val="f2f6fa"/>
             </a:solidFill>
             <a:round/>
+            <a:headEnd len="med" type="triangle" w="med"/>
+            <a:tailEnd len="med" type="triangle" w="med"/>
           </a:ln>
         </p:spPr>
         <p:style>
@@ -6260,6 +6441,11 @@
             <a:noAutofit/>
           </a:bodyPr>
           <a:p>
+            <a:pPr>
+              <a:lnSpc>
+                <a:spcPct val="100000"/>
+              </a:lnSpc>
+            </a:pPr>
             <a:endParaRPr b="0" lang="en-US" sz="1800" strike="noStrike" u="none">
               <a:solidFill>
                 <a:srgbClr val="000000"/>
@@ -6273,14 +6459,14 @@
       </p:sp>
       <p:sp>
         <p:nvSpPr>
-          <p:cNvPr id="175" name="Text 12"/>
+          <p:cNvPr id="240" name="Text 12"/>
           <p:cNvSpPr/>
           <p:nvPr/>
         </p:nvSpPr>
         <p:spPr>
           <a:xfrm>
             <a:off x="804600" y="4023360"/>
-            <a:ext cx="2011320" cy="273960"/>
+            <a:ext cx="2010960" cy="273600"/>
           </a:xfrm>
           <a:prstGeom prst="rect">
             <a:avLst/>
@@ -6334,14 +6520,14 @@
       </p:sp>
       <p:sp>
         <p:nvSpPr>
-          <p:cNvPr id="176" name="Text 13"/>
+          <p:cNvPr id="241" name="Text 13"/>
           <p:cNvSpPr/>
           <p:nvPr/>
         </p:nvSpPr>
         <p:spPr>
           <a:xfrm>
             <a:off x="2752200" y="3996000"/>
-            <a:ext cx="8412120" cy="282960"/>
+            <a:ext cx="8411760" cy="282600"/>
           </a:xfrm>
           <a:prstGeom prst="rect">
             <a:avLst/>
@@ -6395,14 +6581,14 @@
       </p:sp>
       <p:sp>
         <p:nvSpPr>
-          <p:cNvPr id="177" name="Text 14"/>
+          <p:cNvPr id="242" name="Text 14"/>
           <p:cNvSpPr/>
           <p:nvPr/>
         </p:nvSpPr>
         <p:spPr>
           <a:xfrm>
             <a:off x="2761560" y="4325040"/>
-            <a:ext cx="8476200" cy="383760"/>
+            <a:ext cx="8475840" cy="383400"/>
           </a:xfrm>
           <a:prstGeom prst="rect">
             <a:avLst/>
@@ -6486,14 +6672,14 @@
       </p:sp>
       <p:sp>
         <p:nvSpPr>
-          <p:cNvPr id="178" name="Shape 15"/>
+          <p:cNvPr id="243" name="Shape 15"/>
           <p:cNvSpPr/>
           <p:nvPr/>
         </p:nvSpPr>
         <p:spPr>
           <a:xfrm>
             <a:off x="631080" y="4919400"/>
-            <a:ext cx="10917720" cy="914040"/>
+            <a:ext cx="10917360" cy="913680"/>
           </a:xfrm>
           <a:prstGeom prst="roundRect">
             <a:avLst>
@@ -6508,6 +6694,8 @@
               <a:srgbClr val="edf5f8"/>
             </a:solidFill>
             <a:round/>
+            <a:headEnd len="med" type="triangle" w="med"/>
+            <a:tailEnd len="med" type="triangle" w="med"/>
           </a:ln>
         </p:spPr>
         <p:style>
@@ -6521,6 +6709,11 @@
             <a:noAutofit/>
           </a:bodyPr>
           <a:p>
+            <a:pPr>
+              <a:lnSpc>
+                <a:spcPct val="100000"/>
+              </a:lnSpc>
+            </a:pPr>
             <a:endParaRPr b="0" lang="en-US" sz="1800" strike="noStrike" u="none">
               <a:solidFill>
                 <a:srgbClr val="000000"/>
@@ -6534,14 +6727,14 @@
       </p:sp>
       <p:sp>
         <p:nvSpPr>
-          <p:cNvPr id="179" name="Text 16"/>
+          <p:cNvPr id="244" name="Text 16"/>
           <p:cNvSpPr/>
           <p:nvPr/>
         </p:nvSpPr>
         <p:spPr>
           <a:xfrm>
             <a:off x="804600" y="5029200"/>
-            <a:ext cx="2011320" cy="273960"/>
+            <a:ext cx="2010960" cy="273600"/>
           </a:xfrm>
           <a:prstGeom prst="rect">
             <a:avLst/>
@@ -6595,14 +6788,14 @@
       </p:sp>
       <p:sp>
         <p:nvSpPr>
-          <p:cNvPr id="180" name="Text 17"/>
+          <p:cNvPr id="245" name="Text 17"/>
           <p:cNvSpPr/>
           <p:nvPr/>
         </p:nvSpPr>
         <p:spPr>
           <a:xfrm>
             <a:off x="2752200" y="5001840"/>
-            <a:ext cx="8412120" cy="282960"/>
+            <a:ext cx="8411760" cy="282600"/>
           </a:xfrm>
           <a:prstGeom prst="rect">
             <a:avLst/>
@@ -6656,14 +6849,14 @@
       </p:sp>
       <p:sp>
         <p:nvSpPr>
-          <p:cNvPr id="181" name="Text 18"/>
+          <p:cNvPr id="246" name="Text 18"/>
           <p:cNvSpPr/>
           <p:nvPr/>
         </p:nvSpPr>
         <p:spPr>
           <a:xfrm>
             <a:off x="2761560" y="5330880"/>
-            <a:ext cx="8476200" cy="383760"/>
+            <a:ext cx="8475840" cy="383400"/>
           </a:xfrm>
           <a:prstGeom prst="rect">
             <a:avLst/>
@@ -6784,14 +6977,14 @@
       </p:grpSpPr>
       <p:sp>
         <p:nvSpPr>
-          <p:cNvPr id="182" name="Shape 0"/>
+          <p:cNvPr id="247" name="Shape 0"/>
           <p:cNvSpPr/>
           <p:nvPr/>
         </p:nvSpPr>
         <p:spPr>
           <a:xfrm>
             <a:off x="0" y="0"/>
-            <a:ext cx="12191400" cy="109440"/>
+            <a:ext cx="12191040" cy="109080"/>
           </a:xfrm>
           <a:prstGeom prst="rect">
             <a:avLst/>
@@ -6804,6 +6997,8 @@
               <a:srgbClr val="ee791f"/>
             </a:solidFill>
             <a:round/>
+            <a:headEnd len="med" type="triangle" w="med"/>
+            <a:tailEnd len="med" type="triangle" w="med"/>
           </a:ln>
         </p:spPr>
         <p:style>
@@ -6817,6 +7012,11 @@
             <a:noAutofit/>
           </a:bodyPr>
           <a:p>
+            <a:pPr>
+              <a:lnSpc>
+                <a:spcPct val="100000"/>
+              </a:lnSpc>
+            </a:pPr>
             <a:endParaRPr b="0" lang="en-US" sz="1800" strike="noStrike" u="none">
               <a:solidFill>
                 <a:srgbClr val="ffffff"/>
@@ -6830,14 +7030,14 @@
       </p:sp>
       <p:sp>
         <p:nvSpPr>
-          <p:cNvPr id="183" name="Text 1"/>
+          <p:cNvPr id="248" name="Text 1"/>
           <p:cNvSpPr/>
           <p:nvPr/>
         </p:nvSpPr>
         <p:spPr>
           <a:xfrm>
             <a:off x="530280" y="311040"/>
-            <a:ext cx="10881000" cy="548280"/>
+            <a:ext cx="10880640" cy="547920"/>
           </a:xfrm>
           <a:prstGeom prst="rect">
             <a:avLst/>
@@ -6891,14 +7091,14 @@
       </p:sp>
       <p:sp>
         <p:nvSpPr>
-          <p:cNvPr id="184" name="Shape 2"/>
+          <p:cNvPr id="249" name="Shape 2"/>
           <p:cNvSpPr/>
           <p:nvPr/>
         </p:nvSpPr>
         <p:spPr>
           <a:xfrm>
             <a:off x="530280" y="951120"/>
-            <a:ext cx="11100600" cy="31680"/>
+            <a:ext cx="11100240" cy="31320"/>
           </a:xfrm>
           <a:prstGeom prst="rect">
             <a:avLst/>
@@ -6911,6 +7111,8 @@
               <a:srgbClr val="ee791f"/>
             </a:solidFill>
             <a:round/>
+            <a:headEnd len="med" type="triangle" w="med"/>
+            <a:tailEnd len="med" type="triangle" w="med"/>
           </a:ln>
         </p:spPr>
         <p:style>
@@ -6924,6 +7126,11 @@
             <a:noAutofit/>
           </a:bodyPr>
           <a:p>
+            <a:pPr>
+              <a:lnSpc>
+                <a:spcPct val="100000"/>
+              </a:lnSpc>
+            </a:pPr>
             <a:endParaRPr b="0" lang="en-US" sz="1800" strike="noStrike" u="none">
               <a:solidFill>
                 <a:srgbClr val="ffffff"/>
@@ -6937,14 +7144,14 @@
       </p:sp>
       <p:sp>
         <p:nvSpPr>
-          <p:cNvPr id="185" name="Text 3"/>
+          <p:cNvPr id="250" name="Text 3"/>
           <p:cNvSpPr/>
           <p:nvPr/>
         </p:nvSpPr>
         <p:spPr>
           <a:xfrm>
             <a:off x="548640" y="6473880"/>
-            <a:ext cx="9143640" cy="200880"/>
+            <a:ext cx="9143280" cy="200520"/>
           </a:xfrm>
           <a:prstGeom prst="rect">
             <a:avLst/>
@@ -6998,14 +7205,14 @@
       </p:sp>
       <p:sp>
         <p:nvSpPr>
-          <p:cNvPr id="186" name="Text 4"/>
+          <p:cNvPr id="251" name="Text 4"/>
           <p:cNvSpPr/>
           <p:nvPr/>
         </p:nvSpPr>
         <p:spPr>
           <a:xfrm>
             <a:off x="11018520" y="6473880"/>
-            <a:ext cx="511560" cy="200880"/>
+            <a:ext cx="511200" cy="200520"/>
           </a:xfrm>
           <a:prstGeom prst="rect">
             <a:avLst/>
@@ -7059,14 +7266,14 @@
       </p:sp>
       <p:sp>
         <p:nvSpPr>
-          <p:cNvPr id="187" name="Shape 5"/>
+          <p:cNvPr id="252" name="Shape 5"/>
           <p:cNvSpPr/>
           <p:nvPr/>
         </p:nvSpPr>
         <p:spPr>
           <a:xfrm>
             <a:off x="786240" y="1454040"/>
-            <a:ext cx="77400" cy="77400"/>
+            <a:ext cx="77040" cy="77040"/>
           </a:xfrm>
           <a:prstGeom prst="roundRect">
             <a:avLst>
@@ -7081,6 +7288,8 @@
               <a:srgbClr val="ee791f"/>
             </a:solidFill>
             <a:round/>
+            <a:headEnd len="med" type="triangle" w="med"/>
+            <a:tailEnd len="med" type="triangle" w="med"/>
           </a:ln>
         </p:spPr>
         <p:style>
@@ -7094,6 +7303,11 @@
             <a:noAutofit/>
           </a:bodyPr>
           <a:p>
+            <a:pPr>
+              <a:lnSpc>
+                <a:spcPct val="100000"/>
+              </a:lnSpc>
+            </a:pPr>
             <a:endParaRPr b="0" lang="en-US" sz="1800" strike="noStrike" u="none">
               <a:solidFill>
                 <a:srgbClr val="ffffff"/>
@@ -7107,14 +7321,14 @@
       </p:sp>
       <p:sp>
         <p:nvSpPr>
-          <p:cNvPr id="188" name="Text 6"/>
+          <p:cNvPr id="253" name="Text 6"/>
           <p:cNvSpPr/>
           <p:nvPr/>
         </p:nvSpPr>
         <p:spPr>
           <a:xfrm>
             <a:off x="1033200" y="1334880"/>
-            <a:ext cx="10305000" cy="456840"/>
+            <a:ext cx="10304640" cy="456480"/>
           </a:xfrm>
           <a:prstGeom prst="rect">
             <a:avLst/>
@@ -7168,14 +7382,14 @@
       </p:sp>
       <p:sp>
         <p:nvSpPr>
-          <p:cNvPr id="189" name="Shape 7"/>
+          <p:cNvPr id="254" name="Shape 7"/>
           <p:cNvSpPr/>
           <p:nvPr/>
         </p:nvSpPr>
         <p:spPr>
           <a:xfrm>
             <a:off x="786240" y="2286000"/>
-            <a:ext cx="77400" cy="77400"/>
+            <a:ext cx="77040" cy="77040"/>
           </a:xfrm>
           <a:prstGeom prst="roundRect">
             <a:avLst>
@@ -7190,6 +7404,8 @@
               <a:srgbClr val="ee791f"/>
             </a:solidFill>
             <a:round/>
+            <a:headEnd len="med" type="triangle" w="med"/>
+            <a:tailEnd len="med" type="triangle" w="med"/>
           </a:ln>
         </p:spPr>
         <p:style>
@@ -7203,6 +7419,11 @@
             <a:noAutofit/>
           </a:bodyPr>
           <a:p>
+            <a:pPr>
+              <a:lnSpc>
+                <a:spcPct val="100000"/>
+              </a:lnSpc>
+            </a:pPr>
             <a:endParaRPr b="0" lang="en-US" sz="1800" strike="noStrike" u="none">
               <a:solidFill>
                 <a:srgbClr val="ffffff"/>
@@ -7216,14 +7437,14 @@
       </p:sp>
       <p:sp>
         <p:nvSpPr>
-          <p:cNvPr id="190" name="Text 8"/>
+          <p:cNvPr id="255" name="Text 8"/>
           <p:cNvSpPr/>
           <p:nvPr/>
         </p:nvSpPr>
         <p:spPr>
           <a:xfrm>
             <a:off x="1033200" y="2167200"/>
-            <a:ext cx="10305000" cy="456840"/>
+            <a:ext cx="10304640" cy="456480"/>
           </a:xfrm>
           <a:prstGeom prst="rect">
             <a:avLst/>
@@ -7277,14 +7498,14 @@
       </p:sp>
       <p:sp>
         <p:nvSpPr>
-          <p:cNvPr id="191" name="Shape 9"/>
+          <p:cNvPr id="256" name="Shape 9"/>
           <p:cNvSpPr/>
           <p:nvPr/>
         </p:nvSpPr>
         <p:spPr>
           <a:xfrm>
             <a:off x="786240" y="3117960"/>
-            <a:ext cx="77400" cy="77400"/>
+            <a:ext cx="77040" cy="77040"/>
           </a:xfrm>
           <a:prstGeom prst="roundRect">
             <a:avLst>
@@ -7299,6 +7520,8 @@
               <a:srgbClr val="ee791f"/>
             </a:solidFill>
             <a:round/>
+            <a:headEnd len="med" type="triangle" w="med"/>
+            <a:tailEnd len="med" type="triangle" w="med"/>
           </a:ln>
         </p:spPr>
         <p:style>
@@ -7312,6 +7535,11 @@
             <a:noAutofit/>
           </a:bodyPr>
           <a:p>
+            <a:pPr>
+              <a:lnSpc>
+                <a:spcPct val="100000"/>
+              </a:lnSpc>
+            </a:pPr>
             <a:endParaRPr b="0" lang="en-US" sz="1800" strike="noStrike" u="none">
               <a:solidFill>
                 <a:srgbClr val="ffffff"/>
@@ -7325,14 +7553,14 @@
       </p:sp>
       <p:sp>
         <p:nvSpPr>
-          <p:cNvPr id="192" name="Text 10"/>
+          <p:cNvPr id="257" name="Text 10"/>
           <p:cNvSpPr/>
           <p:nvPr/>
         </p:nvSpPr>
         <p:spPr>
           <a:xfrm>
             <a:off x="1033200" y="2999160"/>
-            <a:ext cx="10305000" cy="456840"/>
+            <a:ext cx="10304640" cy="456480"/>
           </a:xfrm>
           <a:prstGeom prst="rect">
             <a:avLst/>
@@ -7386,14 +7614,14 @@
       </p:sp>
       <p:sp>
         <p:nvSpPr>
-          <p:cNvPr id="193" name="Shape 11"/>
+          <p:cNvPr id="258" name="Shape 11"/>
           <p:cNvSpPr/>
           <p:nvPr/>
         </p:nvSpPr>
         <p:spPr>
           <a:xfrm>
             <a:off x="786240" y="3950280"/>
-            <a:ext cx="77400" cy="77400"/>
+            <a:ext cx="77040" cy="77040"/>
           </a:xfrm>
           <a:prstGeom prst="roundRect">
             <a:avLst>
@@ -7408,6 +7636,8 @@
               <a:srgbClr val="ee791f"/>
             </a:solidFill>
             <a:round/>
+            <a:headEnd len="med" type="triangle" w="med"/>
+            <a:tailEnd len="med" type="triangle" w="med"/>
           </a:ln>
         </p:spPr>
         <p:style>
@@ -7421,6 +7651,11 @@
             <a:noAutofit/>
           </a:bodyPr>
           <a:p>
+            <a:pPr>
+              <a:lnSpc>
+                <a:spcPct val="100000"/>
+              </a:lnSpc>
+            </a:pPr>
             <a:endParaRPr b="0" lang="en-US" sz="1800" strike="noStrike" u="none">
               <a:solidFill>
                 <a:srgbClr val="ffffff"/>
@@ -7434,14 +7669,14 @@
       </p:sp>
       <p:sp>
         <p:nvSpPr>
-          <p:cNvPr id="194" name="Text 12"/>
+          <p:cNvPr id="259" name="Text 12"/>
           <p:cNvSpPr/>
           <p:nvPr/>
         </p:nvSpPr>
         <p:spPr>
           <a:xfrm>
             <a:off x="1033200" y="3831480"/>
-            <a:ext cx="10305000" cy="456840"/>
+            <a:ext cx="10304640" cy="456480"/>
           </a:xfrm>
           <a:prstGeom prst="rect">
             <a:avLst/>
@@ -7495,14 +7730,14 @@
       </p:sp>
       <p:sp>
         <p:nvSpPr>
-          <p:cNvPr id="195" name="Shape 13"/>
+          <p:cNvPr id="260" name="Shape 13"/>
           <p:cNvSpPr/>
           <p:nvPr/>
         </p:nvSpPr>
         <p:spPr>
           <a:xfrm>
             <a:off x="713160" y="5230440"/>
-            <a:ext cx="10789560" cy="667080"/>
+            <a:ext cx="10789200" cy="666720"/>
           </a:xfrm>
           <a:prstGeom prst="roundRect">
             <a:avLst>
@@ -7517,6 +7752,8 @@
               <a:srgbClr val="fff1e8"/>
             </a:solidFill>
             <a:round/>
+            <a:headEnd len="med" type="triangle" w="med"/>
+            <a:tailEnd len="med" type="triangle" w="med"/>
           </a:ln>
         </p:spPr>
         <p:style>
@@ -7530,6 +7767,11 @@
             <a:noAutofit/>
           </a:bodyPr>
           <a:p>
+            <a:pPr>
+              <a:lnSpc>
+                <a:spcPct val="100000"/>
+              </a:lnSpc>
+            </a:pPr>
             <a:endParaRPr b="0" lang="en-US" sz="1800" strike="noStrike" u="none">
               <a:solidFill>
                 <a:srgbClr val="000000"/>
@@ -7543,14 +7785,14 @@
       </p:sp>
       <p:sp>
         <p:nvSpPr>
-          <p:cNvPr id="196" name="Text 14"/>
+          <p:cNvPr id="261" name="Text 14"/>
           <p:cNvSpPr/>
           <p:nvPr/>
         </p:nvSpPr>
         <p:spPr>
           <a:xfrm>
             <a:off x="923400" y="5330880"/>
-            <a:ext cx="10323360" cy="465840"/>
+            <a:ext cx="10323000" cy="465480"/>
           </a:xfrm>
           <a:prstGeom prst="rect">
             <a:avLst/>
@@ -7648,7 +7890,7 @@
         <p:spPr>
           <a:xfrm>
             <a:off x="0" y="0"/>
-            <a:ext cx="12191400" cy="109440"/>
+            <a:ext cx="12191040" cy="109080"/>
           </a:xfrm>
           <a:prstGeom prst="rect">
             <a:avLst/>
@@ -7661,6 +7903,8 @@
               <a:srgbClr val="ee791f"/>
             </a:solidFill>
             <a:round/>
+            <a:headEnd len="med" type="triangle" w="med"/>
+            <a:tailEnd len="med" type="triangle" w="med"/>
           </a:ln>
         </p:spPr>
         <p:style>
@@ -7674,6 +7918,11 @@
             <a:noAutofit/>
           </a:bodyPr>
           <a:p>
+            <a:pPr>
+              <a:lnSpc>
+                <a:spcPct val="100000"/>
+              </a:lnSpc>
+            </a:pPr>
             <a:endParaRPr b="0" lang="en-US" sz="1800" strike="noStrike" u="none">
               <a:solidFill>
                 <a:srgbClr val="ffffff"/>
@@ -7694,7 +7943,7 @@
         <p:spPr>
           <a:xfrm>
             <a:off x="530280" y="311040"/>
-            <a:ext cx="10881000" cy="548280"/>
+            <a:ext cx="10880640" cy="547920"/>
           </a:xfrm>
           <a:prstGeom prst="rect">
             <a:avLst/>
@@ -7755,7 +8004,7 @@
         <p:spPr>
           <a:xfrm>
             <a:off x="530280" y="951120"/>
-            <a:ext cx="11100600" cy="31680"/>
+            <a:ext cx="11100240" cy="31320"/>
           </a:xfrm>
           <a:prstGeom prst="rect">
             <a:avLst/>
@@ -7768,6 +8017,8 @@
               <a:srgbClr val="ee791f"/>
             </a:solidFill>
             <a:round/>
+            <a:headEnd len="med" type="triangle" w="med"/>
+            <a:tailEnd len="med" type="triangle" w="med"/>
           </a:ln>
         </p:spPr>
         <p:style>
@@ -7781,6 +8032,11 @@
             <a:noAutofit/>
           </a:bodyPr>
           <a:p>
+            <a:pPr>
+              <a:lnSpc>
+                <a:spcPct val="100000"/>
+              </a:lnSpc>
+            </a:pPr>
             <a:endParaRPr b="0" lang="en-US" sz="1800" strike="noStrike" u="none">
               <a:solidFill>
                 <a:srgbClr val="ffffff"/>
@@ -7801,7 +8057,7 @@
         <p:spPr>
           <a:xfrm>
             <a:off x="548640" y="6473880"/>
-            <a:ext cx="9143640" cy="200880"/>
+            <a:ext cx="9143280" cy="200520"/>
           </a:xfrm>
           <a:prstGeom prst="rect">
             <a:avLst/>
@@ -7862,7 +8118,7 @@
         <p:spPr>
           <a:xfrm>
             <a:off x="11018520" y="6473880"/>
-            <a:ext cx="511560" cy="200880"/>
+            <a:ext cx="511200" cy="200520"/>
           </a:xfrm>
           <a:prstGeom prst="rect">
             <a:avLst/>
@@ -7923,7 +8179,7 @@
         <p:spPr>
           <a:xfrm>
             <a:off x="530280" y="1545480"/>
-            <a:ext cx="2075400" cy="3291480"/>
+            <a:ext cx="2075040" cy="3291120"/>
           </a:xfrm>
           <a:prstGeom prst="roundRect">
             <a:avLst>
@@ -7938,6 +8194,8 @@
               <a:srgbClr val="eaf3f7"/>
             </a:solidFill>
             <a:round/>
+            <a:headEnd len="med" type="triangle" w="med"/>
+            <a:tailEnd len="med" type="triangle" w="med"/>
           </a:ln>
         </p:spPr>
         <p:style>
@@ -7951,6 +8209,11 @@
             <a:noAutofit/>
           </a:bodyPr>
           <a:p>
+            <a:pPr>
+              <a:lnSpc>
+                <a:spcPct val="100000"/>
+              </a:lnSpc>
+            </a:pPr>
             <a:endParaRPr b="0" lang="en-US" sz="1800" strike="noStrike" u="none">
               <a:solidFill>
                 <a:srgbClr val="000000"/>
@@ -7971,7 +8234,7 @@
         <p:spPr>
           <a:xfrm>
             <a:off x="713160" y="1801440"/>
-            <a:ext cx="1371240" cy="630720"/>
+            <a:ext cx="1370880" cy="630360"/>
           </a:xfrm>
           <a:prstGeom prst="rect">
             <a:avLst/>
@@ -8032,7 +8295,7 @@
         <p:spPr>
           <a:xfrm>
             <a:off x="685800" y="2679120"/>
-            <a:ext cx="1810080" cy="383760"/>
+            <a:ext cx="1809720" cy="383400"/>
           </a:xfrm>
           <a:prstGeom prst="rect">
             <a:avLst/>
@@ -8093,7 +8356,7 @@
         <p:spPr>
           <a:xfrm>
             <a:off x="685800" y="3264480"/>
-            <a:ext cx="1773720" cy="959760"/>
+            <a:ext cx="1773360" cy="959400"/>
           </a:xfrm>
           <a:prstGeom prst="rect">
             <a:avLst/>
@@ -8154,7 +8417,7 @@
         <p:spPr>
           <a:xfrm>
             <a:off x="2853000" y="1545480"/>
-            <a:ext cx="2075400" cy="3291480"/>
+            <a:ext cx="2075040" cy="3291120"/>
           </a:xfrm>
           <a:prstGeom prst="roundRect">
             <a:avLst>
@@ -8169,6 +8432,8 @@
               <a:srgbClr val="f2f6fa"/>
             </a:solidFill>
             <a:round/>
+            <a:headEnd len="med" type="triangle" w="med"/>
+            <a:tailEnd len="med" type="triangle" w="med"/>
           </a:ln>
         </p:spPr>
         <p:style>
@@ -8182,6 +8447,11 @@
             <a:noAutofit/>
           </a:bodyPr>
           <a:p>
+            <a:pPr>
+              <a:lnSpc>
+                <a:spcPct val="100000"/>
+              </a:lnSpc>
+            </a:pPr>
             <a:endParaRPr b="0" lang="en-US" sz="1800" strike="noStrike" u="none">
               <a:solidFill>
                 <a:srgbClr val="000000"/>
@@ -8202,7 +8472,7 @@
         <p:spPr>
           <a:xfrm>
             <a:off x="3035880" y="1801440"/>
-            <a:ext cx="1371240" cy="630720"/>
+            <a:ext cx="1370880" cy="630360"/>
           </a:xfrm>
           <a:prstGeom prst="rect">
             <a:avLst/>
@@ -8263,7 +8533,7 @@
         <p:spPr>
           <a:xfrm>
             <a:off x="3008520" y="2679120"/>
-            <a:ext cx="1810080" cy="383760"/>
+            <a:ext cx="1809720" cy="383400"/>
           </a:xfrm>
           <a:prstGeom prst="rect">
             <a:avLst/>
@@ -8324,7 +8594,7 @@
         <p:spPr>
           <a:xfrm>
             <a:off x="3008520" y="3264480"/>
-            <a:ext cx="1773720" cy="959760"/>
+            <a:ext cx="1773360" cy="959400"/>
           </a:xfrm>
           <a:prstGeom prst="rect">
             <a:avLst/>
@@ -8385,7 +8655,7 @@
         <p:spPr>
           <a:xfrm>
             <a:off x="5175360" y="1545480"/>
-            <a:ext cx="2075400" cy="3291480"/>
+            <a:ext cx="2075040" cy="3291120"/>
           </a:xfrm>
           <a:prstGeom prst="roundRect">
             <a:avLst>
@@ -8400,6 +8670,8 @@
               <a:srgbClr val="eaf3f7"/>
             </a:solidFill>
             <a:round/>
+            <a:headEnd len="med" type="triangle" w="med"/>
+            <a:tailEnd len="med" type="triangle" w="med"/>
           </a:ln>
         </p:spPr>
         <p:style>
@@ -8413,6 +8685,11 @@
             <a:noAutofit/>
           </a:bodyPr>
           <a:p>
+            <a:pPr>
+              <a:lnSpc>
+                <a:spcPct val="100000"/>
+              </a:lnSpc>
+            </a:pPr>
             <a:endParaRPr b="0" lang="en-US" sz="1800" strike="noStrike" u="none">
               <a:solidFill>
                 <a:srgbClr val="000000"/>
@@ -8433,7 +8710,7 @@
         <p:spPr>
           <a:xfrm>
             <a:off x="5358240" y="1801440"/>
-            <a:ext cx="1371240" cy="630720"/>
+            <a:ext cx="1370880" cy="630360"/>
           </a:xfrm>
           <a:prstGeom prst="rect">
             <a:avLst/>
@@ -8494,7 +8771,7 @@
         <p:spPr>
           <a:xfrm>
             <a:off x="5330880" y="2679120"/>
-            <a:ext cx="1810080" cy="383760"/>
+            <a:ext cx="1809720" cy="383400"/>
           </a:xfrm>
           <a:prstGeom prst="rect">
             <a:avLst/>
@@ -8555,7 +8832,7 @@
         <p:spPr>
           <a:xfrm>
             <a:off x="5330880" y="3264480"/>
-            <a:ext cx="1773720" cy="959760"/>
+            <a:ext cx="1773360" cy="959400"/>
           </a:xfrm>
           <a:prstGeom prst="rect">
             <a:avLst/>
@@ -8616,7 +8893,7 @@
         <p:spPr>
           <a:xfrm>
             <a:off x="7498080" y="1545480"/>
-            <a:ext cx="2075400" cy="3291480"/>
+            <a:ext cx="2075040" cy="3291120"/>
           </a:xfrm>
           <a:prstGeom prst="roundRect">
             <a:avLst>
@@ -8631,6 +8908,8 @@
               <a:srgbClr val="f2f6fa"/>
             </a:solidFill>
             <a:round/>
+            <a:headEnd len="med" type="triangle" w="med"/>
+            <a:tailEnd len="med" type="triangle" w="med"/>
           </a:ln>
         </p:spPr>
         <p:style>
@@ -8644,6 +8923,11 @@
             <a:noAutofit/>
           </a:bodyPr>
           <a:p>
+            <a:pPr>
+              <a:lnSpc>
+                <a:spcPct val="100000"/>
+              </a:lnSpc>
+            </a:pPr>
             <a:endParaRPr b="0" lang="en-US" sz="1800" strike="noStrike" u="none">
               <a:solidFill>
                 <a:srgbClr val="000000"/>
@@ -8664,7 +8948,7 @@
         <p:spPr>
           <a:xfrm>
             <a:off x="7680960" y="1801440"/>
-            <a:ext cx="1371240" cy="630720"/>
+            <a:ext cx="1370880" cy="630360"/>
           </a:xfrm>
           <a:prstGeom prst="rect">
             <a:avLst/>
@@ -8725,7 +9009,7 @@
         <p:spPr>
           <a:xfrm>
             <a:off x="7653600" y="2679120"/>
-            <a:ext cx="1810080" cy="383760"/>
+            <a:ext cx="1809720" cy="383400"/>
           </a:xfrm>
           <a:prstGeom prst="rect">
             <a:avLst/>
@@ -8786,7 +9070,7 @@
         <p:spPr>
           <a:xfrm>
             <a:off x="7653600" y="3264480"/>
-            <a:ext cx="1773720" cy="959760"/>
+            <a:ext cx="1773360" cy="959400"/>
           </a:xfrm>
           <a:prstGeom prst="rect">
             <a:avLst/>
@@ -8847,7 +9131,7 @@
         <p:spPr>
           <a:xfrm>
             <a:off x="9820800" y="1545480"/>
-            <a:ext cx="2075400" cy="3291480"/>
+            <a:ext cx="2075040" cy="3291120"/>
           </a:xfrm>
           <a:prstGeom prst="roundRect">
             <a:avLst>
@@ -8862,6 +9146,8 @@
               <a:srgbClr val="eaf3f7"/>
             </a:solidFill>
             <a:round/>
+            <a:headEnd len="med" type="triangle" w="med"/>
+            <a:tailEnd len="med" type="triangle" w="med"/>
           </a:ln>
         </p:spPr>
         <p:style>
@@ -8875,6 +9161,11 @@
             <a:noAutofit/>
           </a:bodyPr>
           <a:p>
+            <a:pPr>
+              <a:lnSpc>
+                <a:spcPct val="100000"/>
+              </a:lnSpc>
+            </a:pPr>
             <a:endParaRPr b="0" lang="en-US" sz="1800" strike="noStrike" u="none">
               <a:solidFill>
                 <a:srgbClr val="000000"/>
@@ -8895,7 +9186,7 @@
         <p:spPr>
           <a:xfrm>
             <a:off x="10003680" y="1801440"/>
-            <a:ext cx="1371240" cy="630720"/>
+            <a:ext cx="1370880" cy="630360"/>
           </a:xfrm>
           <a:prstGeom prst="rect">
             <a:avLst/>
@@ -8956,7 +9247,7 @@
         <p:spPr>
           <a:xfrm>
             <a:off x="9975960" y="2679120"/>
-            <a:ext cx="1810080" cy="383760"/>
+            <a:ext cx="1809720" cy="383400"/>
           </a:xfrm>
           <a:prstGeom prst="rect">
             <a:avLst/>
@@ -9017,7 +9308,7 @@
         <p:spPr>
           <a:xfrm>
             <a:off x="9975960" y="3264480"/>
-            <a:ext cx="1773720" cy="959760"/>
+            <a:ext cx="1773360" cy="959400"/>
           </a:xfrm>
           <a:prstGeom prst="rect">
             <a:avLst/>
@@ -9078,7 +9369,7 @@
         <p:spPr>
           <a:xfrm>
             <a:off x="713160" y="5358240"/>
-            <a:ext cx="10789560" cy="502560"/>
+            <a:ext cx="10789200" cy="502200"/>
           </a:xfrm>
           <a:prstGeom prst="rect">
             <a:avLst/>
@@ -9176,7 +9467,7 @@
         <p:spPr>
           <a:xfrm>
             <a:off x="0" y="0"/>
-            <a:ext cx="12191400" cy="109440"/>
+            <a:ext cx="12191040" cy="109080"/>
           </a:xfrm>
           <a:prstGeom prst="rect">
             <a:avLst/>
@@ -9189,6 +9480,8 @@
               <a:srgbClr val="ee791f"/>
             </a:solidFill>
             <a:round/>
+            <a:headEnd len="med" type="triangle" w="med"/>
+            <a:tailEnd len="med" type="triangle" w="med"/>
           </a:ln>
         </p:spPr>
         <p:style>
@@ -9202,6 +9495,11 @@
             <a:noAutofit/>
           </a:bodyPr>
           <a:p>
+            <a:pPr>
+              <a:lnSpc>
+                <a:spcPct val="100000"/>
+              </a:lnSpc>
+            </a:pPr>
             <a:endParaRPr b="0" lang="en-US" sz="1800" strike="noStrike" u="none">
               <a:solidFill>
                 <a:srgbClr val="ffffff"/>
@@ -9222,7 +9520,7 @@
         <p:spPr>
           <a:xfrm>
             <a:off x="530280" y="311040"/>
-            <a:ext cx="10881000" cy="548280"/>
+            <a:ext cx="10880640" cy="547920"/>
           </a:xfrm>
           <a:prstGeom prst="rect">
             <a:avLst/>
@@ -9283,7 +9581,7 @@
         <p:spPr>
           <a:xfrm>
             <a:off x="530280" y="951120"/>
-            <a:ext cx="11100600" cy="31680"/>
+            <a:ext cx="11100240" cy="31320"/>
           </a:xfrm>
           <a:prstGeom prst="rect">
             <a:avLst/>
@@ -9296,6 +9594,8 @@
               <a:srgbClr val="ee791f"/>
             </a:solidFill>
             <a:round/>
+            <a:headEnd len="med" type="triangle" w="med"/>
+            <a:tailEnd len="med" type="triangle" w="med"/>
           </a:ln>
         </p:spPr>
         <p:style>
@@ -9309,6 +9609,11 @@
             <a:noAutofit/>
           </a:bodyPr>
           <a:p>
+            <a:pPr>
+              <a:lnSpc>
+                <a:spcPct val="100000"/>
+              </a:lnSpc>
+            </a:pPr>
             <a:endParaRPr b="0" lang="en-US" sz="1800" strike="noStrike" u="none">
               <a:solidFill>
                 <a:srgbClr val="ffffff"/>
@@ -9329,7 +9634,7 @@
         <p:spPr>
           <a:xfrm>
             <a:off x="548640" y="6473880"/>
-            <a:ext cx="9143640" cy="200880"/>
+            <a:ext cx="9143280" cy="200520"/>
           </a:xfrm>
           <a:prstGeom prst="rect">
             <a:avLst/>
@@ -9390,7 +9695,7 @@
         <p:spPr>
           <a:xfrm>
             <a:off x="11018520" y="6473880"/>
-            <a:ext cx="511560" cy="200880"/>
+            <a:ext cx="511200" cy="200520"/>
           </a:xfrm>
           <a:prstGeom prst="rect">
             <a:avLst/>
@@ -9451,7 +9756,7 @@
         <p:spPr>
           <a:xfrm>
             <a:off x="640080" y="1325880"/>
-            <a:ext cx="10881000" cy="1032840"/>
+            <a:ext cx="10880640" cy="1032480"/>
           </a:xfrm>
           <a:prstGeom prst="roundRect">
             <a:avLst>
@@ -9466,6 +9771,8 @@
               <a:srgbClr val="11233b"/>
             </a:solidFill>
             <a:round/>
+            <a:headEnd len="med" type="triangle" w="med"/>
+            <a:tailEnd len="med" type="triangle" w="med"/>
           </a:ln>
         </p:spPr>
         <p:style>
@@ -9479,6 +9786,11 @@
             <a:noAutofit/>
           </a:bodyPr>
           <a:p>
+            <a:pPr>
+              <a:lnSpc>
+                <a:spcPct val="100000"/>
+              </a:lnSpc>
+            </a:pPr>
             <a:endParaRPr b="0" lang="en-US" sz="1800" strike="noStrike" u="none">
               <a:solidFill>
                 <a:srgbClr val="ffffff"/>
@@ -9499,7 +9811,7 @@
         <p:spPr>
           <a:xfrm>
             <a:off x="822960" y="1435680"/>
-            <a:ext cx="10533600" cy="849960"/>
+            <a:ext cx="10533240" cy="849600"/>
           </a:xfrm>
           <a:prstGeom prst="rect">
             <a:avLst/>
@@ -9590,7 +9902,7 @@
         <p:spPr>
           <a:xfrm>
             <a:off x="713160" y="2761560"/>
-            <a:ext cx="5166000" cy="2395440"/>
+            <a:ext cx="5165640" cy="2395080"/>
           </a:xfrm>
           <a:prstGeom prst="roundRect">
             <a:avLst>
@@ -9605,6 +9917,8 @@
               <a:srgbClr val="f2f6fa"/>
             </a:solidFill>
             <a:round/>
+            <a:headEnd len="med" type="triangle" w="med"/>
+            <a:tailEnd len="med" type="triangle" w="med"/>
           </a:ln>
         </p:spPr>
         <p:style>
@@ -9618,6 +9932,11 @@
             <a:noAutofit/>
           </a:bodyPr>
           <a:p>
+            <a:pPr>
+              <a:lnSpc>
+                <a:spcPct val="100000"/>
+              </a:lnSpc>
+            </a:pPr>
             <a:endParaRPr b="0" lang="en-US" sz="1800" strike="noStrike" u="none">
               <a:solidFill>
                 <a:srgbClr val="000000"/>
@@ -9638,7 +9957,7 @@
         <p:spPr>
           <a:xfrm>
             <a:off x="6272640" y="2761560"/>
-            <a:ext cx="5166000" cy="2395440"/>
+            <a:ext cx="5165640" cy="2395080"/>
           </a:xfrm>
           <a:prstGeom prst="roundRect">
             <a:avLst>
@@ -9653,6 +9972,8 @@
               <a:srgbClr val="f2f6fa"/>
             </a:solidFill>
             <a:round/>
+            <a:headEnd len="med" type="triangle" w="med"/>
+            <a:tailEnd len="med" type="triangle" w="med"/>
           </a:ln>
         </p:spPr>
         <p:style>
@@ -9666,6 +9987,11 @@
             <a:noAutofit/>
           </a:bodyPr>
           <a:p>
+            <a:pPr>
+              <a:lnSpc>
+                <a:spcPct val="100000"/>
+              </a:lnSpc>
+            </a:pPr>
             <a:endParaRPr b="0" lang="en-US" sz="1800" strike="noStrike" u="none">
               <a:solidFill>
                 <a:srgbClr val="000000"/>
@@ -9686,7 +10012,7 @@
         <p:spPr>
           <a:xfrm>
             <a:off x="951120" y="3072240"/>
-            <a:ext cx="4663080" cy="429480"/>
+            <a:ext cx="4662720" cy="429120"/>
           </a:xfrm>
           <a:prstGeom prst="rect">
             <a:avLst/>
@@ -9747,7 +10073,7 @@
         <p:spPr>
           <a:xfrm>
             <a:off x="951120" y="3694320"/>
-            <a:ext cx="4681440" cy="1005480"/>
+            <a:ext cx="4681080" cy="1005120"/>
           </a:xfrm>
           <a:prstGeom prst="rect">
             <a:avLst/>
@@ -9868,7 +10194,7 @@
         <p:spPr>
           <a:xfrm>
             <a:off x="6492240" y="3072240"/>
-            <a:ext cx="4663080" cy="429480"/>
+            <a:ext cx="4662720" cy="429120"/>
           </a:xfrm>
           <a:prstGeom prst="rect">
             <a:avLst/>
@@ -9929,7 +10255,7 @@
         <p:spPr>
           <a:xfrm>
             <a:off x="6492240" y="3694320"/>
-            <a:ext cx="4699800" cy="1005480"/>
+            <a:ext cx="4699440" cy="1005120"/>
           </a:xfrm>
           <a:prstGeom prst="rect">
             <a:avLst/>
@@ -10050,7 +10376,7 @@
         <p:spPr>
           <a:xfrm>
             <a:off x="749880" y="5532120"/>
-            <a:ext cx="10058040" cy="347040"/>
+            <a:ext cx="10057680" cy="346680"/>
           </a:xfrm>
           <a:prstGeom prst="rect">
             <a:avLst/>
@@ -10148,7 +10474,7 @@
         <p:spPr>
           <a:xfrm>
             <a:off x="0" y="0"/>
-            <a:ext cx="12191400" cy="109440"/>
+            <a:ext cx="12191040" cy="109080"/>
           </a:xfrm>
           <a:prstGeom prst="rect">
             <a:avLst/>
@@ -10161,6 +10487,8 @@
               <a:srgbClr val="ee791f"/>
             </a:solidFill>
             <a:round/>
+            <a:headEnd len="med" type="triangle" w="med"/>
+            <a:tailEnd len="med" type="triangle" w="med"/>
           </a:ln>
         </p:spPr>
         <p:style>
@@ -10174,6 +10502,11 @@
             <a:noAutofit/>
           </a:bodyPr>
           <a:p>
+            <a:pPr>
+              <a:lnSpc>
+                <a:spcPct val="100000"/>
+              </a:lnSpc>
+            </a:pPr>
             <a:endParaRPr b="0" lang="en-US" sz="1800" strike="noStrike" u="none">
               <a:solidFill>
                 <a:srgbClr val="ffffff"/>
@@ -10194,7 +10527,7 @@
         <p:spPr>
           <a:xfrm>
             <a:off x="530280" y="311040"/>
-            <a:ext cx="10881000" cy="548280"/>
+            <a:ext cx="10880640" cy="547920"/>
           </a:xfrm>
           <a:prstGeom prst="rect">
             <a:avLst/>
@@ -10255,7 +10588,7 @@
         <p:spPr>
           <a:xfrm>
             <a:off x="530280" y="951120"/>
-            <a:ext cx="11100600" cy="31680"/>
+            <a:ext cx="11100240" cy="31320"/>
           </a:xfrm>
           <a:prstGeom prst="rect">
             <a:avLst/>
@@ -10268,6 +10601,8 @@
               <a:srgbClr val="ee791f"/>
             </a:solidFill>
             <a:round/>
+            <a:headEnd len="med" type="triangle" w="med"/>
+            <a:tailEnd len="med" type="triangle" w="med"/>
           </a:ln>
         </p:spPr>
         <p:style>
@@ -10281,6 +10616,11 @@
             <a:noAutofit/>
           </a:bodyPr>
           <a:p>
+            <a:pPr>
+              <a:lnSpc>
+                <a:spcPct val="100000"/>
+              </a:lnSpc>
+            </a:pPr>
             <a:endParaRPr b="0" lang="en-US" sz="1800" strike="noStrike" u="none">
               <a:solidFill>
                 <a:srgbClr val="ffffff"/>
@@ -10301,7 +10641,7 @@
         <p:spPr>
           <a:xfrm>
             <a:off x="548640" y="6473880"/>
-            <a:ext cx="9143640" cy="200880"/>
+            <a:ext cx="9143280" cy="200520"/>
           </a:xfrm>
           <a:prstGeom prst="rect">
             <a:avLst/>
@@ -10362,7 +10702,7 @@
         <p:spPr>
           <a:xfrm>
             <a:off x="11018520" y="6473880"/>
-            <a:ext cx="511560" cy="200880"/>
+            <a:ext cx="511200" cy="200520"/>
           </a:xfrm>
           <a:prstGeom prst="rect">
             <a:avLst/>
@@ -10423,7 +10763,7 @@
         <p:spPr>
           <a:xfrm>
             <a:off x="567000" y="1042560"/>
-            <a:ext cx="11063880" cy="383760"/>
+            <a:ext cx="11063520" cy="383400"/>
           </a:xfrm>
           <a:prstGeom prst="rect">
             <a:avLst/>
@@ -10484,7 +10824,7 @@
         <p:spPr>
           <a:xfrm>
             <a:off x="457200" y="1600200"/>
-            <a:ext cx="3035520" cy="3218400"/>
+            <a:ext cx="3035160" cy="3218040"/>
           </a:xfrm>
           <a:prstGeom prst="roundRect">
             <a:avLst>
@@ -10499,6 +10839,8 @@
               <a:srgbClr val="eaf4fa"/>
             </a:solidFill>
             <a:round/>
+            <a:headEnd len="med" type="triangle" w="med"/>
+            <a:tailEnd len="med" type="triangle" w="med"/>
           </a:ln>
         </p:spPr>
         <p:style>
@@ -10512,6 +10854,11 @@
             <a:noAutofit/>
           </a:bodyPr>
           <a:p>
+            <a:pPr>
+              <a:lnSpc>
+                <a:spcPct val="100000"/>
+              </a:lnSpc>
+            </a:pPr>
             <a:endParaRPr b="0" lang="en-US" sz="1800" strike="noStrike" u="none">
               <a:solidFill>
                 <a:srgbClr val="000000"/>
@@ -10532,7 +10879,7 @@
         <p:spPr>
           <a:xfrm>
             <a:off x="567000" y="1719000"/>
-            <a:ext cx="2815920" cy="292320"/>
+            <a:ext cx="2815560" cy="291960"/>
           </a:xfrm>
           <a:prstGeom prst="rect">
             <a:avLst/>
@@ -10593,7 +10940,7 @@
         <p:spPr>
           <a:xfrm>
             <a:off x="3740040" y="1600200"/>
-            <a:ext cx="2148480" cy="3218400"/>
+            <a:ext cx="2148120" cy="3218040"/>
           </a:xfrm>
           <a:prstGeom prst="roundRect">
             <a:avLst>
@@ -10608,6 +10955,8 @@
               <a:srgbClr val="fef1e8"/>
             </a:solidFill>
             <a:round/>
+            <a:headEnd len="med" type="triangle" w="med"/>
+            <a:tailEnd len="med" type="triangle" w="med"/>
           </a:ln>
         </p:spPr>
         <p:style>
@@ -10621,6 +10970,11 @@
             <a:noAutofit/>
           </a:bodyPr>
           <a:p>
+            <a:pPr>
+              <a:lnSpc>
+                <a:spcPct val="100000"/>
+              </a:lnSpc>
+            </a:pPr>
             <a:endParaRPr b="0" lang="en-US" sz="1800" strike="noStrike" u="none">
               <a:solidFill>
                 <a:srgbClr val="000000"/>
@@ -10641,7 +10995,7 @@
         <p:spPr>
           <a:xfrm>
             <a:off x="3849480" y="1719000"/>
-            <a:ext cx="1928880" cy="292320"/>
+            <a:ext cx="1928520" cy="291960"/>
           </a:xfrm>
           <a:prstGeom prst="rect">
             <a:avLst/>
@@ -10702,7 +11056,7 @@
         <p:spPr>
           <a:xfrm>
             <a:off x="6144840" y="1600200"/>
-            <a:ext cx="2541600" cy="3218400"/>
+            <a:ext cx="2541240" cy="3218040"/>
           </a:xfrm>
           <a:prstGeom prst="roundRect">
             <a:avLst>
@@ -10717,6 +11071,8 @@
               <a:srgbClr val="eaf4fa"/>
             </a:solidFill>
             <a:round/>
+            <a:headEnd len="med" type="triangle" w="med"/>
+            <a:tailEnd len="med" type="triangle" w="med"/>
           </a:ln>
         </p:spPr>
         <p:style>
@@ -10730,6 +11086,11 @@
             <a:noAutofit/>
           </a:bodyPr>
           <a:p>
+            <a:pPr>
+              <a:lnSpc>
+                <a:spcPct val="100000"/>
+              </a:lnSpc>
+            </a:pPr>
             <a:endParaRPr b="0" lang="en-US" sz="1800" strike="noStrike" u="none">
               <a:solidFill>
                 <a:srgbClr val="000000"/>
@@ -10750,7 +11111,7 @@
         <p:spPr>
           <a:xfrm>
             <a:off x="6254640" y="1719000"/>
-            <a:ext cx="2322360" cy="292320"/>
+            <a:ext cx="2322000" cy="291960"/>
           </a:xfrm>
           <a:prstGeom prst="rect">
             <a:avLst/>
@@ -10811,7 +11172,7 @@
         <p:spPr>
           <a:xfrm>
             <a:off x="8924400" y="1600200"/>
-            <a:ext cx="2815920" cy="3218400"/>
+            <a:ext cx="2815560" cy="3218040"/>
           </a:xfrm>
           <a:prstGeom prst="roundRect">
             <a:avLst>
@@ -10826,6 +11187,8 @@
               <a:srgbClr val="e8f5f1"/>
             </a:solidFill>
             <a:round/>
+            <a:headEnd len="med" type="triangle" w="med"/>
+            <a:tailEnd len="med" type="triangle" w="med"/>
           </a:ln>
         </p:spPr>
         <p:style>
@@ -10839,6 +11202,11 @@
             <a:noAutofit/>
           </a:bodyPr>
           <a:p>
+            <a:pPr>
+              <a:lnSpc>
+                <a:spcPct val="100000"/>
+              </a:lnSpc>
+            </a:pPr>
             <a:endParaRPr b="0" lang="en-US" sz="1800" strike="noStrike" u="none">
               <a:solidFill>
                 <a:srgbClr val="000000"/>
@@ -10859,7 +11227,7 @@
         <p:spPr>
           <a:xfrm>
             <a:off x="9034200" y="1719000"/>
-            <a:ext cx="2596680" cy="292320"/>
+            <a:ext cx="2596320" cy="291960"/>
           </a:xfrm>
           <a:prstGeom prst="rect">
             <a:avLst/>
@@ -10920,7 +11288,7 @@
         <p:spPr>
           <a:xfrm>
             <a:off x="667440" y="2139840"/>
-            <a:ext cx="1142640" cy="475200"/>
+            <a:ext cx="1142280" cy="474840"/>
           </a:xfrm>
           <a:prstGeom prst="roundRect">
             <a:avLst>
@@ -10935,6 +11303,8 @@
               <a:srgbClr val="d8e0e5"/>
             </a:solidFill>
             <a:round/>
+            <a:headEnd len="med" type="triangle" w="med"/>
+            <a:tailEnd len="med" type="triangle" w="med"/>
           </a:ln>
         </p:spPr>
         <p:style>
@@ -10948,6 +11318,11 @@
             <a:noAutofit/>
           </a:bodyPr>
           <a:p>
+            <a:pPr>
+              <a:lnSpc>
+                <a:spcPct val="100000"/>
+              </a:lnSpc>
+            </a:pPr>
             <a:endParaRPr b="0" lang="en-US" sz="1800" strike="noStrike" u="none">
               <a:solidFill>
                 <a:srgbClr val="000000"/>
@@ -10968,7 +11343,7 @@
         <p:spPr>
           <a:xfrm>
             <a:off x="740520" y="2167200"/>
-            <a:ext cx="996480" cy="411120"/>
+            <a:ext cx="996120" cy="410760"/>
           </a:xfrm>
           <a:prstGeom prst="rect">
             <a:avLst/>
@@ -11029,7 +11404,7 @@
         <p:spPr>
           <a:xfrm>
             <a:off x="1993320" y="2139840"/>
-            <a:ext cx="1179360" cy="475200"/>
+            <a:ext cx="1179000" cy="474840"/>
           </a:xfrm>
           <a:prstGeom prst="roundRect">
             <a:avLst>
@@ -11044,6 +11419,8 @@
               <a:srgbClr val="d8e0e5"/>
             </a:solidFill>
             <a:round/>
+            <a:headEnd len="med" type="triangle" w="med"/>
+            <a:tailEnd len="med" type="triangle" w="med"/>
           </a:ln>
         </p:spPr>
         <p:style>
@@ -11057,6 +11434,11 @@
             <a:noAutofit/>
           </a:bodyPr>
           <a:p>
+            <a:pPr>
+              <a:lnSpc>
+                <a:spcPct val="100000"/>
+              </a:lnSpc>
+            </a:pPr>
             <a:endParaRPr b="0" lang="en-US" sz="1800" strike="noStrike" u="none">
               <a:solidFill>
                 <a:srgbClr val="000000"/>
@@ -11077,7 +11459,7 @@
         <p:spPr>
           <a:xfrm>
             <a:off x="2066400" y="2167200"/>
-            <a:ext cx="1032840" cy="411120"/>
+            <a:ext cx="1032480" cy="410760"/>
           </a:xfrm>
           <a:prstGeom prst="rect">
             <a:avLst/>
@@ -11138,7 +11520,7 @@
         <p:spPr>
           <a:xfrm>
             <a:off x="667440" y="2761560"/>
-            <a:ext cx="1142640" cy="475200"/>
+            <a:ext cx="1142280" cy="474840"/>
           </a:xfrm>
           <a:prstGeom prst="roundRect">
             <a:avLst>
@@ -11153,6 +11535,8 @@
               <a:srgbClr val="d8e0e5"/>
             </a:solidFill>
             <a:round/>
+            <a:headEnd len="med" type="triangle" w="med"/>
+            <a:tailEnd len="med" type="triangle" w="med"/>
           </a:ln>
         </p:spPr>
         <p:style>
@@ -11166,6 +11550,11 @@
             <a:noAutofit/>
           </a:bodyPr>
           <a:p>
+            <a:pPr>
+              <a:lnSpc>
+                <a:spcPct val="100000"/>
+              </a:lnSpc>
+            </a:pPr>
             <a:endParaRPr b="0" lang="en-US" sz="1800" strike="noStrike" u="none">
               <a:solidFill>
                 <a:srgbClr val="000000"/>
@@ -11186,7 +11575,7 @@
         <p:spPr>
           <a:xfrm>
             <a:off x="740520" y="2788920"/>
-            <a:ext cx="996480" cy="411120"/>
+            <a:ext cx="996120" cy="410760"/>
           </a:xfrm>
           <a:prstGeom prst="rect">
             <a:avLst/>
@@ -11247,7 +11636,7 @@
         <p:spPr>
           <a:xfrm>
             <a:off x="1993320" y="2761560"/>
-            <a:ext cx="1179360" cy="475200"/>
+            <a:ext cx="1179000" cy="474840"/>
           </a:xfrm>
           <a:prstGeom prst="roundRect">
             <a:avLst>
@@ -11262,6 +11651,8 @@
               <a:srgbClr val="d8e0e5"/>
             </a:solidFill>
             <a:round/>
+            <a:headEnd len="med" type="triangle" w="med"/>
+            <a:tailEnd len="med" type="triangle" w="med"/>
           </a:ln>
         </p:spPr>
         <p:style>
@@ -11275,6 +11666,11 @@
             <a:noAutofit/>
           </a:bodyPr>
           <a:p>
+            <a:pPr>
+              <a:lnSpc>
+                <a:spcPct val="100000"/>
+              </a:lnSpc>
+            </a:pPr>
             <a:endParaRPr b="0" lang="en-US" sz="1800" strike="noStrike" u="none">
               <a:solidFill>
                 <a:srgbClr val="000000"/>
@@ -11295,7 +11691,7 @@
         <p:spPr>
           <a:xfrm>
             <a:off x="2066400" y="2788920"/>
-            <a:ext cx="1032840" cy="411120"/>
+            <a:ext cx="1032480" cy="410760"/>
           </a:xfrm>
           <a:prstGeom prst="rect">
             <a:avLst/>
@@ -11356,7 +11752,7 @@
         <p:spPr>
           <a:xfrm>
             <a:off x="1298520" y="3465720"/>
-            <a:ext cx="1352880" cy="585000"/>
+            <a:ext cx="1352520" cy="584640"/>
           </a:xfrm>
           <a:prstGeom prst="roundRect">
             <a:avLst>
@@ -11371,6 +11767,8 @@
               <a:srgbClr val="d8e0e5"/>
             </a:solidFill>
             <a:round/>
+            <a:headEnd len="med" type="triangle" w="med"/>
+            <a:tailEnd len="med" type="triangle" w="med"/>
           </a:ln>
         </p:spPr>
         <p:style>
@@ -11384,6 +11782,11 @@
             <a:noAutofit/>
           </a:bodyPr>
           <a:p>
+            <a:pPr>
+              <a:lnSpc>
+                <a:spcPct val="100000"/>
+              </a:lnSpc>
+            </a:pPr>
             <a:endParaRPr b="0" lang="en-US" sz="1800" strike="noStrike" u="none">
               <a:solidFill>
                 <a:srgbClr val="000000"/>
@@ -11404,7 +11807,7 @@
         <p:spPr>
           <a:xfrm>
             <a:off x="1371600" y="3493080"/>
-            <a:ext cx="1206720" cy="520920"/>
+            <a:ext cx="1206360" cy="520560"/>
           </a:xfrm>
           <a:prstGeom prst="rect">
             <a:avLst/>
@@ -11465,7 +11868,7 @@
         <p:spPr>
           <a:xfrm>
             <a:off x="4005000" y="2578680"/>
-            <a:ext cx="1618200" cy="968760"/>
+            <a:ext cx="1617840" cy="968400"/>
           </a:xfrm>
           <a:prstGeom prst="roundRect">
             <a:avLst>
@@ -11480,6 +11883,8 @@
               <a:srgbClr val="d8e0e5"/>
             </a:solidFill>
             <a:round/>
+            <a:headEnd len="med" type="triangle" w="med"/>
+            <a:tailEnd len="med" type="triangle" w="med"/>
           </a:ln>
         </p:spPr>
         <p:style>
@@ -11493,6 +11898,11 @@
             <a:noAutofit/>
           </a:bodyPr>
           <a:p>
+            <a:pPr>
+              <a:lnSpc>
+                <a:spcPct val="100000"/>
+              </a:lnSpc>
+            </a:pPr>
             <a:endParaRPr b="0" lang="en-US" sz="1800" strike="noStrike" u="none">
               <a:solidFill>
                 <a:srgbClr val="000000"/>
@@ -11513,7 +11923,7 @@
         <p:spPr>
           <a:xfrm>
             <a:off x="4078080" y="2606040"/>
-            <a:ext cx="1471680" cy="905040"/>
+            <a:ext cx="1471320" cy="904680"/>
           </a:xfrm>
           <a:prstGeom prst="rect">
             <a:avLst/>
@@ -11604,7 +12014,7 @@
         <p:spPr>
           <a:xfrm>
             <a:off x="6318360" y="2176200"/>
-            <a:ext cx="2166840" cy="475200"/>
+            <a:ext cx="2166480" cy="474840"/>
           </a:xfrm>
           <a:prstGeom prst="roundRect">
             <a:avLst>
@@ -11619,6 +12029,8 @@
               <a:srgbClr val="d8e0e5"/>
             </a:solidFill>
             <a:round/>
+            <a:headEnd len="med" type="triangle" w="med"/>
+            <a:tailEnd len="med" type="triangle" w="med"/>
           </a:ln>
         </p:spPr>
         <p:style>
@@ -11632,6 +12044,11 @@
             <a:noAutofit/>
           </a:bodyPr>
           <a:p>
+            <a:pPr>
+              <a:lnSpc>
+                <a:spcPct val="100000"/>
+              </a:lnSpc>
+            </a:pPr>
             <a:endParaRPr b="0" lang="en-US" sz="1800" strike="noStrike" u="none">
               <a:solidFill>
                 <a:srgbClr val="000000"/>
@@ -11652,7 +12069,7 @@
         <p:spPr>
           <a:xfrm>
             <a:off x="6391800" y="2203560"/>
-            <a:ext cx="2020320" cy="411120"/>
+            <a:ext cx="2019960" cy="410760"/>
           </a:xfrm>
           <a:prstGeom prst="rect">
             <a:avLst/>
@@ -11713,7 +12130,7 @@
         <p:spPr>
           <a:xfrm>
             <a:off x="6318360" y="2816280"/>
-            <a:ext cx="2166840" cy="475200"/>
+            <a:ext cx="2166480" cy="474840"/>
           </a:xfrm>
           <a:prstGeom prst="roundRect">
             <a:avLst>
@@ -11728,6 +12145,8 @@
               <a:srgbClr val="d8e0e5"/>
             </a:solidFill>
             <a:round/>
+            <a:headEnd len="med" type="triangle" w="med"/>
+            <a:tailEnd len="med" type="triangle" w="med"/>
           </a:ln>
         </p:spPr>
         <p:style>
@@ -11741,6 +12160,11 @@
             <a:noAutofit/>
           </a:bodyPr>
           <a:p>
+            <a:pPr>
+              <a:lnSpc>
+                <a:spcPct val="100000"/>
+              </a:lnSpc>
+            </a:pPr>
             <a:endParaRPr b="0" lang="en-US" sz="1800" strike="noStrike" u="none">
               <a:solidFill>
                 <a:srgbClr val="000000"/>
@@ -11761,7 +12185,7 @@
         <p:spPr>
           <a:xfrm>
             <a:off x="6391800" y="2843640"/>
-            <a:ext cx="2020320" cy="411120"/>
+            <a:ext cx="2019960" cy="410760"/>
           </a:xfrm>
           <a:prstGeom prst="rect">
             <a:avLst/>
@@ -11822,7 +12246,7 @@
         <p:spPr>
           <a:xfrm>
             <a:off x="6318360" y="3447360"/>
-            <a:ext cx="2166840" cy="475200"/>
+            <a:ext cx="2166480" cy="474840"/>
           </a:xfrm>
           <a:prstGeom prst="roundRect">
             <a:avLst>
@@ -11837,6 +12261,8 @@
               <a:srgbClr val="d8e0e5"/>
             </a:solidFill>
             <a:round/>
+            <a:headEnd len="med" type="triangle" w="med"/>
+            <a:tailEnd len="med" type="triangle" w="med"/>
           </a:ln>
         </p:spPr>
         <p:style>
@@ -11850,6 +12276,11 @@
             <a:noAutofit/>
           </a:bodyPr>
           <a:p>
+            <a:pPr>
+              <a:lnSpc>
+                <a:spcPct val="100000"/>
+              </a:lnSpc>
+            </a:pPr>
             <a:endParaRPr b="0" lang="en-US" sz="1800" strike="noStrike" u="none">
               <a:solidFill>
                 <a:srgbClr val="000000"/>
@@ -11870,7 +12301,7 @@
         <p:spPr>
           <a:xfrm>
             <a:off x="6391800" y="3474720"/>
-            <a:ext cx="2020320" cy="411120"/>
+            <a:ext cx="2019960" cy="410760"/>
           </a:xfrm>
           <a:prstGeom prst="rect">
             <a:avLst/>
@@ -11931,7 +12362,7 @@
         <p:spPr>
           <a:xfrm>
             <a:off x="6574680" y="4142160"/>
-            <a:ext cx="1682280" cy="447840"/>
+            <a:ext cx="1681920" cy="447480"/>
           </a:xfrm>
           <a:prstGeom prst="roundRect">
             <a:avLst>
@@ -11946,6 +12377,8 @@
               <a:srgbClr val="d8e0e5"/>
             </a:solidFill>
             <a:round/>
+            <a:headEnd len="med" type="triangle" w="med"/>
+            <a:tailEnd len="med" type="triangle" w="med"/>
           </a:ln>
         </p:spPr>
         <p:style>
@@ -11959,6 +12392,11 @@
             <a:noAutofit/>
           </a:bodyPr>
           <a:p>
+            <a:pPr>
+              <a:lnSpc>
+                <a:spcPct val="100000"/>
+              </a:lnSpc>
+            </a:pPr>
             <a:endParaRPr b="0" lang="en-US" sz="1800" strike="noStrike" u="none">
               <a:solidFill>
                 <a:srgbClr val="000000"/>
@@ -11979,7 +12417,7 @@
         <p:spPr>
           <a:xfrm>
             <a:off x="6647760" y="4169520"/>
-            <a:ext cx="1535760" cy="383760"/>
+            <a:ext cx="1535400" cy="383400"/>
           </a:xfrm>
           <a:prstGeom prst="rect">
             <a:avLst/>
@@ -12040,7 +12478,7 @@
         <p:spPr>
           <a:xfrm>
             <a:off x="9189720" y="2048400"/>
-            <a:ext cx="2276640" cy="630720"/>
+            <a:ext cx="2276280" cy="630360"/>
           </a:xfrm>
           <a:prstGeom prst="roundRect">
             <a:avLst>
@@ -12055,6 +12493,8 @@
               <a:srgbClr val="d8e0e5"/>
             </a:solidFill>
             <a:round/>
+            <a:headEnd len="med" type="triangle" w="med"/>
+            <a:tailEnd len="med" type="triangle" w="med"/>
           </a:ln>
         </p:spPr>
         <p:style>
@@ -12068,6 +12508,11 @@
             <a:noAutofit/>
           </a:bodyPr>
           <a:p>
+            <a:pPr>
+              <a:lnSpc>
+                <a:spcPct val="100000"/>
+              </a:lnSpc>
+            </a:pPr>
             <a:endParaRPr b="0" lang="en-US" sz="1800" strike="noStrike" u="none">
               <a:solidFill>
                 <a:srgbClr val="000000"/>
@@ -12088,7 +12533,7 @@
         <p:spPr>
           <a:xfrm>
             <a:off x="9262800" y="2075760"/>
-            <a:ext cx="2130120" cy="566640"/>
+            <a:ext cx="2129760" cy="566280"/>
           </a:xfrm>
           <a:prstGeom prst="rect">
             <a:avLst/>
@@ -12179,7 +12624,7 @@
         <p:spPr>
           <a:xfrm>
             <a:off x="9189720" y="3017520"/>
-            <a:ext cx="2276640" cy="630720"/>
+            <a:ext cx="2276280" cy="630360"/>
           </a:xfrm>
           <a:prstGeom prst="roundRect">
             <a:avLst>
@@ -12194,6 +12639,8 @@
               <a:srgbClr val="d8e0e5"/>
             </a:solidFill>
             <a:round/>
+            <a:headEnd len="med" type="triangle" w="med"/>
+            <a:tailEnd len="med" type="triangle" w="med"/>
           </a:ln>
         </p:spPr>
         <p:style>
@@ -12207,6 +12654,11 @@
             <a:noAutofit/>
           </a:bodyPr>
           <a:p>
+            <a:pPr>
+              <a:lnSpc>
+                <a:spcPct val="100000"/>
+              </a:lnSpc>
+            </a:pPr>
             <a:endParaRPr b="0" lang="en-US" sz="1800" strike="noStrike" u="none">
               <a:solidFill>
                 <a:srgbClr val="000000"/>
@@ -12227,7 +12679,7 @@
         <p:spPr>
           <a:xfrm>
             <a:off x="9262800" y="3044880"/>
-            <a:ext cx="2130120" cy="566640"/>
+            <a:ext cx="2129760" cy="566280"/>
           </a:xfrm>
           <a:prstGeom prst="rect">
             <a:avLst/>
@@ -12318,7 +12770,7 @@
         <p:spPr>
           <a:xfrm>
             <a:off x="9125640" y="3940920"/>
-            <a:ext cx="2404440" cy="630720"/>
+            <a:ext cx="2404080" cy="630360"/>
           </a:xfrm>
           <a:prstGeom prst="roundRect">
             <a:avLst>
@@ -12333,6 +12785,8 @@
               <a:srgbClr val="d8e0e5"/>
             </a:solidFill>
             <a:round/>
+            <a:headEnd len="med" type="triangle" w="med"/>
+            <a:tailEnd len="med" type="triangle" w="med"/>
           </a:ln>
         </p:spPr>
         <p:style>
@@ -12346,6 +12800,11 @@
             <a:noAutofit/>
           </a:bodyPr>
           <a:p>
+            <a:pPr>
+              <a:lnSpc>
+                <a:spcPct val="100000"/>
+              </a:lnSpc>
+            </a:pPr>
             <a:endParaRPr b="0" lang="en-US" sz="1800" strike="noStrike" u="none">
               <a:solidFill>
                 <a:srgbClr val="000000"/>
@@ -12366,7 +12825,7 @@
         <p:spPr>
           <a:xfrm>
             <a:off x="9198720" y="3968640"/>
-            <a:ext cx="2258280" cy="566640"/>
+            <a:ext cx="2257920" cy="566280"/>
           </a:xfrm>
           <a:prstGeom prst="rect">
             <a:avLst/>
@@ -12450,278 +12909,14 @@
       </p:sp>
       <p:sp>
         <p:nvSpPr>
-          <p:cNvPr id="98" name="Shape 40"/>
-          <p:cNvSpPr/>
-          <p:nvPr/>
-        </p:nvSpPr>
-        <p:spPr>
-          <a:xfrm>
-            <a:off x="3502080" y="3072240"/>
-            <a:ext cx="438840" cy="360"/>
-          </a:xfrm>
-          <a:prstGeom prst="line">
-            <a:avLst/>
-          </a:prstGeom>
-          <a:ln w="31750">
-            <a:solidFill>
-              <a:srgbClr val="ee791f"/>
-            </a:solidFill>
-            <a:round/>
-            <a:tailEnd len="med" type="triangle" w="med"/>
-          </a:ln>
-        </p:spPr>
-        <p:style>
-          <a:lnRef idx="0"/>
-          <a:fillRef idx="0"/>
-          <a:effectRef idx="0"/>
-          <a:fontRef idx="minor"/>
-        </p:style>
-        <p:txBody>
-          <a:bodyPr lIns="90000" rIns="90000" tIns="-44640" bIns="-44640" anchor="t" anchorCtr="1">
-            <a:noAutofit/>
-          </a:bodyPr>
-          <a:p>
-            <a:endParaRPr b="0" lang="en-US" sz="1800" strike="noStrike" u="none">
-              <a:solidFill>
-                <a:srgbClr val="000000"/>
-              </a:solidFill>
-              <a:effectLst/>
-              <a:uFillTx/>
-              <a:latin typeface="Arial"/>
-            </a:endParaRPr>
-          </a:p>
-        </p:txBody>
-      </p:sp>
-      <p:sp>
-        <p:nvSpPr>
-          <p:cNvPr id="99" name="Shape 41"/>
-          <p:cNvSpPr/>
-          <p:nvPr/>
-        </p:nvSpPr>
-        <p:spPr>
-          <a:xfrm>
-            <a:off x="5650920" y="3072240"/>
-            <a:ext cx="438840" cy="360"/>
-          </a:xfrm>
-          <a:prstGeom prst="line">
-            <a:avLst/>
-          </a:prstGeom>
-          <a:ln w="31750">
-            <a:solidFill>
-              <a:srgbClr val="ee791f"/>
-            </a:solidFill>
-            <a:round/>
-            <a:tailEnd len="med" type="triangle" w="med"/>
-          </a:ln>
-        </p:spPr>
-        <p:style>
-          <a:lnRef idx="0"/>
-          <a:fillRef idx="0"/>
-          <a:effectRef idx="0"/>
-          <a:fontRef idx="minor"/>
-        </p:style>
-        <p:txBody>
-          <a:bodyPr lIns="90000" rIns="90000" tIns="-44640" bIns="-44640" anchor="t" anchorCtr="1">
-            <a:noAutofit/>
-          </a:bodyPr>
-          <a:p>
-            <a:endParaRPr b="0" lang="en-US" sz="1800" strike="noStrike" u="none">
-              <a:solidFill>
-                <a:srgbClr val="000000"/>
-              </a:solidFill>
-              <a:effectLst/>
-              <a:uFillTx/>
-              <a:latin typeface="Arial"/>
-            </a:endParaRPr>
-          </a:p>
-        </p:txBody>
-      </p:sp>
-      <p:sp>
-        <p:nvSpPr>
-          <p:cNvPr id="100" name="Shape 42"/>
-          <p:cNvSpPr/>
-          <p:nvPr/>
-        </p:nvSpPr>
-        <p:spPr>
-          <a:xfrm>
-            <a:off x="8695800" y="4361400"/>
-            <a:ext cx="320040" cy="360"/>
-          </a:xfrm>
-          <a:prstGeom prst="line">
-            <a:avLst/>
-          </a:prstGeom>
-          <a:ln w="27940">
-            <a:solidFill>
-              <a:srgbClr val="17846b"/>
-            </a:solidFill>
-            <a:round/>
-            <a:tailEnd len="med" type="triangle" w="med"/>
-          </a:ln>
-        </p:spPr>
-        <p:style>
-          <a:lnRef idx="0"/>
-          <a:fillRef idx="0"/>
-          <a:effectRef idx="0"/>
-          <a:fontRef idx="minor"/>
-        </p:style>
-        <p:txBody>
-          <a:bodyPr lIns="90000" rIns="90000" tIns="-44640" bIns="-44640" anchor="t" anchorCtr="1">
-            <a:noAutofit/>
-          </a:bodyPr>
-          <a:p>
-            <a:endParaRPr b="0" lang="en-US" sz="1800" strike="noStrike" u="none">
-              <a:solidFill>
-                <a:srgbClr val="000000"/>
-              </a:solidFill>
-              <a:effectLst/>
-              <a:uFillTx/>
-              <a:latin typeface="Arial"/>
-            </a:endParaRPr>
-          </a:p>
-        </p:txBody>
-      </p:sp>
-      <p:sp>
-        <p:nvSpPr>
-          <p:cNvPr id="101" name="Shape 43"/>
-          <p:cNvSpPr/>
-          <p:nvPr/>
-        </p:nvSpPr>
-        <p:spPr>
-          <a:xfrm flipV="1">
-            <a:off x="10323360" y="3675600"/>
-            <a:ext cx="360" cy="237960"/>
-          </a:xfrm>
-          <a:prstGeom prst="line">
-            <a:avLst/>
-          </a:prstGeom>
-          <a:ln w="25400">
-            <a:solidFill>
-              <a:srgbClr val="17846b"/>
-            </a:solidFill>
-            <a:round/>
-            <a:tailEnd len="med" type="triangle" w="med"/>
-          </a:ln>
-        </p:spPr>
-        <p:style>
-          <a:lnRef idx="0"/>
-          <a:fillRef idx="0"/>
-          <a:effectRef idx="0"/>
-          <a:fontRef idx="minor"/>
-        </p:style>
-        <p:txBody>
-          <a:bodyPr lIns="90000" rIns="90000" tIns="45000" bIns="45000" anchor="t" anchorCtr="1">
-            <a:noAutofit/>
-          </a:bodyPr>
-          <a:p>
-            <a:endParaRPr b="0" lang="en-US" sz="1800" strike="noStrike" u="none">
-              <a:solidFill>
-                <a:srgbClr val="000000"/>
-              </a:solidFill>
-              <a:effectLst/>
-              <a:uFillTx/>
-              <a:latin typeface="Arial"/>
-            </a:endParaRPr>
-          </a:p>
-        </p:txBody>
-      </p:sp>
-      <p:sp>
-        <p:nvSpPr>
-          <p:cNvPr id="102" name="Shape 44"/>
-          <p:cNvSpPr/>
-          <p:nvPr/>
-        </p:nvSpPr>
-        <p:spPr>
-          <a:xfrm flipV="1">
-            <a:off x="10323360" y="2697480"/>
-            <a:ext cx="360" cy="301680"/>
-          </a:xfrm>
-          <a:prstGeom prst="line">
-            <a:avLst/>
-          </a:prstGeom>
-          <a:ln w="25400">
-            <a:solidFill>
-              <a:srgbClr val="17846b"/>
-            </a:solidFill>
-            <a:round/>
-            <a:tailEnd len="med" type="triangle" w="med"/>
-          </a:ln>
-        </p:spPr>
-        <p:style>
-          <a:lnRef idx="0"/>
-          <a:fillRef idx="0"/>
-          <a:effectRef idx="0"/>
-          <a:fontRef idx="minor"/>
-        </p:style>
-        <p:txBody>
-          <a:bodyPr lIns="90000" rIns="90000" tIns="45000" bIns="45000" anchor="t" anchorCtr="1">
-            <a:noAutofit/>
-          </a:bodyPr>
-          <a:p>
-            <a:endParaRPr b="0" lang="en-US" sz="1800" strike="noStrike" u="none">
-              <a:solidFill>
-                <a:srgbClr val="000000"/>
-              </a:solidFill>
-              <a:effectLst/>
-              <a:uFillTx/>
-              <a:latin typeface="Arial"/>
-            </a:endParaRPr>
-          </a:p>
-        </p:txBody>
-      </p:sp>
-      <p:sp>
-        <p:nvSpPr>
-          <p:cNvPr id="103" name="Shape 45"/>
-          <p:cNvSpPr/>
-          <p:nvPr/>
-        </p:nvSpPr>
-        <p:spPr>
-          <a:xfrm flipH="1">
-            <a:off x="8613360" y="2999160"/>
-            <a:ext cx="192240" cy="1371600"/>
-          </a:xfrm>
-          <a:prstGeom prst="line">
-            <a:avLst/>
-          </a:prstGeom>
-          <a:ln w="25400">
-            <a:solidFill>
-              <a:srgbClr val="17846b"/>
-            </a:solidFill>
-            <a:round/>
-            <a:tailEnd len="med" type="triangle" w="med"/>
-          </a:ln>
-        </p:spPr>
-        <p:style>
-          <a:lnRef idx="0"/>
-          <a:fillRef idx="0"/>
-          <a:effectRef idx="0"/>
-          <a:fontRef idx="minor"/>
-        </p:style>
-        <p:txBody>
-          <a:bodyPr lIns="90000" rIns="90000" tIns="45000" bIns="45000" anchor="t" anchorCtr="1">
-            <a:noAutofit/>
-          </a:bodyPr>
-          <a:p>
-            <a:endParaRPr b="0" lang="en-US" sz="1800" strike="noStrike" u="none">
-              <a:solidFill>
-                <a:srgbClr val="000000"/>
-              </a:solidFill>
-              <a:effectLst/>
-              <a:uFillTx/>
-              <a:latin typeface="Arial"/>
-            </a:endParaRPr>
-          </a:p>
-        </p:txBody>
-      </p:sp>
-      <p:sp>
-        <p:nvSpPr>
-          <p:cNvPr id="104" name="Text 46"/>
+          <p:cNvPr id="98" name="Text 46"/>
           <p:cNvSpPr/>
           <p:nvPr/>
         </p:nvSpPr>
         <p:spPr>
           <a:xfrm>
             <a:off x="631080" y="5276160"/>
-            <a:ext cx="10972440" cy="694440"/>
+            <a:ext cx="10972080" cy="694080"/>
           </a:xfrm>
           <a:prstGeom prst="rect">
             <a:avLst/>
@@ -12812,14 +13007,14 @@
       </p:grpSpPr>
       <p:sp>
         <p:nvSpPr>
-          <p:cNvPr id="105" name="Shape 0"/>
+          <p:cNvPr id="99" name="Shape 0"/>
           <p:cNvSpPr/>
           <p:nvPr/>
         </p:nvSpPr>
         <p:spPr>
           <a:xfrm>
             <a:off x="0" y="0"/>
-            <a:ext cx="12191400" cy="109440"/>
+            <a:ext cx="12191040" cy="109080"/>
           </a:xfrm>
           <a:prstGeom prst="rect">
             <a:avLst/>
@@ -12832,6 +13027,8 @@
               <a:srgbClr val="ee791f"/>
             </a:solidFill>
             <a:round/>
+            <a:headEnd len="med" type="triangle" w="med"/>
+            <a:tailEnd len="med" type="triangle" w="med"/>
           </a:ln>
         </p:spPr>
         <p:style>
@@ -12845,6 +13042,11 @@
             <a:noAutofit/>
           </a:bodyPr>
           <a:p>
+            <a:pPr>
+              <a:lnSpc>
+                <a:spcPct val="100000"/>
+              </a:lnSpc>
+            </a:pPr>
             <a:endParaRPr b="0" lang="en-US" sz="1800" strike="noStrike" u="none">
               <a:solidFill>
                 <a:srgbClr val="ffffff"/>
@@ -12858,14 +13060,14 @@
       </p:sp>
       <p:sp>
         <p:nvSpPr>
-          <p:cNvPr id="106" name="Text 1"/>
+          <p:cNvPr id="100" name="Text 1"/>
           <p:cNvSpPr/>
           <p:nvPr/>
         </p:nvSpPr>
         <p:spPr>
           <a:xfrm>
             <a:off x="530280" y="311040"/>
-            <a:ext cx="10881000" cy="548280"/>
+            <a:ext cx="10880640" cy="547920"/>
           </a:xfrm>
           <a:prstGeom prst="rect">
             <a:avLst/>
@@ -12919,14 +13121,14 @@
       </p:sp>
       <p:sp>
         <p:nvSpPr>
-          <p:cNvPr id="107" name="Shape 2"/>
+          <p:cNvPr id="101" name="Shape 2"/>
           <p:cNvSpPr/>
           <p:nvPr/>
         </p:nvSpPr>
         <p:spPr>
           <a:xfrm>
             <a:off x="530280" y="951120"/>
-            <a:ext cx="11100600" cy="31680"/>
+            <a:ext cx="11100240" cy="31320"/>
           </a:xfrm>
           <a:prstGeom prst="rect">
             <a:avLst/>
@@ -12939,6 +13141,8 @@
               <a:srgbClr val="ee791f"/>
             </a:solidFill>
             <a:round/>
+            <a:headEnd len="med" type="triangle" w="med"/>
+            <a:tailEnd len="med" type="triangle" w="med"/>
           </a:ln>
         </p:spPr>
         <p:style>
@@ -12952,6 +13156,11 @@
             <a:noAutofit/>
           </a:bodyPr>
           <a:p>
+            <a:pPr>
+              <a:lnSpc>
+                <a:spcPct val="100000"/>
+              </a:lnSpc>
+            </a:pPr>
             <a:endParaRPr b="0" lang="en-US" sz="1800" strike="noStrike" u="none">
               <a:solidFill>
                 <a:srgbClr val="ffffff"/>
@@ -12965,14 +13174,14 @@
       </p:sp>
       <p:sp>
         <p:nvSpPr>
-          <p:cNvPr id="108" name="Text 3"/>
+          <p:cNvPr id="102" name="Text 3"/>
           <p:cNvSpPr/>
           <p:nvPr/>
         </p:nvSpPr>
         <p:spPr>
           <a:xfrm>
             <a:off x="548640" y="6473880"/>
-            <a:ext cx="9143640" cy="200880"/>
+            <a:ext cx="9143280" cy="200520"/>
           </a:xfrm>
           <a:prstGeom prst="rect">
             <a:avLst/>
@@ -13026,14 +13235,14 @@
       </p:sp>
       <p:sp>
         <p:nvSpPr>
-          <p:cNvPr id="109" name="Text 4"/>
+          <p:cNvPr id="103" name="Text 4"/>
           <p:cNvSpPr/>
           <p:nvPr/>
         </p:nvSpPr>
         <p:spPr>
           <a:xfrm>
             <a:off x="11018520" y="6473880"/>
-            <a:ext cx="511560" cy="200880"/>
+            <a:ext cx="511200" cy="200520"/>
           </a:xfrm>
           <a:prstGeom prst="rect">
             <a:avLst/>
@@ -13087,14 +13296,14 @@
       </p:sp>
       <p:sp>
         <p:nvSpPr>
-          <p:cNvPr id="110" name="Shape 5"/>
+          <p:cNvPr id="104" name="Shape 5"/>
           <p:cNvSpPr/>
           <p:nvPr/>
         </p:nvSpPr>
         <p:spPr>
           <a:xfrm>
             <a:off x="612720" y="1234440"/>
-            <a:ext cx="2066040" cy="539280"/>
+            <a:ext cx="2065680" cy="538920"/>
           </a:xfrm>
           <a:prstGeom prst="roundRect">
             <a:avLst>
@@ -13109,6 +13318,8 @@
               <a:srgbClr val="e6eff4"/>
             </a:solidFill>
             <a:round/>
+            <a:headEnd len="med" type="triangle" w="med"/>
+            <a:tailEnd len="med" type="triangle" w="med"/>
           </a:ln>
         </p:spPr>
         <p:style>
@@ -13122,6 +13333,11 @@
             <a:noAutofit/>
           </a:bodyPr>
           <a:p>
+            <a:pPr>
+              <a:lnSpc>
+                <a:spcPct val="100000"/>
+              </a:lnSpc>
+            </a:pPr>
             <a:endParaRPr b="0" lang="en-US" sz="1800" strike="noStrike" u="none">
               <a:solidFill>
                 <a:srgbClr val="000000"/>
@@ -13135,14 +13351,14 @@
       </p:sp>
       <p:sp>
         <p:nvSpPr>
-          <p:cNvPr id="111" name="Shape 6"/>
+          <p:cNvPr id="105" name="Shape 6"/>
           <p:cNvSpPr/>
           <p:nvPr/>
         </p:nvSpPr>
         <p:spPr>
           <a:xfrm>
             <a:off x="2697480" y="1234440"/>
-            <a:ext cx="8832600" cy="539280"/>
+            <a:ext cx="8832240" cy="538920"/>
           </a:xfrm>
           <a:prstGeom prst="roundRect">
             <a:avLst>
@@ -13157,6 +13373,8 @@
               <a:srgbClr val="f2f6fa"/>
             </a:solidFill>
             <a:round/>
+            <a:headEnd len="med" type="triangle" w="med"/>
+            <a:tailEnd len="med" type="triangle" w="med"/>
           </a:ln>
         </p:spPr>
         <p:style>
@@ -13170,6 +13388,11 @@
             <a:noAutofit/>
           </a:bodyPr>
           <a:p>
+            <a:pPr>
+              <a:lnSpc>
+                <a:spcPct val="100000"/>
+              </a:lnSpc>
+            </a:pPr>
             <a:endParaRPr b="0" lang="en-US" sz="1800" strike="noStrike" u="none">
               <a:solidFill>
                 <a:srgbClr val="000000"/>
@@ -13183,14 +13406,14 @@
       </p:sp>
       <p:sp>
         <p:nvSpPr>
-          <p:cNvPr id="112" name="Text 7"/>
+          <p:cNvPr id="106" name="Text 7"/>
           <p:cNvSpPr/>
           <p:nvPr/>
         </p:nvSpPr>
         <p:spPr>
           <a:xfrm>
             <a:off x="758880" y="1307520"/>
-            <a:ext cx="1791720" cy="356400"/>
+            <a:ext cx="1791360" cy="356040"/>
           </a:xfrm>
           <a:prstGeom prst="rect">
             <a:avLst/>
@@ -13244,14 +13467,14 @@
       </p:sp>
       <p:sp>
         <p:nvSpPr>
-          <p:cNvPr id="113" name="Text 8"/>
+          <p:cNvPr id="107" name="Text 8"/>
           <p:cNvSpPr/>
           <p:nvPr/>
         </p:nvSpPr>
         <p:spPr>
           <a:xfrm>
             <a:off x="2926080" y="1307520"/>
-            <a:ext cx="8265960" cy="356400"/>
+            <a:ext cx="8265600" cy="356040"/>
           </a:xfrm>
           <a:prstGeom prst="rect">
             <a:avLst/>
@@ -13305,14 +13528,14 @@
       </p:sp>
       <p:sp>
         <p:nvSpPr>
-          <p:cNvPr id="114" name="Shape 9"/>
+          <p:cNvPr id="108" name="Shape 9"/>
           <p:cNvSpPr/>
           <p:nvPr/>
         </p:nvSpPr>
         <p:spPr>
           <a:xfrm>
             <a:off x="612720" y="1920240"/>
-            <a:ext cx="2066040" cy="539280"/>
+            <a:ext cx="2065680" cy="538920"/>
           </a:xfrm>
           <a:prstGeom prst="roundRect">
             <a:avLst>
@@ -13327,6 +13550,8 @@
               <a:srgbClr val="f2f6fa"/>
             </a:solidFill>
             <a:round/>
+            <a:headEnd len="med" type="triangle" w="med"/>
+            <a:tailEnd len="med" type="triangle" w="med"/>
           </a:ln>
         </p:spPr>
         <p:style>
@@ -13340,6 +13565,11 @@
             <a:noAutofit/>
           </a:bodyPr>
           <a:p>
+            <a:pPr>
+              <a:lnSpc>
+                <a:spcPct val="100000"/>
+              </a:lnSpc>
+            </a:pPr>
             <a:endParaRPr b="0" lang="en-US" sz="1800" strike="noStrike" u="none">
               <a:solidFill>
                 <a:srgbClr val="000000"/>
@@ -13353,14 +13583,14 @@
       </p:sp>
       <p:sp>
         <p:nvSpPr>
-          <p:cNvPr id="115" name="Shape 10"/>
+          <p:cNvPr id="109" name="Shape 10"/>
           <p:cNvSpPr/>
           <p:nvPr/>
         </p:nvSpPr>
         <p:spPr>
           <a:xfrm>
             <a:off x="2697480" y="1920240"/>
-            <a:ext cx="8832600" cy="539280"/>
+            <a:ext cx="8832240" cy="538920"/>
           </a:xfrm>
           <a:prstGeom prst="roundRect">
             <a:avLst>
@@ -13375,6 +13605,8 @@
               <a:srgbClr val="f7f9fb"/>
             </a:solidFill>
             <a:round/>
+            <a:headEnd len="med" type="triangle" w="med"/>
+            <a:tailEnd len="med" type="triangle" w="med"/>
           </a:ln>
         </p:spPr>
         <p:style>
@@ -13388,6 +13620,11 @@
             <a:noAutofit/>
           </a:bodyPr>
           <a:p>
+            <a:pPr>
+              <a:lnSpc>
+                <a:spcPct val="100000"/>
+              </a:lnSpc>
+            </a:pPr>
             <a:endParaRPr b="0" lang="en-US" sz="1800" strike="noStrike" u="none">
               <a:solidFill>
                 <a:srgbClr val="000000"/>
@@ -13401,14 +13638,14 @@
       </p:sp>
       <p:sp>
         <p:nvSpPr>
-          <p:cNvPr id="116" name="Text 11"/>
+          <p:cNvPr id="110" name="Text 11"/>
           <p:cNvSpPr/>
           <p:nvPr/>
         </p:nvSpPr>
         <p:spPr>
           <a:xfrm>
             <a:off x="758880" y="1993320"/>
-            <a:ext cx="1791720" cy="356400"/>
+            <a:ext cx="1791360" cy="356040"/>
           </a:xfrm>
           <a:prstGeom prst="rect">
             <a:avLst/>
@@ -13462,14 +13699,14 @@
       </p:sp>
       <p:sp>
         <p:nvSpPr>
-          <p:cNvPr id="117" name="Text 12"/>
+          <p:cNvPr id="111" name="Text 12"/>
           <p:cNvSpPr/>
           <p:nvPr/>
         </p:nvSpPr>
         <p:spPr>
           <a:xfrm>
             <a:off x="2926080" y="1993320"/>
-            <a:ext cx="8265960" cy="356400"/>
+            <a:ext cx="8265600" cy="356040"/>
           </a:xfrm>
           <a:prstGeom prst="rect">
             <a:avLst/>
@@ -13523,14 +13760,14 @@
       </p:sp>
       <p:sp>
         <p:nvSpPr>
-          <p:cNvPr id="118" name="Shape 13"/>
+          <p:cNvPr id="112" name="Shape 13"/>
           <p:cNvSpPr/>
           <p:nvPr/>
         </p:nvSpPr>
         <p:spPr>
           <a:xfrm>
             <a:off x="612720" y="2606040"/>
-            <a:ext cx="2066040" cy="539280"/>
+            <a:ext cx="2065680" cy="538920"/>
           </a:xfrm>
           <a:prstGeom prst="roundRect">
             <a:avLst>
@@ -13545,6 +13782,8 @@
               <a:srgbClr val="e6eff4"/>
             </a:solidFill>
             <a:round/>
+            <a:headEnd len="med" type="triangle" w="med"/>
+            <a:tailEnd len="med" type="triangle" w="med"/>
           </a:ln>
         </p:spPr>
         <p:style>
@@ -13558,6 +13797,11 @@
             <a:noAutofit/>
           </a:bodyPr>
           <a:p>
+            <a:pPr>
+              <a:lnSpc>
+                <a:spcPct val="100000"/>
+              </a:lnSpc>
+            </a:pPr>
             <a:endParaRPr b="0" lang="en-US" sz="1800" strike="noStrike" u="none">
               <a:solidFill>
                 <a:srgbClr val="000000"/>
@@ -13571,14 +13815,14 @@
       </p:sp>
       <p:sp>
         <p:nvSpPr>
-          <p:cNvPr id="119" name="Shape 14"/>
+          <p:cNvPr id="113" name="Shape 14"/>
           <p:cNvSpPr/>
           <p:nvPr/>
         </p:nvSpPr>
         <p:spPr>
           <a:xfrm>
             <a:off x="2697480" y="2606040"/>
-            <a:ext cx="8832600" cy="539280"/>
+            <a:ext cx="8832240" cy="538920"/>
           </a:xfrm>
           <a:prstGeom prst="roundRect">
             <a:avLst>
@@ -13593,6 +13837,8 @@
               <a:srgbClr val="f2f6fa"/>
             </a:solidFill>
             <a:round/>
+            <a:headEnd len="med" type="triangle" w="med"/>
+            <a:tailEnd len="med" type="triangle" w="med"/>
           </a:ln>
         </p:spPr>
         <p:style>
@@ -13606,6 +13852,11 @@
             <a:noAutofit/>
           </a:bodyPr>
           <a:p>
+            <a:pPr>
+              <a:lnSpc>
+                <a:spcPct val="100000"/>
+              </a:lnSpc>
+            </a:pPr>
             <a:endParaRPr b="0" lang="en-US" sz="1800" strike="noStrike" u="none">
               <a:solidFill>
                 <a:srgbClr val="000000"/>
@@ -13619,14 +13870,14 @@
       </p:sp>
       <p:sp>
         <p:nvSpPr>
-          <p:cNvPr id="120" name="Text 15"/>
+          <p:cNvPr id="114" name="Text 15"/>
           <p:cNvSpPr/>
           <p:nvPr/>
         </p:nvSpPr>
         <p:spPr>
           <a:xfrm>
             <a:off x="758880" y="2679120"/>
-            <a:ext cx="1791720" cy="356400"/>
+            <a:ext cx="1791360" cy="356040"/>
           </a:xfrm>
           <a:prstGeom prst="rect">
             <a:avLst/>
@@ -13680,14 +13931,14 @@
       </p:sp>
       <p:sp>
         <p:nvSpPr>
-          <p:cNvPr id="121" name="Text 16"/>
+          <p:cNvPr id="115" name="Text 16"/>
           <p:cNvSpPr/>
           <p:nvPr/>
         </p:nvSpPr>
         <p:spPr>
           <a:xfrm>
             <a:off x="2926080" y="2679120"/>
-            <a:ext cx="8265960" cy="356400"/>
+            <a:ext cx="8265600" cy="356040"/>
           </a:xfrm>
           <a:prstGeom prst="rect">
             <a:avLst/>
@@ -13741,14 +13992,14 @@
       </p:sp>
       <p:sp>
         <p:nvSpPr>
-          <p:cNvPr id="122" name="Shape 17"/>
+          <p:cNvPr id="116" name="Shape 17"/>
           <p:cNvSpPr/>
           <p:nvPr/>
         </p:nvSpPr>
         <p:spPr>
           <a:xfrm>
             <a:off x="612720" y="3291840"/>
-            <a:ext cx="2066040" cy="539280"/>
+            <a:ext cx="2065680" cy="538920"/>
           </a:xfrm>
           <a:prstGeom prst="roundRect">
             <a:avLst>
@@ -13763,6 +14014,8 @@
               <a:srgbClr val="f2f6fa"/>
             </a:solidFill>
             <a:round/>
+            <a:headEnd len="med" type="triangle" w="med"/>
+            <a:tailEnd len="med" type="triangle" w="med"/>
           </a:ln>
         </p:spPr>
         <p:style>
@@ -13776,6 +14029,11 @@
             <a:noAutofit/>
           </a:bodyPr>
           <a:p>
+            <a:pPr>
+              <a:lnSpc>
+                <a:spcPct val="100000"/>
+              </a:lnSpc>
+            </a:pPr>
             <a:endParaRPr b="0" lang="en-US" sz="1800" strike="noStrike" u="none">
               <a:solidFill>
                 <a:srgbClr val="000000"/>
@@ -13789,14 +14047,14 @@
       </p:sp>
       <p:sp>
         <p:nvSpPr>
-          <p:cNvPr id="123" name="Shape 18"/>
+          <p:cNvPr id="117" name="Shape 18"/>
           <p:cNvSpPr/>
           <p:nvPr/>
         </p:nvSpPr>
         <p:spPr>
           <a:xfrm>
             <a:off x="2697480" y="3291840"/>
-            <a:ext cx="8832600" cy="539280"/>
+            <a:ext cx="8832240" cy="538920"/>
           </a:xfrm>
           <a:prstGeom prst="roundRect">
             <a:avLst>
@@ -13811,6 +14069,8 @@
               <a:srgbClr val="f7f9fb"/>
             </a:solidFill>
             <a:round/>
+            <a:headEnd len="med" type="triangle" w="med"/>
+            <a:tailEnd len="med" type="triangle" w="med"/>
           </a:ln>
         </p:spPr>
         <p:style>
@@ -13824,6 +14084,11 @@
             <a:noAutofit/>
           </a:bodyPr>
           <a:p>
+            <a:pPr>
+              <a:lnSpc>
+                <a:spcPct val="100000"/>
+              </a:lnSpc>
+            </a:pPr>
             <a:endParaRPr b="0" lang="en-US" sz="1800" strike="noStrike" u="none">
               <a:solidFill>
                 <a:srgbClr val="000000"/>
@@ -13837,14 +14102,14 @@
       </p:sp>
       <p:sp>
         <p:nvSpPr>
-          <p:cNvPr id="124" name="Text 19"/>
+          <p:cNvPr id="118" name="Text 19"/>
           <p:cNvSpPr/>
           <p:nvPr/>
         </p:nvSpPr>
         <p:spPr>
           <a:xfrm>
             <a:off x="758880" y="3364920"/>
-            <a:ext cx="1791720" cy="356400"/>
+            <a:ext cx="1791360" cy="356040"/>
           </a:xfrm>
           <a:prstGeom prst="rect">
             <a:avLst/>
@@ -13898,14 +14163,14 @@
       </p:sp>
       <p:sp>
         <p:nvSpPr>
-          <p:cNvPr id="125" name="Text 20"/>
+          <p:cNvPr id="119" name="Text 20"/>
           <p:cNvSpPr/>
           <p:nvPr/>
         </p:nvSpPr>
         <p:spPr>
           <a:xfrm>
             <a:off x="2926080" y="3364920"/>
-            <a:ext cx="8265960" cy="356400"/>
+            <a:ext cx="8265600" cy="356040"/>
           </a:xfrm>
           <a:prstGeom prst="rect">
             <a:avLst/>
@@ -13959,14 +14224,14 @@
       </p:sp>
       <p:sp>
         <p:nvSpPr>
-          <p:cNvPr id="126" name="Shape 21"/>
+          <p:cNvPr id="120" name="Shape 21"/>
           <p:cNvSpPr/>
           <p:nvPr/>
         </p:nvSpPr>
         <p:spPr>
           <a:xfrm>
             <a:off x="612720" y="3977640"/>
-            <a:ext cx="2066040" cy="539280"/>
+            <a:ext cx="2065680" cy="538920"/>
           </a:xfrm>
           <a:prstGeom prst="roundRect">
             <a:avLst>
@@ -13981,6 +14246,8 @@
               <a:srgbClr val="e6eff4"/>
             </a:solidFill>
             <a:round/>
+            <a:headEnd len="med" type="triangle" w="med"/>
+            <a:tailEnd len="med" type="triangle" w="med"/>
           </a:ln>
         </p:spPr>
         <p:style>
@@ -13994,6 +14261,11 @@
             <a:noAutofit/>
           </a:bodyPr>
           <a:p>
+            <a:pPr>
+              <a:lnSpc>
+                <a:spcPct val="100000"/>
+              </a:lnSpc>
+            </a:pPr>
             <a:endParaRPr b="0" lang="en-US" sz="1800" strike="noStrike" u="none">
               <a:solidFill>
                 <a:srgbClr val="000000"/>
@@ -14007,14 +14279,14 @@
       </p:sp>
       <p:sp>
         <p:nvSpPr>
-          <p:cNvPr id="127" name="Shape 22"/>
+          <p:cNvPr id="121" name="Shape 22"/>
           <p:cNvSpPr/>
           <p:nvPr/>
         </p:nvSpPr>
         <p:spPr>
           <a:xfrm>
             <a:off x="2697480" y="3977640"/>
-            <a:ext cx="8832600" cy="539280"/>
+            <a:ext cx="8832240" cy="538920"/>
           </a:xfrm>
           <a:prstGeom prst="roundRect">
             <a:avLst>
@@ -14029,6 +14301,8 @@
               <a:srgbClr val="f2f6fa"/>
             </a:solidFill>
             <a:round/>
+            <a:headEnd len="med" type="triangle" w="med"/>
+            <a:tailEnd len="med" type="triangle" w="med"/>
           </a:ln>
         </p:spPr>
         <p:style>
@@ -14042,6 +14316,11 @@
             <a:noAutofit/>
           </a:bodyPr>
           <a:p>
+            <a:pPr>
+              <a:lnSpc>
+                <a:spcPct val="100000"/>
+              </a:lnSpc>
+            </a:pPr>
             <a:endParaRPr b="0" lang="en-US" sz="1800" strike="noStrike" u="none">
               <a:solidFill>
                 <a:srgbClr val="000000"/>
@@ -14055,14 +14334,14 @@
       </p:sp>
       <p:sp>
         <p:nvSpPr>
-          <p:cNvPr id="128" name="Text 23"/>
+          <p:cNvPr id="122" name="Text 23"/>
           <p:cNvSpPr/>
           <p:nvPr/>
         </p:nvSpPr>
         <p:spPr>
           <a:xfrm>
             <a:off x="758880" y="4050720"/>
-            <a:ext cx="1791720" cy="356400"/>
+            <a:ext cx="1791360" cy="356040"/>
           </a:xfrm>
           <a:prstGeom prst="rect">
             <a:avLst/>
@@ -14116,14 +14395,14 @@
       </p:sp>
       <p:sp>
         <p:nvSpPr>
-          <p:cNvPr id="129" name="Text 24"/>
+          <p:cNvPr id="123" name="Text 24"/>
           <p:cNvSpPr/>
           <p:nvPr/>
         </p:nvSpPr>
         <p:spPr>
           <a:xfrm>
             <a:off x="2926080" y="4050720"/>
-            <a:ext cx="8265960" cy="356400"/>
+            <a:ext cx="8265600" cy="356040"/>
           </a:xfrm>
           <a:prstGeom prst="rect">
             <a:avLst/>
@@ -14177,14 +14456,14 @@
       </p:sp>
       <p:sp>
         <p:nvSpPr>
-          <p:cNvPr id="130" name="Shape 25"/>
+          <p:cNvPr id="124" name="Shape 25"/>
           <p:cNvSpPr/>
           <p:nvPr/>
         </p:nvSpPr>
         <p:spPr>
           <a:xfrm>
             <a:off x="612720" y="4663440"/>
-            <a:ext cx="2066040" cy="539280"/>
+            <a:ext cx="2065680" cy="538920"/>
           </a:xfrm>
           <a:prstGeom prst="roundRect">
             <a:avLst>
@@ -14199,6 +14478,8 @@
               <a:srgbClr val="f2f6fa"/>
             </a:solidFill>
             <a:round/>
+            <a:headEnd len="med" type="triangle" w="med"/>
+            <a:tailEnd len="med" type="triangle" w="med"/>
           </a:ln>
         </p:spPr>
         <p:style>
@@ -14212,6 +14493,11 @@
             <a:noAutofit/>
           </a:bodyPr>
           <a:p>
+            <a:pPr>
+              <a:lnSpc>
+                <a:spcPct val="100000"/>
+              </a:lnSpc>
+            </a:pPr>
             <a:endParaRPr b="0" lang="en-US" sz="1800" strike="noStrike" u="none">
               <a:solidFill>
                 <a:srgbClr val="000000"/>
@@ -14225,14 +14511,14 @@
       </p:sp>
       <p:sp>
         <p:nvSpPr>
-          <p:cNvPr id="131" name="Shape 26"/>
+          <p:cNvPr id="125" name="Shape 26"/>
           <p:cNvSpPr/>
           <p:nvPr/>
         </p:nvSpPr>
         <p:spPr>
           <a:xfrm>
             <a:off x="2697480" y="4663440"/>
-            <a:ext cx="8832600" cy="539280"/>
+            <a:ext cx="8832240" cy="538920"/>
           </a:xfrm>
           <a:prstGeom prst="roundRect">
             <a:avLst>
@@ -14247,6 +14533,8 @@
               <a:srgbClr val="f7f9fb"/>
             </a:solidFill>
             <a:round/>
+            <a:headEnd len="med" type="triangle" w="med"/>
+            <a:tailEnd len="med" type="triangle" w="med"/>
           </a:ln>
         </p:spPr>
         <p:style>
@@ -14260,6 +14548,11 @@
             <a:noAutofit/>
           </a:bodyPr>
           <a:p>
+            <a:pPr>
+              <a:lnSpc>
+                <a:spcPct val="100000"/>
+              </a:lnSpc>
+            </a:pPr>
             <a:endParaRPr b="0" lang="en-US" sz="1800" strike="noStrike" u="none">
               <a:solidFill>
                 <a:srgbClr val="000000"/>
@@ -14273,14 +14566,14 @@
       </p:sp>
       <p:sp>
         <p:nvSpPr>
-          <p:cNvPr id="132" name="Text 27"/>
+          <p:cNvPr id="126" name="Text 27"/>
           <p:cNvSpPr/>
           <p:nvPr/>
         </p:nvSpPr>
         <p:spPr>
           <a:xfrm>
             <a:off x="758880" y="4736520"/>
-            <a:ext cx="1791720" cy="356400"/>
+            <a:ext cx="1791360" cy="356040"/>
           </a:xfrm>
           <a:prstGeom prst="rect">
             <a:avLst/>
@@ -14334,14 +14627,14 @@
       </p:sp>
       <p:sp>
         <p:nvSpPr>
-          <p:cNvPr id="133" name="Text 28"/>
+          <p:cNvPr id="127" name="Text 28"/>
           <p:cNvSpPr/>
           <p:nvPr/>
         </p:nvSpPr>
         <p:spPr>
           <a:xfrm>
             <a:off x="2926080" y="4736520"/>
-            <a:ext cx="8265960" cy="356400"/>
+            <a:ext cx="8265600" cy="356040"/>
           </a:xfrm>
           <a:prstGeom prst="rect">
             <a:avLst/>
@@ -14395,14 +14688,14 @@
       </p:sp>
       <p:sp>
         <p:nvSpPr>
-          <p:cNvPr id="134" name="Text 29"/>
+          <p:cNvPr id="128" name="Text 29"/>
           <p:cNvSpPr/>
           <p:nvPr/>
         </p:nvSpPr>
         <p:spPr>
           <a:xfrm>
             <a:off x="713160" y="5715000"/>
-            <a:ext cx="10881000" cy="447840"/>
+            <a:ext cx="10880640" cy="447480"/>
           </a:xfrm>
           <a:prstGeom prst="rect">
             <a:avLst/>
@@ -14493,14 +14786,14 @@
       </p:grpSpPr>
       <p:sp>
         <p:nvSpPr>
-          <p:cNvPr id="135" name="Shape 0"/>
+          <p:cNvPr id="129" name="Shape 0"/>
           <p:cNvSpPr/>
           <p:nvPr/>
         </p:nvSpPr>
         <p:spPr>
           <a:xfrm>
             <a:off x="0" y="0"/>
-            <a:ext cx="12191400" cy="109440"/>
+            <a:ext cx="12191040" cy="109080"/>
           </a:xfrm>
           <a:prstGeom prst="rect">
             <a:avLst/>
@@ -14513,6 +14806,8 @@
               <a:srgbClr val="ee791f"/>
             </a:solidFill>
             <a:round/>
+            <a:headEnd len="med" type="triangle" w="med"/>
+            <a:tailEnd len="med" type="triangle" w="med"/>
           </a:ln>
         </p:spPr>
         <p:style>
@@ -14526,6 +14821,11 @@
             <a:noAutofit/>
           </a:bodyPr>
           <a:p>
+            <a:pPr>
+              <a:lnSpc>
+                <a:spcPct val="100000"/>
+              </a:lnSpc>
+            </a:pPr>
             <a:endParaRPr b="0" lang="en-US" sz="1800" strike="noStrike" u="none">
               <a:solidFill>
                 <a:srgbClr val="ffffff"/>
@@ -14539,14 +14839,14 @@
       </p:sp>
       <p:sp>
         <p:nvSpPr>
-          <p:cNvPr id="136" name="Text 1"/>
+          <p:cNvPr id="130" name="Text 1"/>
           <p:cNvSpPr/>
           <p:nvPr/>
         </p:nvSpPr>
         <p:spPr>
           <a:xfrm>
             <a:off x="530280" y="311040"/>
-            <a:ext cx="10881000" cy="548280"/>
+            <a:ext cx="10880640" cy="547920"/>
           </a:xfrm>
           <a:prstGeom prst="rect">
             <a:avLst/>
@@ -14600,14 +14900,14 @@
       </p:sp>
       <p:sp>
         <p:nvSpPr>
-          <p:cNvPr id="137" name="Shape 2"/>
+          <p:cNvPr id="131" name="Shape 2"/>
           <p:cNvSpPr/>
           <p:nvPr/>
         </p:nvSpPr>
         <p:spPr>
           <a:xfrm>
             <a:off x="530280" y="951120"/>
-            <a:ext cx="11100600" cy="31680"/>
+            <a:ext cx="11100240" cy="31320"/>
           </a:xfrm>
           <a:prstGeom prst="rect">
             <a:avLst/>
@@ -14620,6 +14920,8 @@
               <a:srgbClr val="ee791f"/>
             </a:solidFill>
             <a:round/>
+            <a:headEnd len="med" type="triangle" w="med"/>
+            <a:tailEnd len="med" type="triangle" w="med"/>
           </a:ln>
         </p:spPr>
         <p:style>
@@ -14633,6 +14935,11 @@
             <a:noAutofit/>
           </a:bodyPr>
           <a:p>
+            <a:pPr>
+              <a:lnSpc>
+                <a:spcPct val="100000"/>
+              </a:lnSpc>
+            </a:pPr>
             <a:endParaRPr b="0" lang="en-US" sz="1800" strike="noStrike" u="none">
               <a:solidFill>
                 <a:srgbClr val="ffffff"/>
@@ -14646,14 +14953,14 @@
       </p:sp>
       <p:sp>
         <p:nvSpPr>
-          <p:cNvPr id="138" name="Text 3"/>
+          <p:cNvPr id="132" name="Text 3"/>
           <p:cNvSpPr/>
           <p:nvPr/>
         </p:nvSpPr>
         <p:spPr>
           <a:xfrm>
             <a:off x="548640" y="6473880"/>
-            <a:ext cx="9143640" cy="200880"/>
+            <a:ext cx="9143280" cy="200520"/>
           </a:xfrm>
           <a:prstGeom prst="rect">
             <a:avLst/>
@@ -14707,14 +15014,14 @@
       </p:sp>
       <p:sp>
         <p:nvSpPr>
-          <p:cNvPr id="139" name="Text 4"/>
+          <p:cNvPr id="133" name="Text 4"/>
           <p:cNvSpPr/>
           <p:nvPr/>
         </p:nvSpPr>
         <p:spPr>
           <a:xfrm>
             <a:off x="11018520" y="6473880"/>
-            <a:ext cx="511560" cy="200880"/>
+            <a:ext cx="511200" cy="200520"/>
           </a:xfrm>
           <a:prstGeom prst="rect">
             <a:avLst/>
@@ -14768,14 +15075,14 @@
       </p:sp>
       <p:sp>
         <p:nvSpPr>
-          <p:cNvPr id="140" name="Shape 5"/>
+          <p:cNvPr id="134" name="Shape 5"/>
           <p:cNvSpPr/>
           <p:nvPr/>
         </p:nvSpPr>
         <p:spPr>
           <a:xfrm>
             <a:off x="612720" y="1271160"/>
-            <a:ext cx="7086240" cy="4361400"/>
+            <a:ext cx="7085880" cy="4361040"/>
           </a:xfrm>
           <a:prstGeom prst="roundRect">
             <a:avLst>
@@ -14790,6 +15097,8 @@
               <a:srgbClr val="11233b"/>
             </a:solidFill>
             <a:round/>
+            <a:headEnd len="med" type="triangle" w="med"/>
+            <a:tailEnd len="med" type="triangle" w="med"/>
           </a:ln>
         </p:spPr>
         <p:style>
@@ -14803,6 +15112,11 @@
             <a:noAutofit/>
           </a:bodyPr>
           <a:p>
+            <a:pPr>
+              <a:lnSpc>
+                <a:spcPct val="100000"/>
+              </a:lnSpc>
+            </a:pPr>
             <a:endParaRPr b="0" lang="en-US" sz="1800" strike="noStrike" u="none">
               <a:solidFill>
                 <a:srgbClr val="ffffff"/>
@@ -14816,14 +15130,14 @@
       </p:sp>
       <p:sp>
         <p:nvSpPr>
-          <p:cNvPr id="141" name="Text 6"/>
+          <p:cNvPr id="135" name="Text 6"/>
           <p:cNvSpPr/>
           <p:nvPr/>
         </p:nvSpPr>
         <p:spPr>
           <a:xfrm>
             <a:off x="795600" y="1380600"/>
-            <a:ext cx="6738840" cy="4178520"/>
+            <a:ext cx="6738480" cy="4178160"/>
           </a:xfrm>
           <a:prstGeom prst="rect">
             <a:avLst/>
@@ -15117,14 +15431,14 @@
       </p:sp>
       <p:sp>
         <p:nvSpPr>
-          <p:cNvPr id="142" name="Shape 7"/>
+          <p:cNvPr id="136" name="Shape 7"/>
           <p:cNvSpPr/>
           <p:nvPr/>
         </p:nvSpPr>
         <p:spPr>
           <a:xfrm>
             <a:off x="8010000" y="1271160"/>
-            <a:ext cx="3501720" cy="4379760"/>
+            <a:ext cx="3501360" cy="4379400"/>
           </a:xfrm>
           <a:prstGeom prst="roundRect">
             <a:avLst>
@@ -15139,6 +15453,8 @@
               <a:srgbClr val="f2f6fa"/>
             </a:solidFill>
             <a:round/>
+            <a:headEnd len="med" type="triangle" w="med"/>
+            <a:tailEnd len="med" type="triangle" w="med"/>
           </a:ln>
         </p:spPr>
         <p:style>
@@ -15152,6 +15468,11 @@
             <a:noAutofit/>
           </a:bodyPr>
           <a:p>
+            <a:pPr>
+              <a:lnSpc>
+                <a:spcPct val="100000"/>
+              </a:lnSpc>
+            </a:pPr>
             <a:endParaRPr b="0" lang="en-US" sz="1800" strike="noStrike" u="none">
               <a:solidFill>
                 <a:srgbClr val="000000"/>
@@ -15165,14 +15486,14 @@
       </p:sp>
       <p:sp>
         <p:nvSpPr>
-          <p:cNvPr id="143" name="Text 8"/>
+          <p:cNvPr id="137" name="Text 8"/>
           <p:cNvSpPr/>
           <p:nvPr/>
         </p:nvSpPr>
         <p:spPr>
           <a:xfrm>
             <a:off x="8275320" y="1508760"/>
-            <a:ext cx="2880000" cy="411120"/>
+            <a:ext cx="2879640" cy="410760"/>
           </a:xfrm>
           <a:prstGeom prst="rect">
             <a:avLst/>
@@ -15226,14 +15547,14 @@
       </p:sp>
       <p:sp>
         <p:nvSpPr>
-          <p:cNvPr id="144" name="Text 9"/>
+          <p:cNvPr id="138" name="Text 9"/>
           <p:cNvSpPr/>
           <p:nvPr/>
         </p:nvSpPr>
         <p:spPr>
           <a:xfrm>
             <a:off x="8284320" y="2066400"/>
-            <a:ext cx="2898360" cy="3135960"/>
+            <a:ext cx="2898000" cy="3135600"/>
           </a:xfrm>
           <a:prstGeom prst="rect">
             <a:avLst/>
@@ -15420,14 +15741,14 @@
       </p:grpSpPr>
       <p:sp>
         <p:nvSpPr>
-          <p:cNvPr id="145" name="Shape 0"/>
+          <p:cNvPr id="139" name="Shape 0"/>
           <p:cNvSpPr/>
           <p:nvPr/>
         </p:nvSpPr>
         <p:spPr>
           <a:xfrm>
             <a:off x="0" y="0"/>
-            <a:ext cx="12191400" cy="109440"/>
+            <a:ext cx="12191040" cy="109080"/>
           </a:xfrm>
           <a:prstGeom prst="rect">
             <a:avLst/>
@@ -15440,6 +15761,8 @@
               <a:srgbClr val="ee791f"/>
             </a:solidFill>
             <a:round/>
+            <a:headEnd len="med" type="triangle" w="med"/>
+            <a:tailEnd len="med" type="triangle" w="med"/>
           </a:ln>
         </p:spPr>
         <p:style>
@@ -15453,6 +15776,11 @@
             <a:noAutofit/>
           </a:bodyPr>
           <a:p>
+            <a:pPr>
+              <a:lnSpc>
+                <a:spcPct val="100000"/>
+              </a:lnSpc>
+            </a:pPr>
             <a:endParaRPr b="0" lang="en-US" sz="1800" strike="noStrike" u="none">
               <a:solidFill>
                 <a:srgbClr val="ffffff"/>
@@ -15466,14 +15794,14 @@
       </p:sp>
       <p:sp>
         <p:nvSpPr>
-          <p:cNvPr id="146" name="Text 1"/>
+          <p:cNvPr id="140" name="Text 1"/>
           <p:cNvSpPr/>
           <p:nvPr/>
         </p:nvSpPr>
         <p:spPr>
           <a:xfrm>
             <a:off x="530280" y="311040"/>
-            <a:ext cx="10881000" cy="548280"/>
+            <a:ext cx="10880640" cy="547920"/>
           </a:xfrm>
           <a:prstGeom prst="rect">
             <a:avLst/>
@@ -15527,14 +15855,14 @@
       </p:sp>
       <p:sp>
         <p:nvSpPr>
-          <p:cNvPr id="147" name="Shape 2"/>
+          <p:cNvPr id="141" name="Shape 2"/>
           <p:cNvSpPr/>
           <p:nvPr/>
         </p:nvSpPr>
         <p:spPr>
           <a:xfrm>
             <a:off x="530280" y="951120"/>
-            <a:ext cx="11100600" cy="31680"/>
+            <a:ext cx="11100240" cy="31320"/>
           </a:xfrm>
           <a:prstGeom prst="rect">
             <a:avLst/>
@@ -15547,6 +15875,8 @@
               <a:srgbClr val="ee791f"/>
             </a:solidFill>
             <a:round/>
+            <a:headEnd len="med" type="triangle" w="med"/>
+            <a:tailEnd len="med" type="triangle" w="med"/>
           </a:ln>
         </p:spPr>
         <p:style>
@@ -15560,6 +15890,11 @@
             <a:noAutofit/>
           </a:bodyPr>
           <a:p>
+            <a:pPr>
+              <a:lnSpc>
+                <a:spcPct val="100000"/>
+              </a:lnSpc>
+            </a:pPr>
             <a:endParaRPr b="0" lang="en-US" sz="1800" strike="noStrike" u="none">
               <a:solidFill>
                 <a:srgbClr val="ffffff"/>
@@ -15573,14 +15908,14 @@
       </p:sp>
       <p:sp>
         <p:nvSpPr>
-          <p:cNvPr id="148" name="Text 3"/>
+          <p:cNvPr id="142" name="Text 3"/>
           <p:cNvSpPr/>
           <p:nvPr/>
         </p:nvSpPr>
         <p:spPr>
           <a:xfrm>
             <a:off x="548640" y="6473880"/>
-            <a:ext cx="9143640" cy="200880"/>
+            <a:ext cx="9143280" cy="200520"/>
           </a:xfrm>
           <a:prstGeom prst="rect">
             <a:avLst/>
@@ -15634,14 +15969,14 @@
       </p:sp>
       <p:sp>
         <p:nvSpPr>
-          <p:cNvPr id="149" name="Text 4"/>
+          <p:cNvPr id="143" name="Text 4"/>
           <p:cNvSpPr/>
           <p:nvPr/>
         </p:nvSpPr>
         <p:spPr>
           <a:xfrm>
             <a:off x="11018520" y="6473880"/>
-            <a:ext cx="511560" cy="200880"/>
+            <a:ext cx="511200" cy="200520"/>
           </a:xfrm>
           <a:prstGeom prst="rect">
             <a:avLst/>
@@ -15695,14 +16030,14 @@
       </p:sp>
       <p:sp>
         <p:nvSpPr>
-          <p:cNvPr id="150" name="Shape 5"/>
+          <p:cNvPr id="144" name="Shape 5"/>
           <p:cNvSpPr/>
           <p:nvPr/>
         </p:nvSpPr>
         <p:spPr>
           <a:xfrm>
             <a:off x="640080" y="1362600"/>
-            <a:ext cx="10862640" cy="1060200"/>
+            <a:ext cx="10862280" cy="1059840"/>
           </a:xfrm>
           <a:prstGeom prst="roundRect">
             <a:avLst>
@@ -15717,6 +16052,8 @@
               <a:srgbClr val="eaf4fa"/>
             </a:solidFill>
             <a:round/>
+            <a:headEnd len="med" type="triangle" w="med"/>
+            <a:tailEnd len="med" type="triangle" w="med"/>
           </a:ln>
         </p:spPr>
         <p:style>
@@ -15730,6 +16067,11 @@
             <a:noAutofit/>
           </a:bodyPr>
           <a:p>
+            <a:pPr>
+              <a:lnSpc>
+                <a:spcPct val="100000"/>
+              </a:lnSpc>
+            </a:pPr>
             <a:endParaRPr b="0" lang="en-US" sz="1800" strike="noStrike" u="none">
               <a:solidFill>
                 <a:srgbClr val="000000"/>
@@ -15743,14 +16085,14 @@
       </p:sp>
       <p:sp>
         <p:nvSpPr>
-          <p:cNvPr id="151" name="Text 6"/>
+          <p:cNvPr id="145" name="Text 6"/>
           <p:cNvSpPr/>
           <p:nvPr/>
         </p:nvSpPr>
         <p:spPr>
           <a:xfrm>
             <a:off x="850320" y="1490400"/>
-            <a:ext cx="1270800" cy="310680"/>
+            <a:ext cx="1270440" cy="310320"/>
           </a:xfrm>
           <a:prstGeom prst="rect">
             <a:avLst/>
@@ -15804,14 +16146,14 @@
       </p:sp>
       <p:sp>
         <p:nvSpPr>
-          <p:cNvPr id="152" name="Text 7"/>
+          <p:cNvPr id="146" name="Text 7"/>
           <p:cNvSpPr/>
           <p:nvPr/>
         </p:nvSpPr>
         <p:spPr>
           <a:xfrm>
             <a:off x="2404800" y="1472040"/>
-            <a:ext cx="5101920" cy="347040"/>
+            <a:ext cx="5101560" cy="346680"/>
           </a:xfrm>
           <a:prstGeom prst="rect">
             <a:avLst/>
@@ -15865,14 +16207,14 @@
       </p:sp>
       <p:sp>
         <p:nvSpPr>
-          <p:cNvPr id="153" name="Text 8"/>
+          <p:cNvPr id="147" name="Text 8"/>
           <p:cNvSpPr/>
           <p:nvPr/>
         </p:nvSpPr>
         <p:spPr>
           <a:xfrm>
             <a:off x="2423160" y="1920240"/>
-            <a:ext cx="8668080" cy="347040"/>
+            <a:ext cx="8667720" cy="346680"/>
           </a:xfrm>
           <a:prstGeom prst="rect">
             <a:avLst/>
@@ -15926,14 +16268,14 @@
       </p:sp>
       <p:sp>
         <p:nvSpPr>
-          <p:cNvPr id="154" name="Shape 9"/>
+          <p:cNvPr id="148" name="Shape 9"/>
           <p:cNvSpPr/>
           <p:nvPr/>
         </p:nvSpPr>
         <p:spPr>
           <a:xfrm>
             <a:off x="640080" y="2670120"/>
-            <a:ext cx="10862640" cy="1060200"/>
+            <a:ext cx="10862280" cy="1059840"/>
           </a:xfrm>
           <a:prstGeom prst="roundRect">
             <a:avLst>
@@ -15948,6 +16290,8 @@
               <a:srgbClr val="f2f6fa"/>
             </a:solidFill>
             <a:round/>
+            <a:headEnd len="med" type="triangle" w="med"/>
+            <a:tailEnd len="med" type="triangle" w="med"/>
           </a:ln>
         </p:spPr>
         <p:style>
@@ -15961,6 +16305,11 @@
             <a:noAutofit/>
           </a:bodyPr>
           <a:p>
+            <a:pPr>
+              <a:lnSpc>
+                <a:spcPct val="100000"/>
+              </a:lnSpc>
+            </a:pPr>
             <a:endParaRPr b="0" lang="en-US" sz="1800" strike="noStrike" u="none">
               <a:solidFill>
                 <a:srgbClr val="000000"/>
@@ -15974,14 +16323,14 @@
       </p:sp>
       <p:sp>
         <p:nvSpPr>
-          <p:cNvPr id="155" name="Text 10"/>
+          <p:cNvPr id="149" name="Text 10"/>
           <p:cNvSpPr/>
           <p:nvPr/>
         </p:nvSpPr>
         <p:spPr>
           <a:xfrm>
             <a:off x="850320" y="2797920"/>
-            <a:ext cx="1270800" cy="310680"/>
+            <a:ext cx="1270440" cy="310320"/>
           </a:xfrm>
           <a:prstGeom prst="rect">
             <a:avLst/>
@@ -16035,14 +16384,14 @@
       </p:sp>
       <p:sp>
         <p:nvSpPr>
-          <p:cNvPr id="156" name="Text 11"/>
+          <p:cNvPr id="150" name="Text 11"/>
           <p:cNvSpPr/>
           <p:nvPr/>
         </p:nvSpPr>
         <p:spPr>
           <a:xfrm>
             <a:off x="2404800" y="2779920"/>
-            <a:ext cx="5101920" cy="347040"/>
+            <a:ext cx="5101560" cy="346680"/>
           </a:xfrm>
           <a:prstGeom prst="rect">
             <a:avLst/>
@@ -16096,14 +16445,14 @@
       </p:sp>
       <p:sp>
         <p:nvSpPr>
-          <p:cNvPr id="157" name="Text 12"/>
+          <p:cNvPr id="151" name="Text 12"/>
           <p:cNvSpPr/>
           <p:nvPr/>
         </p:nvSpPr>
         <p:spPr>
           <a:xfrm>
             <a:off x="2423160" y="3227760"/>
-            <a:ext cx="8668080" cy="347040"/>
+            <a:ext cx="8667720" cy="346680"/>
           </a:xfrm>
           <a:prstGeom prst="rect">
             <a:avLst/>
@@ -16157,14 +16506,14 @@
       </p:sp>
       <p:sp>
         <p:nvSpPr>
-          <p:cNvPr id="158" name="Shape 13"/>
+          <p:cNvPr id="152" name="Shape 13"/>
           <p:cNvSpPr/>
           <p:nvPr/>
         </p:nvSpPr>
         <p:spPr>
           <a:xfrm>
             <a:off x="640080" y="3977640"/>
-            <a:ext cx="10862640" cy="1060200"/>
+            <a:ext cx="10862280" cy="1059840"/>
           </a:xfrm>
           <a:prstGeom prst="roundRect">
             <a:avLst>
@@ -16179,6 +16528,8 @@
               <a:srgbClr val="eaf4fa"/>
             </a:solidFill>
             <a:round/>
+            <a:headEnd len="med" type="triangle" w="med"/>
+            <a:tailEnd len="med" type="triangle" w="med"/>
           </a:ln>
         </p:spPr>
         <p:style>
@@ -16192,6 +16543,11 @@
             <a:noAutofit/>
           </a:bodyPr>
           <a:p>
+            <a:pPr>
+              <a:lnSpc>
+                <a:spcPct val="100000"/>
+              </a:lnSpc>
+            </a:pPr>
             <a:endParaRPr b="0" lang="en-US" sz="1800" strike="noStrike" u="none">
               <a:solidFill>
                 <a:srgbClr val="000000"/>
@@ -16205,14 +16561,14 @@
       </p:sp>
       <p:sp>
         <p:nvSpPr>
-          <p:cNvPr id="159" name="Text 14"/>
+          <p:cNvPr id="153" name="Text 14"/>
           <p:cNvSpPr/>
           <p:nvPr/>
         </p:nvSpPr>
         <p:spPr>
           <a:xfrm>
             <a:off x="850320" y="4105800"/>
-            <a:ext cx="1270800" cy="310680"/>
+            <a:ext cx="1270440" cy="310320"/>
           </a:xfrm>
           <a:prstGeom prst="rect">
             <a:avLst/>
@@ -16266,14 +16622,14 @@
       </p:sp>
       <p:sp>
         <p:nvSpPr>
-          <p:cNvPr id="160" name="Text 15"/>
+          <p:cNvPr id="154" name="Text 15"/>
           <p:cNvSpPr/>
           <p:nvPr/>
         </p:nvSpPr>
         <p:spPr>
           <a:xfrm>
             <a:off x="2404800" y="4087440"/>
-            <a:ext cx="5101920" cy="347040"/>
+            <a:ext cx="5101560" cy="346680"/>
           </a:xfrm>
           <a:prstGeom prst="rect">
             <a:avLst/>
@@ -16327,14 +16683,14 @@
       </p:sp>
       <p:sp>
         <p:nvSpPr>
-          <p:cNvPr id="161" name="Text 16"/>
+          <p:cNvPr id="155" name="Text 16"/>
           <p:cNvSpPr/>
           <p:nvPr/>
         </p:nvSpPr>
         <p:spPr>
           <a:xfrm>
             <a:off x="2423160" y="4535280"/>
-            <a:ext cx="8668080" cy="347040"/>
+            <a:ext cx="8667720" cy="346680"/>
           </a:xfrm>
           <a:prstGeom prst="rect">
             <a:avLst/>
@@ -16388,14 +16744,14 @@
       </p:sp>
       <p:sp>
         <p:nvSpPr>
-          <p:cNvPr id="162" name="Text 17"/>
+          <p:cNvPr id="156" name="Text 17"/>
           <p:cNvSpPr/>
           <p:nvPr/>
         </p:nvSpPr>
         <p:spPr>
           <a:xfrm>
             <a:off x="749880" y="5678280"/>
-            <a:ext cx="10698120" cy="502560"/>
+            <a:ext cx="10697760" cy="502200"/>
           </a:xfrm>
           <a:prstGeom prst="rect">
             <a:avLst/>
@@ -16486,14 +16842,14 @@
       </p:grpSpPr>
       <p:sp>
         <p:nvSpPr>
-          <p:cNvPr id="163" name="Shape 0"/>
+          <p:cNvPr id="157" name="Shape 0"/>
           <p:cNvSpPr/>
           <p:nvPr/>
         </p:nvSpPr>
         <p:spPr>
           <a:xfrm>
             <a:off x="0" y="0"/>
-            <a:ext cx="12191400" cy="109440"/>
+            <a:ext cx="12191040" cy="109080"/>
           </a:xfrm>
           <a:prstGeom prst="rect">
             <a:avLst/>
@@ -16506,6 +16862,8 @@
               <a:srgbClr val="ee791f"/>
             </a:solidFill>
             <a:round/>
+            <a:headEnd len="med" type="triangle" w="med"/>
+            <a:tailEnd len="med" type="triangle" w="med"/>
           </a:ln>
         </p:spPr>
         <p:style>
@@ -16519,6 +16877,11 @@
             <a:noAutofit/>
           </a:bodyPr>
           <a:p>
+            <a:pPr>
+              <a:lnSpc>
+                <a:spcPct val="100000"/>
+              </a:lnSpc>
+            </a:pPr>
             <a:endParaRPr b="0" lang="en-US" sz="1800" strike="noStrike" u="none">
               <a:solidFill>
                 <a:srgbClr val="ffffff"/>
@@ -16532,14 +16895,14 @@
       </p:sp>
       <p:sp>
         <p:nvSpPr>
-          <p:cNvPr id="164" name="Text 1"/>
+          <p:cNvPr id="158" name="Text 1"/>
           <p:cNvSpPr/>
           <p:nvPr/>
         </p:nvSpPr>
         <p:spPr>
           <a:xfrm>
             <a:off x="530280" y="311040"/>
-            <a:ext cx="10881000" cy="548280"/>
+            <a:ext cx="10880640" cy="547920"/>
           </a:xfrm>
           <a:prstGeom prst="rect">
             <a:avLst/>
@@ -16593,14 +16956,14 @@
       </p:sp>
       <p:sp>
         <p:nvSpPr>
-          <p:cNvPr id="165" name="Shape 2"/>
+          <p:cNvPr id="159" name="Shape 2"/>
           <p:cNvSpPr/>
           <p:nvPr/>
         </p:nvSpPr>
         <p:spPr>
           <a:xfrm>
             <a:off x="530280" y="951120"/>
-            <a:ext cx="11100600" cy="31680"/>
+            <a:ext cx="11100240" cy="31320"/>
           </a:xfrm>
           <a:prstGeom prst="rect">
             <a:avLst/>
@@ -16613,6 +16976,8 @@
               <a:srgbClr val="ee791f"/>
             </a:solidFill>
             <a:round/>
+            <a:headEnd len="med" type="triangle" w="med"/>
+            <a:tailEnd len="med" type="triangle" w="med"/>
           </a:ln>
         </p:spPr>
         <p:style>
@@ -16626,6 +16991,11 @@
             <a:noAutofit/>
           </a:bodyPr>
           <a:p>
+            <a:pPr>
+              <a:lnSpc>
+                <a:spcPct val="100000"/>
+              </a:lnSpc>
+            </a:pPr>
             <a:endParaRPr b="0" lang="en-US" sz="1800" strike="noStrike" u="none">
               <a:solidFill>
                 <a:srgbClr val="ffffff"/>
@@ -16639,14 +17009,14 @@
       </p:sp>
       <p:sp>
         <p:nvSpPr>
-          <p:cNvPr id="166" name="Text 3"/>
+          <p:cNvPr id="160" name="Text 3"/>
           <p:cNvSpPr/>
           <p:nvPr/>
         </p:nvSpPr>
         <p:spPr>
           <a:xfrm>
             <a:off x="548640" y="6473880"/>
-            <a:ext cx="9143640" cy="200880"/>
+            <a:ext cx="9143280" cy="200520"/>
           </a:xfrm>
           <a:prstGeom prst="rect">
             <a:avLst/>
@@ -16700,14 +17070,14 @@
       </p:sp>
       <p:sp>
         <p:nvSpPr>
-          <p:cNvPr id="167" name="Text 4"/>
+          <p:cNvPr id="161" name="Text 4"/>
           <p:cNvSpPr/>
           <p:nvPr/>
         </p:nvSpPr>
         <p:spPr>
           <a:xfrm>
             <a:off x="11018520" y="6473880"/>
-            <a:ext cx="511560" cy="200880"/>
+            <a:ext cx="511200" cy="200520"/>
           </a:xfrm>
           <a:prstGeom prst="rect">
             <a:avLst/>
@@ -16761,14 +17131,14 @@
       </p:sp>
       <p:sp>
         <p:nvSpPr>
-          <p:cNvPr id="168" name="Shape 5"/>
+          <p:cNvPr id="162" name="Shape 5"/>
           <p:cNvSpPr/>
           <p:nvPr/>
         </p:nvSpPr>
         <p:spPr>
           <a:xfrm>
             <a:off x="603360" y="1188720"/>
-            <a:ext cx="10999800" cy="1508400"/>
+            <a:ext cx="10999440" cy="1508040"/>
           </a:xfrm>
           <a:prstGeom prst="roundRect">
             <a:avLst>
@@ -16783,6 +17153,8 @@
               <a:srgbClr val="11233b"/>
             </a:solidFill>
             <a:round/>
+            <a:headEnd len="med" type="triangle" w="med"/>
+            <a:tailEnd len="med" type="triangle" w="med"/>
           </a:ln>
         </p:spPr>
         <p:style>
@@ -16796,6 +17168,11 @@
             <a:noAutofit/>
           </a:bodyPr>
           <a:p>
+            <a:pPr>
+              <a:lnSpc>
+                <a:spcPct val="100000"/>
+              </a:lnSpc>
+            </a:pPr>
             <a:endParaRPr b="0" lang="en-US" sz="1800" strike="noStrike" u="none">
               <a:solidFill>
                 <a:srgbClr val="ffffff"/>
@@ -16809,14 +17186,14 @@
       </p:sp>
       <p:sp>
         <p:nvSpPr>
-          <p:cNvPr id="169" name="Text 6"/>
+          <p:cNvPr id="163" name="Text 6"/>
           <p:cNvSpPr/>
           <p:nvPr/>
         </p:nvSpPr>
         <p:spPr>
           <a:xfrm>
             <a:off x="786240" y="1298520"/>
-            <a:ext cx="10652400" cy="1325520"/>
+            <a:ext cx="10652040" cy="1325160"/>
           </a:xfrm>
           <a:prstGeom prst="rect">
             <a:avLst/>
@@ -16990,14 +17367,14 @@
       </p:sp>
       <p:sp>
         <p:nvSpPr>
-          <p:cNvPr id="170" name="Shape 7"/>
+          <p:cNvPr id="164" name="Shape 7"/>
           <p:cNvSpPr/>
           <p:nvPr/>
         </p:nvSpPr>
         <p:spPr>
           <a:xfrm>
             <a:off x="631080" y="2907720"/>
-            <a:ext cx="10917720" cy="914040"/>
+            <a:ext cx="10917360" cy="913680"/>
           </a:xfrm>
           <a:prstGeom prst="roundRect">
             <a:avLst>
@@ -17012,6 +17389,8 @@
               <a:srgbClr val="edf5f8"/>
             </a:solidFill>
             <a:round/>
+            <a:headEnd len="med" type="triangle" w="med"/>
+            <a:tailEnd len="med" type="triangle" w="med"/>
           </a:ln>
         </p:spPr>
         <p:style>
@@ -17025,6 +17404,11 @@
             <a:noAutofit/>
           </a:bodyPr>
           <a:p>
+            <a:pPr>
+              <a:lnSpc>
+                <a:spcPct val="100000"/>
+              </a:lnSpc>
+            </a:pPr>
             <a:endParaRPr b="0" lang="en-US" sz="1800" strike="noStrike" u="none">
               <a:solidFill>
                 <a:srgbClr val="000000"/>
@@ -17038,14 +17422,14 @@
       </p:sp>
       <p:sp>
         <p:nvSpPr>
-          <p:cNvPr id="171" name="Text 8"/>
+          <p:cNvPr id="165" name="Text 8"/>
           <p:cNvSpPr/>
           <p:nvPr/>
         </p:nvSpPr>
         <p:spPr>
           <a:xfrm>
             <a:off x="804600" y="3017520"/>
-            <a:ext cx="2011320" cy="273960"/>
+            <a:ext cx="2010960" cy="273600"/>
           </a:xfrm>
           <a:prstGeom prst="rect">
             <a:avLst/>
@@ -17099,14 +17483,14 @@
       </p:sp>
       <p:sp>
         <p:nvSpPr>
-          <p:cNvPr id="172" name="Text 9"/>
+          <p:cNvPr id="166" name="Text 9"/>
           <p:cNvSpPr/>
           <p:nvPr/>
         </p:nvSpPr>
         <p:spPr>
           <a:xfrm>
             <a:off x="2752200" y="2990160"/>
-            <a:ext cx="8412120" cy="282960"/>
+            <a:ext cx="8411760" cy="282600"/>
           </a:xfrm>
           <a:prstGeom prst="rect">
             <a:avLst/>
@@ -17160,14 +17544,14 @@
       </p:sp>
       <p:sp>
         <p:nvSpPr>
-          <p:cNvPr id="173" name="Text 10"/>
+          <p:cNvPr id="167" name="Text 10"/>
           <p:cNvSpPr/>
           <p:nvPr/>
         </p:nvSpPr>
         <p:spPr>
           <a:xfrm>
             <a:off x="2761560" y="3319200"/>
-            <a:ext cx="8476200" cy="383760"/>
+            <a:ext cx="8475840" cy="383400"/>
           </a:xfrm>
           <a:prstGeom prst="rect">
             <a:avLst/>
@@ -17251,14 +17635,14 @@
       </p:sp>
       <p:sp>
         <p:nvSpPr>
-          <p:cNvPr id="174" name="Shape 11"/>
+          <p:cNvPr id="168" name="Shape 11"/>
           <p:cNvSpPr/>
           <p:nvPr/>
         </p:nvSpPr>
         <p:spPr>
           <a:xfrm>
             <a:off x="631080" y="3913560"/>
-            <a:ext cx="10917720" cy="914040"/>
+            <a:ext cx="10917360" cy="913680"/>
           </a:xfrm>
           <a:prstGeom prst="roundRect">
             <a:avLst>
@@ -17273,6 +17657,8 @@
               <a:srgbClr val="f2f6fa"/>
             </a:solidFill>
             <a:round/>
+            <a:headEnd len="med" type="triangle" w="med"/>
+            <a:tailEnd len="med" type="triangle" w="med"/>
           </a:ln>
         </p:spPr>
         <p:style>
@@ -17286,6 +17672,11 @@
             <a:noAutofit/>
           </a:bodyPr>
           <a:p>
+            <a:pPr>
+              <a:lnSpc>
+                <a:spcPct val="100000"/>
+              </a:lnSpc>
+            </a:pPr>
             <a:endParaRPr b="0" lang="en-US" sz="1800" strike="noStrike" u="none">
               <a:solidFill>
                 <a:srgbClr val="000000"/>
@@ -17299,14 +17690,14 @@
       </p:sp>
       <p:sp>
         <p:nvSpPr>
-          <p:cNvPr id="175" name="Text 12"/>
+          <p:cNvPr id="169" name="Text 12"/>
           <p:cNvSpPr/>
           <p:nvPr/>
         </p:nvSpPr>
         <p:spPr>
           <a:xfrm>
             <a:off x="804600" y="4023360"/>
-            <a:ext cx="2011320" cy="273960"/>
+            <a:ext cx="2010960" cy="273600"/>
           </a:xfrm>
           <a:prstGeom prst="rect">
             <a:avLst/>
@@ -17360,14 +17751,14 @@
       </p:sp>
       <p:sp>
         <p:nvSpPr>
-          <p:cNvPr id="176" name="Text 13"/>
+          <p:cNvPr id="170" name="Text 13"/>
           <p:cNvSpPr/>
           <p:nvPr/>
         </p:nvSpPr>
         <p:spPr>
           <a:xfrm>
             <a:off x="2752200" y="3996000"/>
-            <a:ext cx="8412120" cy="282960"/>
+            <a:ext cx="8411760" cy="282600"/>
           </a:xfrm>
           <a:prstGeom prst="rect">
             <a:avLst/>
@@ -17421,14 +17812,14 @@
       </p:sp>
       <p:sp>
         <p:nvSpPr>
-          <p:cNvPr id="177" name="Text 14"/>
+          <p:cNvPr id="171" name="Text 14"/>
           <p:cNvSpPr/>
           <p:nvPr/>
         </p:nvSpPr>
         <p:spPr>
           <a:xfrm>
             <a:off x="2761560" y="4325040"/>
-            <a:ext cx="8476200" cy="383760"/>
+            <a:ext cx="8475840" cy="383400"/>
           </a:xfrm>
           <a:prstGeom prst="rect">
             <a:avLst/>
@@ -17512,14 +17903,14 @@
       </p:sp>
       <p:sp>
         <p:nvSpPr>
-          <p:cNvPr id="178" name="Shape 15"/>
+          <p:cNvPr id="172" name="Shape 15"/>
           <p:cNvSpPr/>
           <p:nvPr/>
         </p:nvSpPr>
         <p:spPr>
           <a:xfrm>
             <a:off x="631080" y="4919400"/>
-            <a:ext cx="10917720" cy="914040"/>
+            <a:ext cx="10917360" cy="913680"/>
           </a:xfrm>
           <a:prstGeom prst="roundRect">
             <a:avLst>
@@ -17534,6 +17925,8 @@
               <a:srgbClr val="edf5f8"/>
             </a:solidFill>
             <a:round/>
+            <a:headEnd len="med" type="triangle" w="med"/>
+            <a:tailEnd len="med" type="triangle" w="med"/>
           </a:ln>
         </p:spPr>
         <p:style>
@@ -17547,6 +17940,11 @@
             <a:noAutofit/>
           </a:bodyPr>
           <a:p>
+            <a:pPr>
+              <a:lnSpc>
+                <a:spcPct val="100000"/>
+              </a:lnSpc>
+            </a:pPr>
             <a:endParaRPr b="0" lang="en-US" sz="1800" strike="noStrike" u="none">
               <a:solidFill>
                 <a:srgbClr val="000000"/>
@@ -17560,14 +17958,14 @@
       </p:sp>
       <p:sp>
         <p:nvSpPr>
-          <p:cNvPr id="179" name="Text 16"/>
+          <p:cNvPr id="173" name="Text 16"/>
           <p:cNvSpPr/>
           <p:nvPr/>
         </p:nvSpPr>
         <p:spPr>
           <a:xfrm>
             <a:off x="804600" y="5029200"/>
-            <a:ext cx="2011320" cy="273960"/>
+            <a:ext cx="2010960" cy="273600"/>
           </a:xfrm>
           <a:prstGeom prst="rect">
             <a:avLst/>
@@ -17621,14 +18019,14 @@
       </p:sp>
       <p:sp>
         <p:nvSpPr>
-          <p:cNvPr id="180" name="Text 17"/>
+          <p:cNvPr id="174" name="Text 17"/>
           <p:cNvSpPr/>
           <p:nvPr/>
         </p:nvSpPr>
         <p:spPr>
           <a:xfrm>
             <a:off x="2752200" y="5001840"/>
-            <a:ext cx="8412120" cy="282960"/>
+            <a:ext cx="8411760" cy="282600"/>
           </a:xfrm>
           <a:prstGeom prst="rect">
             <a:avLst/>
@@ -17682,14 +18080,14 @@
       </p:sp>
       <p:sp>
         <p:nvSpPr>
-          <p:cNvPr id="181" name="Text 18"/>
+          <p:cNvPr id="175" name="Text 18"/>
           <p:cNvSpPr/>
           <p:nvPr/>
         </p:nvSpPr>
         <p:spPr>
           <a:xfrm>
             <a:off x="2761560" y="5330880"/>
-            <a:ext cx="8476200" cy="383760"/>
+            <a:ext cx="8475840" cy="383400"/>
           </a:xfrm>
           <a:prstGeom prst="rect">
             <a:avLst/>
@@ -17810,14 +18208,14 @@
       </p:grpSpPr>
       <p:sp>
         <p:nvSpPr>
-          <p:cNvPr id="182" name="Shape 0"/>
+          <p:cNvPr id="176" name="Shape 0"/>
           <p:cNvSpPr/>
           <p:nvPr/>
         </p:nvSpPr>
         <p:spPr>
           <a:xfrm>
             <a:off x="0" y="0"/>
-            <a:ext cx="12191400" cy="109440"/>
+            <a:ext cx="12191040" cy="109080"/>
           </a:xfrm>
           <a:prstGeom prst="rect">
             <a:avLst/>
@@ -17830,6 +18228,8 @@
               <a:srgbClr val="ee791f"/>
             </a:solidFill>
             <a:round/>
+            <a:headEnd len="med" type="triangle" w="med"/>
+            <a:tailEnd len="med" type="triangle" w="med"/>
           </a:ln>
         </p:spPr>
         <p:style>
@@ -17843,6 +18243,11 @@
             <a:noAutofit/>
           </a:bodyPr>
           <a:p>
+            <a:pPr>
+              <a:lnSpc>
+                <a:spcPct val="100000"/>
+              </a:lnSpc>
+            </a:pPr>
             <a:endParaRPr b="0" lang="en-US" sz="1800" strike="noStrike" u="none">
               <a:solidFill>
                 <a:srgbClr val="ffffff"/>
@@ -17856,14 +18261,14 @@
       </p:sp>
       <p:sp>
         <p:nvSpPr>
-          <p:cNvPr id="183" name="Text 1"/>
+          <p:cNvPr id="177" name="Text 1"/>
           <p:cNvSpPr/>
           <p:nvPr/>
         </p:nvSpPr>
         <p:spPr>
           <a:xfrm>
             <a:off x="530280" y="311040"/>
-            <a:ext cx="10881000" cy="548280"/>
+            <a:ext cx="10880640" cy="547920"/>
           </a:xfrm>
           <a:prstGeom prst="rect">
             <a:avLst/>
@@ -17917,14 +18322,14 @@
       </p:sp>
       <p:sp>
         <p:nvSpPr>
-          <p:cNvPr id="184" name="Shape 2"/>
+          <p:cNvPr id="178" name="Shape 2"/>
           <p:cNvSpPr/>
           <p:nvPr/>
         </p:nvSpPr>
         <p:spPr>
           <a:xfrm>
             <a:off x="530280" y="951120"/>
-            <a:ext cx="11100600" cy="31680"/>
+            <a:ext cx="11100240" cy="31320"/>
           </a:xfrm>
           <a:prstGeom prst="rect">
             <a:avLst/>
@@ -17937,6 +18342,8 @@
               <a:srgbClr val="ee791f"/>
             </a:solidFill>
             <a:round/>
+            <a:headEnd len="med" type="triangle" w="med"/>
+            <a:tailEnd len="med" type="triangle" w="med"/>
           </a:ln>
         </p:spPr>
         <p:style>
@@ -17950,6 +18357,11 @@
             <a:noAutofit/>
           </a:bodyPr>
           <a:p>
+            <a:pPr>
+              <a:lnSpc>
+                <a:spcPct val="100000"/>
+              </a:lnSpc>
+            </a:pPr>
             <a:endParaRPr b="0" lang="en-US" sz="1800" strike="noStrike" u="none">
               <a:solidFill>
                 <a:srgbClr val="ffffff"/>
@@ -17963,14 +18375,14 @@
       </p:sp>
       <p:sp>
         <p:nvSpPr>
-          <p:cNvPr id="185" name="Text 3"/>
+          <p:cNvPr id="179" name="Text 3"/>
           <p:cNvSpPr/>
           <p:nvPr/>
         </p:nvSpPr>
         <p:spPr>
           <a:xfrm>
             <a:off x="548640" y="6473880"/>
-            <a:ext cx="9143640" cy="200880"/>
+            <a:ext cx="9143280" cy="200520"/>
           </a:xfrm>
           <a:prstGeom prst="rect">
             <a:avLst/>
@@ -18024,14 +18436,14 @@
       </p:sp>
       <p:sp>
         <p:nvSpPr>
-          <p:cNvPr id="186" name="Text 4"/>
+          <p:cNvPr id="180" name="Text 4"/>
           <p:cNvSpPr/>
           <p:nvPr/>
         </p:nvSpPr>
         <p:spPr>
           <a:xfrm>
             <a:off x="11018520" y="6473880"/>
-            <a:ext cx="511560" cy="200880"/>
+            <a:ext cx="511200" cy="200520"/>
           </a:xfrm>
           <a:prstGeom prst="rect">
             <a:avLst/>
@@ -18085,14 +18497,14 @@
       </p:sp>
       <p:sp>
         <p:nvSpPr>
-          <p:cNvPr id="187" name="Shape 5"/>
+          <p:cNvPr id="181" name="Shape 5"/>
           <p:cNvSpPr/>
           <p:nvPr/>
         </p:nvSpPr>
         <p:spPr>
           <a:xfrm>
             <a:off x="786240" y="1454040"/>
-            <a:ext cx="77400" cy="77400"/>
+            <a:ext cx="77040" cy="77040"/>
           </a:xfrm>
           <a:prstGeom prst="roundRect">
             <a:avLst>
@@ -18107,6 +18519,8 @@
               <a:srgbClr val="ee791f"/>
             </a:solidFill>
             <a:round/>
+            <a:headEnd len="med" type="triangle" w="med"/>
+            <a:tailEnd len="med" type="triangle" w="med"/>
           </a:ln>
         </p:spPr>
         <p:style>
@@ -18120,6 +18534,11 @@
             <a:noAutofit/>
           </a:bodyPr>
           <a:p>
+            <a:pPr>
+              <a:lnSpc>
+                <a:spcPct val="100000"/>
+              </a:lnSpc>
+            </a:pPr>
             <a:endParaRPr b="0" lang="en-US" sz="1800" strike="noStrike" u="none">
               <a:solidFill>
                 <a:srgbClr val="ffffff"/>
@@ -18133,14 +18552,14 @@
       </p:sp>
       <p:sp>
         <p:nvSpPr>
-          <p:cNvPr id="188" name="Text 6"/>
+          <p:cNvPr id="182" name="Text 6"/>
           <p:cNvSpPr/>
           <p:nvPr/>
         </p:nvSpPr>
         <p:spPr>
           <a:xfrm>
             <a:off x="1033200" y="1334880"/>
-            <a:ext cx="10305000" cy="456840"/>
+            <a:ext cx="10304640" cy="456480"/>
           </a:xfrm>
           <a:prstGeom prst="rect">
             <a:avLst/>
@@ -18194,14 +18613,14 @@
       </p:sp>
       <p:sp>
         <p:nvSpPr>
-          <p:cNvPr id="189" name="Shape 7"/>
+          <p:cNvPr id="183" name="Shape 7"/>
           <p:cNvSpPr/>
           <p:nvPr/>
         </p:nvSpPr>
         <p:spPr>
           <a:xfrm>
             <a:off x="786240" y="2286000"/>
-            <a:ext cx="77400" cy="77400"/>
+            <a:ext cx="77040" cy="77040"/>
           </a:xfrm>
           <a:prstGeom prst="roundRect">
             <a:avLst>
@@ -18216,6 +18635,8 @@
               <a:srgbClr val="ee791f"/>
             </a:solidFill>
             <a:round/>
+            <a:headEnd len="med" type="triangle" w="med"/>
+            <a:tailEnd len="med" type="triangle" w="med"/>
           </a:ln>
         </p:spPr>
         <p:style>
@@ -18229,6 +18650,11 @@
             <a:noAutofit/>
           </a:bodyPr>
           <a:p>
+            <a:pPr>
+              <a:lnSpc>
+                <a:spcPct val="100000"/>
+              </a:lnSpc>
+            </a:pPr>
             <a:endParaRPr b="0" lang="en-US" sz="1800" strike="noStrike" u="none">
               <a:solidFill>
                 <a:srgbClr val="ffffff"/>
@@ -18242,14 +18668,14 @@
       </p:sp>
       <p:sp>
         <p:nvSpPr>
-          <p:cNvPr id="190" name="Text 8"/>
+          <p:cNvPr id="184" name="Text 8"/>
           <p:cNvSpPr/>
           <p:nvPr/>
         </p:nvSpPr>
         <p:spPr>
           <a:xfrm>
             <a:off x="1033200" y="2167200"/>
-            <a:ext cx="10305000" cy="456840"/>
+            <a:ext cx="10304640" cy="456480"/>
           </a:xfrm>
           <a:prstGeom prst="rect">
             <a:avLst/>
@@ -18303,14 +18729,14 @@
       </p:sp>
       <p:sp>
         <p:nvSpPr>
-          <p:cNvPr id="191" name="Shape 9"/>
+          <p:cNvPr id="185" name="Shape 9"/>
           <p:cNvSpPr/>
           <p:nvPr/>
         </p:nvSpPr>
         <p:spPr>
           <a:xfrm>
             <a:off x="786240" y="3117960"/>
-            <a:ext cx="77400" cy="77400"/>
+            <a:ext cx="77040" cy="77040"/>
           </a:xfrm>
           <a:prstGeom prst="roundRect">
             <a:avLst>
@@ -18325,6 +18751,8 @@
               <a:srgbClr val="ee791f"/>
             </a:solidFill>
             <a:round/>
+            <a:headEnd len="med" type="triangle" w="med"/>
+            <a:tailEnd len="med" type="triangle" w="med"/>
           </a:ln>
         </p:spPr>
         <p:style>
@@ -18338,6 +18766,11 @@
             <a:noAutofit/>
           </a:bodyPr>
           <a:p>
+            <a:pPr>
+              <a:lnSpc>
+                <a:spcPct val="100000"/>
+              </a:lnSpc>
+            </a:pPr>
             <a:endParaRPr b="0" lang="en-US" sz="1800" strike="noStrike" u="none">
               <a:solidFill>
                 <a:srgbClr val="ffffff"/>
@@ -18351,14 +18784,14 @@
       </p:sp>
       <p:sp>
         <p:nvSpPr>
-          <p:cNvPr id="192" name="Text 10"/>
+          <p:cNvPr id="186" name="Text 10"/>
           <p:cNvSpPr/>
           <p:nvPr/>
         </p:nvSpPr>
         <p:spPr>
           <a:xfrm>
             <a:off x="1033200" y="2999160"/>
-            <a:ext cx="10305000" cy="456840"/>
+            <a:ext cx="10304640" cy="456480"/>
           </a:xfrm>
           <a:prstGeom prst="rect">
             <a:avLst/>
@@ -18412,14 +18845,14 @@
       </p:sp>
       <p:sp>
         <p:nvSpPr>
-          <p:cNvPr id="193" name="Shape 11"/>
+          <p:cNvPr id="187" name="Shape 11"/>
           <p:cNvSpPr/>
           <p:nvPr/>
         </p:nvSpPr>
         <p:spPr>
           <a:xfrm>
             <a:off x="786240" y="3950280"/>
-            <a:ext cx="77400" cy="77400"/>
+            <a:ext cx="77040" cy="77040"/>
           </a:xfrm>
           <a:prstGeom prst="roundRect">
             <a:avLst>
@@ -18434,6 +18867,8 @@
               <a:srgbClr val="ee791f"/>
             </a:solidFill>
             <a:round/>
+            <a:headEnd len="med" type="triangle" w="med"/>
+            <a:tailEnd len="med" type="triangle" w="med"/>
           </a:ln>
         </p:spPr>
         <p:style>
@@ -18447,6 +18882,11 @@
             <a:noAutofit/>
           </a:bodyPr>
           <a:p>
+            <a:pPr>
+              <a:lnSpc>
+                <a:spcPct val="100000"/>
+              </a:lnSpc>
+            </a:pPr>
             <a:endParaRPr b="0" lang="en-US" sz="1800" strike="noStrike" u="none">
               <a:solidFill>
                 <a:srgbClr val="ffffff"/>
@@ -18460,14 +18900,14 @@
       </p:sp>
       <p:sp>
         <p:nvSpPr>
-          <p:cNvPr id="194" name="Text 12"/>
+          <p:cNvPr id="188" name="Text 12"/>
           <p:cNvSpPr/>
           <p:nvPr/>
         </p:nvSpPr>
         <p:spPr>
           <a:xfrm>
             <a:off x="1033200" y="3831480"/>
-            <a:ext cx="10305000" cy="456840"/>
+            <a:ext cx="10304640" cy="456480"/>
           </a:xfrm>
           <a:prstGeom prst="rect">
             <a:avLst/>
@@ -18521,14 +18961,14 @@
       </p:sp>
       <p:sp>
         <p:nvSpPr>
-          <p:cNvPr id="195" name="Shape 13"/>
+          <p:cNvPr id="189" name="Shape 13"/>
           <p:cNvSpPr/>
           <p:nvPr/>
         </p:nvSpPr>
         <p:spPr>
           <a:xfrm>
             <a:off x="713160" y="5230440"/>
-            <a:ext cx="10789560" cy="667080"/>
+            <a:ext cx="10789200" cy="666720"/>
           </a:xfrm>
           <a:prstGeom prst="roundRect">
             <a:avLst>
@@ -18543,6 +18983,8 @@
               <a:srgbClr val="fff1e8"/>
             </a:solidFill>
             <a:round/>
+            <a:headEnd len="med" type="triangle" w="med"/>
+            <a:tailEnd len="med" type="triangle" w="med"/>
           </a:ln>
         </p:spPr>
         <p:style>
@@ -18556,6 +18998,11 @@
             <a:noAutofit/>
           </a:bodyPr>
           <a:p>
+            <a:pPr>
+              <a:lnSpc>
+                <a:spcPct val="100000"/>
+              </a:lnSpc>
+            </a:pPr>
             <a:endParaRPr b="0" lang="en-US" sz="1800" strike="noStrike" u="none">
               <a:solidFill>
                 <a:srgbClr val="000000"/>
@@ -18569,14 +19016,14 @@
       </p:sp>
       <p:sp>
         <p:nvSpPr>
-          <p:cNvPr id="196" name="Text 14"/>
+          <p:cNvPr id="190" name="Text 14"/>
           <p:cNvSpPr/>
           <p:nvPr/>
         </p:nvSpPr>
         <p:spPr>
           <a:xfrm>
             <a:off x="923400" y="5330880"/>
-            <a:ext cx="10323360" cy="465840"/>
+            <a:ext cx="10323000" cy="465480"/>
           </a:xfrm>
           <a:prstGeom prst="rect">
             <a:avLst/>
